--- a/Documentation/E-Commerce Case Study.pptx
+++ b/Documentation/E-Commerce Case Study.pptx
@@ -2,7 +2,7 @@
 <file path=ppt/presentation.xml><?xml version="1.0" encoding="utf-8"?>
 <p:presentation xmlns:a="http://schemas.openxmlformats.org/drawingml/2006/main" xmlns:r="http://schemas.openxmlformats.org/officeDocument/2006/relationships" xmlns:p="http://schemas.openxmlformats.org/presentationml/2006/main" saveSubsetFonts="1">
   <p:sldMasterIdLst>
-    <p:sldMasterId id="2147483707" r:id="rId1"/>
+    <p:sldMasterId id="2147483785" r:id="rId1"/>
   </p:sldMasterIdLst>
   <p:sldIdLst>
     <p:sldId id="256" r:id="rId2"/>
@@ -10,10 +10,13 @@
     <p:sldId id="258" r:id="rId4"/>
     <p:sldId id="259" r:id="rId5"/>
     <p:sldId id="260" r:id="rId6"/>
-    <p:sldId id="262" r:id="rId7"/>
-    <p:sldId id="263" r:id="rId8"/>
-    <p:sldId id="264" r:id="rId9"/>
-    <p:sldId id="266" r:id="rId10"/>
+    <p:sldId id="267" r:id="rId7"/>
+    <p:sldId id="262" r:id="rId8"/>
+    <p:sldId id="263" r:id="rId9"/>
+    <p:sldId id="264" r:id="rId10"/>
+    <p:sldId id="266" r:id="rId11"/>
+    <p:sldId id="268" r:id="rId12"/>
+    <p:sldId id="269" r:id="rId13"/>
   </p:sldIdLst>
   <p:sldSz cx="12192000" cy="6858000"/>
   <p:notesSz cx="6858000" cy="9144000"/>
@@ -21,7 +24,7 @@
     <a:defPPr>
       <a:defRPr lang="en-US"/>
     </a:defPPr>
-    <a:lvl1pPr marL="0" algn="l" defTabSz="914400" rtl="0" eaLnBrk="1" latinLnBrk="0" hangingPunct="1">
+    <a:lvl1pPr marL="0" algn="l" defTabSz="457200" rtl="0" eaLnBrk="1" latinLnBrk="0" hangingPunct="1">
       <a:defRPr sz="1800" kern="1200">
         <a:solidFill>
           <a:schemeClr val="tx1"/>
@@ -31,7 +34,7 @@
         <a:cs typeface="+mn-cs"/>
       </a:defRPr>
     </a:lvl1pPr>
-    <a:lvl2pPr marL="457200" algn="l" defTabSz="914400" rtl="0" eaLnBrk="1" latinLnBrk="0" hangingPunct="1">
+    <a:lvl2pPr marL="457200" algn="l" defTabSz="457200" rtl="0" eaLnBrk="1" latinLnBrk="0" hangingPunct="1">
       <a:defRPr sz="1800" kern="1200">
         <a:solidFill>
           <a:schemeClr val="tx1"/>
@@ -41,7 +44,7 @@
         <a:cs typeface="+mn-cs"/>
       </a:defRPr>
     </a:lvl2pPr>
-    <a:lvl3pPr marL="914400" algn="l" defTabSz="914400" rtl="0" eaLnBrk="1" latinLnBrk="0" hangingPunct="1">
+    <a:lvl3pPr marL="914400" algn="l" defTabSz="457200" rtl="0" eaLnBrk="1" latinLnBrk="0" hangingPunct="1">
       <a:defRPr sz="1800" kern="1200">
         <a:solidFill>
           <a:schemeClr val="tx1"/>
@@ -51,7 +54,7 @@
         <a:cs typeface="+mn-cs"/>
       </a:defRPr>
     </a:lvl3pPr>
-    <a:lvl4pPr marL="1371600" algn="l" defTabSz="914400" rtl="0" eaLnBrk="1" latinLnBrk="0" hangingPunct="1">
+    <a:lvl4pPr marL="1371600" algn="l" defTabSz="457200" rtl="0" eaLnBrk="1" latinLnBrk="0" hangingPunct="1">
       <a:defRPr sz="1800" kern="1200">
         <a:solidFill>
           <a:schemeClr val="tx1"/>
@@ -61,7 +64,7 @@
         <a:cs typeface="+mn-cs"/>
       </a:defRPr>
     </a:lvl4pPr>
-    <a:lvl5pPr marL="1828800" algn="l" defTabSz="914400" rtl="0" eaLnBrk="1" latinLnBrk="0" hangingPunct="1">
+    <a:lvl5pPr marL="1828800" algn="l" defTabSz="457200" rtl="0" eaLnBrk="1" latinLnBrk="0" hangingPunct="1">
       <a:defRPr sz="1800" kern="1200">
         <a:solidFill>
           <a:schemeClr val="tx1"/>
@@ -71,7 +74,7 @@
         <a:cs typeface="+mn-cs"/>
       </a:defRPr>
     </a:lvl5pPr>
-    <a:lvl6pPr marL="2286000" algn="l" defTabSz="914400" rtl="0" eaLnBrk="1" latinLnBrk="0" hangingPunct="1">
+    <a:lvl6pPr marL="2286000" algn="l" defTabSz="457200" rtl="0" eaLnBrk="1" latinLnBrk="0" hangingPunct="1">
       <a:defRPr sz="1800" kern="1200">
         <a:solidFill>
           <a:schemeClr val="tx1"/>
@@ -81,7 +84,7 @@
         <a:cs typeface="+mn-cs"/>
       </a:defRPr>
     </a:lvl6pPr>
-    <a:lvl7pPr marL="2743200" algn="l" defTabSz="914400" rtl="0" eaLnBrk="1" latinLnBrk="0" hangingPunct="1">
+    <a:lvl7pPr marL="2743200" algn="l" defTabSz="457200" rtl="0" eaLnBrk="1" latinLnBrk="0" hangingPunct="1">
       <a:defRPr sz="1800" kern="1200">
         <a:solidFill>
           <a:schemeClr val="tx1"/>
@@ -91,7 +94,7 @@
         <a:cs typeface="+mn-cs"/>
       </a:defRPr>
     </a:lvl7pPr>
-    <a:lvl8pPr marL="3200400" algn="l" defTabSz="914400" rtl="0" eaLnBrk="1" latinLnBrk="0" hangingPunct="1">
+    <a:lvl8pPr marL="3200400" algn="l" defTabSz="457200" rtl="0" eaLnBrk="1" latinLnBrk="0" hangingPunct="1">
       <a:defRPr sz="1800" kern="1200">
         <a:solidFill>
           <a:schemeClr val="tx1"/>
@@ -101,7 +104,7 @@
         <a:cs typeface="+mn-cs"/>
       </a:defRPr>
     </a:lvl8pPr>
-    <a:lvl9pPr marL="3657600" algn="l" defTabSz="914400" rtl="0" eaLnBrk="1" latinLnBrk="0" hangingPunct="1">
+    <a:lvl9pPr marL="3657600" algn="l" defTabSz="457200" rtl="0" eaLnBrk="1" latinLnBrk="0" hangingPunct="1">
       <a:defRPr sz="1800" kern="1200">
         <a:solidFill>
           <a:schemeClr val="tx1"/>
@@ -123,6 +126,14 @@
 <file path=ppt/slideLayouts/slideLayout1.xml><?xml version="1.0" encoding="utf-8"?>
 <p:sldLayout xmlns:a="http://schemas.openxmlformats.org/drawingml/2006/main" xmlns:r="http://schemas.openxmlformats.org/officeDocument/2006/relationships" xmlns:p="http://schemas.openxmlformats.org/presentationml/2006/main" type="title" preserve="1">
   <p:cSld name="Title Slide">
+    <p:bg>
+      <p:bgPr>
+        <a:solidFill>
+          <a:schemeClr val="accent2"/>
+        </a:solidFill>
+        <a:effectLst/>
+      </p:bgPr>
+    </p:bg>
     <p:spTree>
       <p:nvGrpSpPr>
         <p:cNvPr id="1" name=""/>
@@ -139,70 +150,82 @@
       </p:grpSpPr>
       <p:sp>
         <p:nvSpPr>
-          <p:cNvPr id="2" name="Title 1">
-            <a:extLst>
-              <a:ext uri="{FF2B5EF4-FFF2-40B4-BE49-F238E27FC236}">
-                <a16:creationId xmlns:a16="http://schemas.microsoft.com/office/drawing/2014/main" id="{310F2957-CB07-16A8-B84D-78233229542D}"/>
-              </a:ext>
-            </a:extLst>
-          </p:cNvPr>
+          <p:cNvPr id="2" name="Title 1"/>
           <p:cNvSpPr>
             <a:spLocks noGrp="1"/>
           </p:cNvSpPr>
           <p:nvPr>
             <p:ph type="ctrTitle"/>
+          </p:nvPr>
+        </p:nvSpPr>
+        <p:spPr bwMode="blackWhite">
+          <a:xfrm>
+            <a:off x="1600200" y="2386744"/>
+            <a:ext cx="8991600" cy="1645920"/>
+          </a:xfrm>
+          <a:solidFill>
+            <a:srgbClr val="FFFFFF"/>
+          </a:solidFill>
+          <a:ln w="38100">
+            <a:solidFill>
+              <a:srgbClr val="404040"/>
+            </a:solidFill>
+          </a:ln>
+        </p:spPr>
+        <p:txBody>
+          <a:bodyPr lIns="274320" rIns="274320" anchor="ctr" anchorCtr="1">
+            <a:normAutofit/>
+          </a:bodyPr>
+          <a:lstStyle>
+            <a:lvl1pPr algn="ctr">
+              <a:defRPr sz="3800">
+                <a:solidFill>
+                  <a:srgbClr val="262626"/>
+                </a:solidFill>
+              </a:defRPr>
+            </a:lvl1pPr>
+          </a:lstStyle>
+          <a:p>
+            <a:r>
+              <a:rPr lang="en-US"/>
+              <a:t>Click to edit Master title style</a:t>
+            </a:r>
+            <a:endParaRPr lang="en-US" dirty="0"/>
+          </a:p>
+        </p:txBody>
+      </p:sp>
+      <p:sp>
+        <p:nvSpPr>
+          <p:cNvPr id="3" name="Subtitle 2"/>
+          <p:cNvSpPr>
+            <a:spLocks noGrp="1"/>
+          </p:cNvSpPr>
+          <p:nvPr>
+            <p:ph type="subTitle" idx="1"/>
           </p:nvPr>
         </p:nvSpPr>
         <p:spPr>
           <a:xfrm>
-            <a:off x="1524000" y="1122363"/>
-            <a:ext cx="9144000" cy="2387600"/>
+            <a:off x="2695194" y="4352544"/>
+            <a:ext cx="6801612" cy="1239894"/>
           </a:xfrm>
+          <a:noFill/>
         </p:spPr>
         <p:txBody>
-          <a:bodyPr anchor="b"/>
-          <a:lstStyle>
-            <a:lvl1pPr algn="ctr">
-              <a:defRPr sz="6000"/>
-            </a:lvl1pPr>
-          </a:lstStyle>
-          <a:p>
-            <a:r>
-              <a:rPr lang="en-US"/>
-              <a:t>Click to edit Master title style</a:t>
-            </a:r>
-            <a:endParaRPr lang="en-IN"/>
-          </a:p>
-        </p:txBody>
-      </p:sp>
-      <p:sp>
-        <p:nvSpPr>
-          <p:cNvPr id="3" name="Subtitle 2">
-            <a:extLst>
-              <a:ext uri="{FF2B5EF4-FFF2-40B4-BE49-F238E27FC236}">
-                <a16:creationId xmlns:a16="http://schemas.microsoft.com/office/drawing/2014/main" id="{5EC71BC0-BDE4-8C22-2159-0806C61583E3}"/>
-              </a:ext>
-            </a:extLst>
-          </p:cNvPr>
-          <p:cNvSpPr>
-            <a:spLocks noGrp="1"/>
-          </p:cNvSpPr>
-          <p:nvPr>
-            <p:ph type="subTitle" idx="1"/>
-          </p:nvPr>
-        </p:nvSpPr>
-        <p:spPr>
-          <a:xfrm>
-            <a:off x="1524000" y="3602038"/>
-            <a:ext cx="9144000" cy="1655762"/>
-          </a:xfrm>
-        </p:spPr>
-        <p:txBody>
-          <a:bodyPr/>
+          <a:bodyPr>
+            <a:normAutofit/>
+          </a:bodyPr>
           <a:lstStyle>
             <a:lvl1pPr marL="0" indent="0" algn="ctr">
               <a:buNone/>
-              <a:defRPr sz="2400"/>
+              <a:defRPr sz="2000">
+                <a:solidFill>
+                  <a:schemeClr val="tx1">
+                    <a:lumMod val="75000"/>
+                    <a:lumOff val="25000"/>
+                  </a:schemeClr>
+                </a:solidFill>
+              </a:defRPr>
             </a:lvl1pPr>
             <a:lvl2pPr marL="457200" indent="0" algn="ctr">
               <a:buNone/>
@@ -242,19 +265,13 @@
               <a:rPr lang="en-US"/>
               <a:t>Click to edit Master subtitle style</a:t>
             </a:r>
-            <a:endParaRPr lang="en-IN"/>
-          </a:p>
-        </p:txBody>
-      </p:sp>
-      <p:sp>
-        <p:nvSpPr>
-          <p:cNvPr id="4" name="Date Placeholder 3">
-            <a:extLst>
-              <a:ext uri="{FF2B5EF4-FFF2-40B4-BE49-F238E27FC236}">
-                <a16:creationId xmlns:a16="http://schemas.microsoft.com/office/drawing/2014/main" id="{06E82DC5-336B-88F9-5908-5C2972EB6B1D}"/>
-              </a:ext>
-            </a:extLst>
-          </p:cNvPr>
+            <a:endParaRPr lang="en-US" dirty="0"/>
+          </a:p>
+        </p:txBody>
+      </p:sp>
+      <p:sp>
+        <p:nvSpPr>
+          <p:cNvPr id="7" name="Date Placeholder 6"/>
           <p:cNvSpPr>
             <a:spLocks noGrp="1"/>
           </p:cNvSpPr>
@@ -269,7 +286,7 @@
           <a:p>
             <a:fld id="{01F0E23C-E03C-4D10-AB12-92DDDE6BAB9B}" type="datetimeFigureOut">
               <a:rPr lang="en-IN" smtClean="0"/>
-              <a:t>04-04-2026</a:t>
+              <a:t>06-04-2026</a:t>
             </a:fld>
             <a:endParaRPr lang="en-IN"/>
           </a:p>
@@ -277,13 +294,7 @@
       </p:sp>
       <p:sp>
         <p:nvSpPr>
-          <p:cNvPr id="5" name="Footer Placeholder 4">
-            <a:extLst>
-              <a:ext uri="{FF2B5EF4-FFF2-40B4-BE49-F238E27FC236}">
-                <a16:creationId xmlns:a16="http://schemas.microsoft.com/office/drawing/2014/main" id="{0A9A9DD2-26DB-107E-FC2E-49262ADEB78A}"/>
-              </a:ext>
-            </a:extLst>
-          </p:cNvPr>
+          <p:cNvPr id="8" name="Footer Placeholder 7"/>
           <p:cNvSpPr>
             <a:spLocks noGrp="1"/>
           </p:cNvSpPr>
@@ -302,13 +313,7 @@
       </p:sp>
       <p:sp>
         <p:nvSpPr>
-          <p:cNvPr id="6" name="Slide Number Placeholder 5">
-            <a:extLst>
-              <a:ext uri="{FF2B5EF4-FFF2-40B4-BE49-F238E27FC236}">
-                <a16:creationId xmlns:a16="http://schemas.microsoft.com/office/drawing/2014/main" id="{5323B4E5-6545-1F5B-1641-4B873F8A34E9}"/>
-              </a:ext>
-            </a:extLst>
-          </p:cNvPr>
+          <p:cNvPr id="9" name="Slide Number Placeholder 8"/>
           <p:cNvSpPr>
             <a:spLocks noGrp="1"/>
           </p:cNvSpPr>
@@ -332,12 +337,12 @@
     </p:spTree>
     <p:extLst>
       <p:ext uri="{BB962C8B-B14F-4D97-AF65-F5344CB8AC3E}">
-        <p14:creationId xmlns:p14="http://schemas.microsoft.com/office/powerpoint/2010/main" val="3982772655"/>
+        <p14:creationId xmlns:p14="http://schemas.microsoft.com/office/powerpoint/2010/main" val="2540208068"/>
       </p:ext>
     </p:extLst>
   </p:cSld>
   <p:clrMapOvr>
-    <a:masterClrMapping/>
+    <a:overrideClrMapping bg1="dk1" tx1="lt1" bg2="dk2" tx2="lt2" accent1="accent1" accent2="accent2" accent3="accent3" accent4="accent4" accent5="accent5" accent6="accent6" hlink="hlink" folHlink="folHlink"/>
   </p:clrMapOvr>
 </p:sldLayout>
 </file>
@@ -361,13 +366,7 @@
       </p:grpSpPr>
       <p:sp>
         <p:nvSpPr>
-          <p:cNvPr id="2" name="Title 1">
-            <a:extLst>
-              <a:ext uri="{FF2B5EF4-FFF2-40B4-BE49-F238E27FC236}">
-                <a16:creationId xmlns:a16="http://schemas.microsoft.com/office/drawing/2014/main" id="{79A9B2E8-166E-2B7C-ABAC-137739692453}"/>
-              </a:ext>
-            </a:extLst>
-          </p:cNvPr>
+          <p:cNvPr id="2" name="Title 1"/>
           <p:cNvSpPr>
             <a:spLocks noGrp="1"/>
           </p:cNvSpPr>
@@ -384,19 +383,13 @@
               <a:rPr lang="en-US"/>
               <a:t>Click to edit Master title style</a:t>
             </a:r>
-            <a:endParaRPr lang="en-IN"/>
-          </a:p>
-        </p:txBody>
-      </p:sp>
-      <p:sp>
-        <p:nvSpPr>
-          <p:cNvPr id="3" name="Vertical Text Placeholder 2">
-            <a:extLst>
-              <a:ext uri="{FF2B5EF4-FFF2-40B4-BE49-F238E27FC236}">
-                <a16:creationId xmlns:a16="http://schemas.microsoft.com/office/drawing/2014/main" id="{FFE730BB-AF88-C068-8685-F41E76E0A49A}"/>
-              </a:ext>
-            </a:extLst>
-          </p:cNvPr>
+            <a:endParaRPr lang="en-US" dirty="0"/>
+          </a:p>
+        </p:txBody>
+      </p:sp>
+      <p:sp>
+        <p:nvSpPr>
+          <p:cNvPr id="3" name="Vertical Text Placeholder 2"/>
           <p:cNvSpPr>
             <a:spLocks noGrp="1"/>
           </p:cNvSpPr>
@@ -442,19 +435,13 @@
               <a:rPr lang="en-US"/>
               <a:t>Fifth level</a:t>
             </a:r>
-            <a:endParaRPr lang="en-IN"/>
-          </a:p>
-        </p:txBody>
-      </p:sp>
-      <p:sp>
-        <p:nvSpPr>
-          <p:cNvPr id="4" name="Date Placeholder 3">
-            <a:extLst>
-              <a:ext uri="{FF2B5EF4-FFF2-40B4-BE49-F238E27FC236}">
-                <a16:creationId xmlns:a16="http://schemas.microsoft.com/office/drawing/2014/main" id="{7E8AB1FB-B771-750D-3AD1-354FBD7ED948}"/>
-              </a:ext>
-            </a:extLst>
-          </p:cNvPr>
+            <a:endParaRPr lang="en-US" dirty="0"/>
+          </a:p>
+        </p:txBody>
+      </p:sp>
+      <p:sp>
+        <p:nvSpPr>
+          <p:cNvPr id="4" name="Date Placeholder 3"/>
           <p:cNvSpPr>
             <a:spLocks noGrp="1"/>
           </p:cNvSpPr>
@@ -469,7 +456,7 @@
           <a:p>
             <a:fld id="{01F0E23C-E03C-4D10-AB12-92DDDE6BAB9B}" type="datetimeFigureOut">
               <a:rPr lang="en-IN" smtClean="0"/>
-              <a:t>04-04-2026</a:t>
+              <a:t>06-04-2026</a:t>
             </a:fld>
             <a:endParaRPr lang="en-IN"/>
           </a:p>
@@ -477,13 +464,7 @@
       </p:sp>
       <p:sp>
         <p:nvSpPr>
-          <p:cNvPr id="5" name="Footer Placeholder 4">
-            <a:extLst>
-              <a:ext uri="{FF2B5EF4-FFF2-40B4-BE49-F238E27FC236}">
-                <a16:creationId xmlns:a16="http://schemas.microsoft.com/office/drawing/2014/main" id="{69D5B0E3-7486-9F76-0036-E9A61E4B8C64}"/>
-              </a:ext>
-            </a:extLst>
-          </p:cNvPr>
+          <p:cNvPr id="5" name="Footer Placeholder 4"/>
           <p:cNvSpPr>
             <a:spLocks noGrp="1"/>
           </p:cNvSpPr>
@@ -502,13 +483,7 @@
       </p:sp>
       <p:sp>
         <p:nvSpPr>
-          <p:cNvPr id="6" name="Slide Number Placeholder 5">
-            <a:extLst>
-              <a:ext uri="{FF2B5EF4-FFF2-40B4-BE49-F238E27FC236}">
-                <a16:creationId xmlns:a16="http://schemas.microsoft.com/office/drawing/2014/main" id="{CF955D70-E6D8-6DE8-7A65-5696D5DE4D2E}"/>
-              </a:ext>
-            </a:extLst>
-          </p:cNvPr>
+          <p:cNvPr id="6" name="Slide Number Placeholder 5"/>
           <p:cNvSpPr>
             <a:spLocks noGrp="1"/>
           </p:cNvSpPr>
@@ -532,7 +507,7 @@
     </p:spTree>
     <p:extLst>
       <p:ext uri="{BB962C8B-B14F-4D97-AF65-F5344CB8AC3E}">
-        <p14:creationId xmlns:p14="http://schemas.microsoft.com/office/powerpoint/2010/main" val="349021573"/>
+        <p14:creationId xmlns:p14="http://schemas.microsoft.com/office/powerpoint/2010/main" val="2479960000"/>
       </p:ext>
     </p:extLst>
   </p:cSld>
@@ -561,13 +536,7 @@
       </p:grpSpPr>
       <p:sp>
         <p:nvSpPr>
-          <p:cNvPr id="2" name="Vertical Title 1">
-            <a:extLst>
-              <a:ext uri="{FF2B5EF4-FFF2-40B4-BE49-F238E27FC236}">
-                <a16:creationId xmlns:a16="http://schemas.microsoft.com/office/drawing/2014/main" id="{54430A40-FE02-9255-04DB-4F5E86805FE8}"/>
-              </a:ext>
-            </a:extLst>
-          </p:cNvPr>
+          <p:cNvPr id="2" name="Vertical Title 1"/>
           <p:cNvSpPr>
             <a:spLocks noGrp="1"/>
           </p:cNvSpPr>
@@ -577,8 +546,8 @@
         </p:nvSpPr>
         <p:spPr>
           <a:xfrm>
-            <a:off x="8724900" y="365125"/>
-            <a:ext cx="2628900" cy="5811838"/>
+            <a:off x="8653112" y="937260"/>
+            <a:ext cx="1298608" cy="4983480"/>
           </a:xfrm>
         </p:spPr>
         <p:txBody>
@@ -589,19 +558,13 @@
               <a:rPr lang="en-US"/>
               <a:t>Click to edit Master title style</a:t>
             </a:r>
-            <a:endParaRPr lang="en-IN"/>
-          </a:p>
-        </p:txBody>
-      </p:sp>
-      <p:sp>
-        <p:nvSpPr>
-          <p:cNvPr id="3" name="Vertical Text Placeholder 2">
-            <a:extLst>
-              <a:ext uri="{FF2B5EF4-FFF2-40B4-BE49-F238E27FC236}">
-                <a16:creationId xmlns:a16="http://schemas.microsoft.com/office/drawing/2014/main" id="{1ACD686C-AC5A-B229-6450-3B0323C6C4B3}"/>
-              </a:ext>
-            </a:extLst>
-          </p:cNvPr>
+            <a:endParaRPr lang="en-US" dirty="0"/>
+          </a:p>
+        </p:txBody>
+      </p:sp>
+      <p:sp>
+        <p:nvSpPr>
+          <p:cNvPr id="3" name="Vertical Text Placeholder 2"/>
           <p:cNvSpPr>
             <a:spLocks noGrp="1"/>
           </p:cNvSpPr>
@@ -611,8 +574,8 @@
         </p:nvSpPr>
         <p:spPr>
           <a:xfrm>
-            <a:off x="838200" y="365125"/>
-            <a:ext cx="7734300" cy="5811838"/>
+            <a:off x="2231136" y="937260"/>
+            <a:ext cx="6198489" cy="4983480"/>
           </a:xfrm>
         </p:spPr>
         <p:txBody>
@@ -652,19 +615,13 @@
               <a:rPr lang="en-US"/>
               <a:t>Fifth level</a:t>
             </a:r>
-            <a:endParaRPr lang="en-IN"/>
-          </a:p>
-        </p:txBody>
-      </p:sp>
-      <p:sp>
-        <p:nvSpPr>
-          <p:cNvPr id="4" name="Date Placeholder 3">
-            <a:extLst>
-              <a:ext uri="{FF2B5EF4-FFF2-40B4-BE49-F238E27FC236}">
-                <a16:creationId xmlns:a16="http://schemas.microsoft.com/office/drawing/2014/main" id="{BB554BA8-CDC1-6C57-C0BB-02ACA211A96D}"/>
-              </a:ext>
-            </a:extLst>
-          </p:cNvPr>
+            <a:endParaRPr lang="en-US" dirty="0"/>
+          </a:p>
+        </p:txBody>
+      </p:sp>
+      <p:sp>
+        <p:nvSpPr>
+          <p:cNvPr id="4" name="Date Placeholder 3"/>
           <p:cNvSpPr>
             <a:spLocks noGrp="1"/>
           </p:cNvSpPr>
@@ -679,7 +636,7 @@
           <a:p>
             <a:fld id="{01F0E23C-E03C-4D10-AB12-92DDDE6BAB9B}" type="datetimeFigureOut">
               <a:rPr lang="en-IN" smtClean="0"/>
-              <a:t>04-04-2026</a:t>
+              <a:t>06-04-2026</a:t>
             </a:fld>
             <a:endParaRPr lang="en-IN"/>
           </a:p>
@@ -687,13 +644,7 @@
       </p:sp>
       <p:sp>
         <p:nvSpPr>
-          <p:cNvPr id="5" name="Footer Placeholder 4">
-            <a:extLst>
-              <a:ext uri="{FF2B5EF4-FFF2-40B4-BE49-F238E27FC236}">
-                <a16:creationId xmlns:a16="http://schemas.microsoft.com/office/drawing/2014/main" id="{4E330BA3-3E62-DDEF-7AD8-0EDB74A684BB}"/>
-              </a:ext>
-            </a:extLst>
-          </p:cNvPr>
+          <p:cNvPr id="5" name="Footer Placeholder 4"/>
           <p:cNvSpPr>
             <a:spLocks noGrp="1"/>
           </p:cNvSpPr>
@@ -712,13 +663,7 @@
       </p:sp>
       <p:sp>
         <p:nvSpPr>
-          <p:cNvPr id="6" name="Slide Number Placeholder 5">
-            <a:extLst>
-              <a:ext uri="{FF2B5EF4-FFF2-40B4-BE49-F238E27FC236}">
-                <a16:creationId xmlns:a16="http://schemas.microsoft.com/office/drawing/2014/main" id="{862F66BA-55C2-3013-E7CA-8255933BAC4B}"/>
-              </a:ext>
-            </a:extLst>
-          </p:cNvPr>
+          <p:cNvPr id="6" name="Slide Number Placeholder 5"/>
           <p:cNvSpPr>
             <a:spLocks noGrp="1"/>
           </p:cNvSpPr>
@@ -742,7 +687,7 @@
     </p:spTree>
     <p:extLst>
       <p:ext uri="{BB962C8B-B14F-4D97-AF65-F5344CB8AC3E}">
-        <p14:creationId xmlns:p14="http://schemas.microsoft.com/office/powerpoint/2010/main" val="2484697479"/>
+        <p14:creationId xmlns:p14="http://schemas.microsoft.com/office/powerpoint/2010/main" val="3488357992"/>
       </p:ext>
     </p:extLst>
   </p:cSld>
@@ -771,13 +716,7 @@
       </p:grpSpPr>
       <p:sp>
         <p:nvSpPr>
-          <p:cNvPr id="2" name="Title 1">
-            <a:extLst>
-              <a:ext uri="{FF2B5EF4-FFF2-40B4-BE49-F238E27FC236}">
-                <a16:creationId xmlns:a16="http://schemas.microsoft.com/office/drawing/2014/main" id="{A81053EF-353D-38FE-27F1-B27D3FF0393E}"/>
-              </a:ext>
-            </a:extLst>
-          </p:cNvPr>
+          <p:cNvPr id="2" name="Title 1"/>
           <p:cNvSpPr>
             <a:spLocks noGrp="1"/>
           </p:cNvSpPr>
@@ -794,19 +733,13 @@
               <a:rPr lang="en-US"/>
               <a:t>Click to edit Master title style</a:t>
             </a:r>
-            <a:endParaRPr lang="en-IN"/>
-          </a:p>
-        </p:txBody>
-      </p:sp>
-      <p:sp>
-        <p:nvSpPr>
-          <p:cNvPr id="3" name="Content Placeholder 2">
-            <a:extLst>
-              <a:ext uri="{FF2B5EF4-FFF2-40B4-BE49-F238E27FC236}">
-                <a16:creationId xmlns:a16="http://schemas.microsoft.com/office/drawing/2014/main" id="{E65BF525-25D2-F8DA-DD0F-46F0E4750FA2}"/>
-              </a:ext>
-            </a:extLst>
-          </p:cNvPr>
+            <a:endParaRPr lang="en-US" dirty="0"/>
+          </a:p>
+        </p:txBody>
+      </p:sp>
+      <p:sp>
+        <p:nvSpPr>
+          <p:cNvPr id="3" name="Content Placeholder 2"/>
           <p:cNvSpPr>
             <a:spLocks noGrp="1"/>
           </p:cNvSpPr>
@@ -852,19 +785,13 @@
               <a:rPr lang="en-US"/>
               <a:t>Fifth level</a:t>
             </a:r>
-            <a:endParaRPr lang="en-IN"/>
-          </a:p>
-        </p:txBody>
-      </p:sp>
-      <p:sp>
-        <p:nvSpPr>
-          <p:cNvPr id="4" name="Date Placeholder 3">
-            <a:extLst>
-              <a:ext uri="{FF2B5EF4-FFF2-40B4-BE49-F238E27FC236}">
-                <a16:creationId xmlns:a16="http://schemas.microsoft.com/office/drawing/2014/main" id="{573D39CB-7132-67C4-0C40-D78E104CC95C}"/>
-              </a:ext>
-            </a:extLst>
-          </p:cNvPr>
+            <a:endParaRPr lang="en-US" dirty="0"/>
+          </a:p>
+        </p:txBody>
+      </p:sp>
+      <p:sp>
+        <p:nvSpPr>
+          <p:cNvPr id="7" name="Date Placeholder 6"/>
           <p:cNvSpPr>
             <a:spLocks noGrp="1"/>
           </p:cNvSpPr>
@@ -879,7 +806,7 @@
           <a:p>
             <a:fld id="{01F0E23C-E03C-4D10-AB12-92DDDE6BAB9B}" type="datetimeFigureOut">
               <a:rPr lang="en-IN" smtClean="0"/>
-              <a:t>04-04-2026</a:t>
+              <a:t>06-04-2026</a:t>
             </a:fld>
             <a:endParaRPr lang="en-IN"/>
           </a:p>
@@ -887,13 +814,7 @@
       </p:sp>
       <p:sp>
         <p:nvSpPr>
-          <p:cNvPr id="5" name="Footer Placeholder 4">
-            <a:extLst>
-              <a:ext uri="{FF2B5EF4-FFF2-40B4-BE49-F238E27FC236}">
-                <a16:creationId xmlns:a16="http://schemas.microsoft.com/office/drawing/2014/main" id="{30D6AAEB-899A-9269-61DE-9401D8261B5A}"/>
-              </a:ext>
-            </a:extLst>
-          </p:cNvPr>
+          <p:cNvPr id="8" name="Footer Placeholder 7"/>
           <p:cNvSpPr>
             <a:spLocks noGrp="1"/>
           </p:cNvSpPr>
@@ -912,13 +833,7 @@
       </p:sp>
       <p:sp>
         <p:nvSpPr>
-          <p:cNvPr id="6" name="Slide Number Placeholder 5">
-            <a:extLst>
-              <a:ext uri="{FF2B5EF4-FFF2-40B4-BE49-F238E27FC236}">
-                <a16:creationId xmlns:a16="http://schemas.microsoft.com/office/drawing/2014/main" id="{247E4D1B-0935-D5B3-B9C7-85B723FB5DB6}"/>
-              </a:ext>
-            </a:extLst>
-          </p:cNvPr>
+          <p:cNvPr id="9" name="Slide Number Placeholder 8"/>
           <p:cNvSpPr>
             <a:spLocks noGrp="1"/>
           </p:cNvSpPr>
@@ -942,7 +857,7 @@
     </p:spTree>
     <p:extLst>
       <p:ext uri="{BB962C8B-B14F-4D97-AF65-F5344CB8AC3E}">
-        <p14:creationId xmlns:p14="http://schemas.microsoft.com/office/powerpoint/2010/main" val="4043502220"/>
+        <p14:creationId xmlns:p14="http://schemas.microsoft.com/office/powerpoint/2010/main" val="4123533759"/>
       </p:ext>
     </p:extLst>
   </p:cSld>
@@ -955,6 +870,14 @@
 <file path=ppt/slideLayouts/slideLayout3.xml><?xml version="1.0" encoding="utf-8"?>
 <p:sldLayout xmlns:a="http://schemas.openxmlformats.org/drawingml/2006/main" xmlns:r="http://schemas.openxmlformats.org/officeDocument/2006/relationships" xmlns:p="http://schemas.openxmlformats.org/presentationml/2006/main" type="secHead" preserve="1">
   <p:cSld name="Section Header">
+    <p:bg>
+      <p:bgPr>
+        <a:solidFill>
+          <a:schemeClr val="accent1"/>
+        </a:solidFill>
+        <a:effectLst/>
+      </p:bgPr>
+    </p:bg>
     <p:spTree>
       <p:nvGrpSpPr>
         <p:cNvPr id="1" name=""/>
@@ -971,74 +894,76 @@
       </p:grpSpPr>
       <p:sp>
         <p:nvSpPr>
-          <p:cNvPr id="2" name="Title 1">
-            <a:extLst>
-              <a:ext uri="{FF2B5EF4-FFF2-40B4-BE49-F238E27FC236}">
-                <a16:creationId xmlns:a16="http://schemas.microsoft.com/office/drawing/2014/main" id="{A0574483-4D94-C768-8165-BD0C119B08B0}"/>
-              </a:ext>
-            </a:extLst>
-          </p:cNvPr>
+          <p:cNvPr id="2" name="Title 1"/>
           <p:cNvSpPr>
             <a:spLocks noGrp="1"/>
           </p:cNvSpPr>
           <p:nvPr>
             <p:ph type="title"/>
+          </p:nvPr>
+        </p:nvSpPr>
+        <p:spPr bwMode="blackWhite">
+          <a:xfrm>
+            <a:off x="1600200" y="2386744"/>
+            <a:ext cx="8991600" cy="1645920"/>
+          </a:xfrm>
+          <a:solidFill>
+            <a:srgbClr val="FFFFFF"/>
+          </a:solidFill>
+          <a:ln w="38100">
+            <a:solidFill>
+              <a:srgbClr val="404040"/>
+            </a:solidFill>
+          </a:ln>
+        </p:spPr>
+        <p:txBody>
+          <a:bodyPr lIns="274320" rIns="274320" anchor="ctr" anchorCtr="1">
+            <a:normAutofit/>
+          </a:bodyPr>
+          <a:lstStyle>
+            <a:lvl1pPr>
+              <a:defRPr sz="3800">
+                <a:solidFill>
+                  <a:srgbClr val="262626"/>
+                </a:solidFill>
+              </a:defRPr>
+            </a:lvl1pPr>
+          </a:lstStyle>
+          <a:p>
+            <a:r>
+              <a:rPr lang="en-US"/>
+              <a:t>Click to edit Master title style</a:t>
+            </a:r>
+            <a:endParaRPr lang="en-US" dirty="0"/>
+          </a:p>
+        </p:txBody>
+      </p:sp>
+      <p:sp>
+        <p:nvSpPr>
+          <p:cNvPr id="3" name="Text Placeholder 2"/>
+          <p:cNvSpPr>
+            <a:spLocks noGrp="1"/>
+          </p:cNvSpPr>
+          <p:nvPr>
+            <p:ph type="body" idx="1"/>
           </p:nvPr>
         </p:nvSpPr>
         <p:spPr>
           <a:xfrm>
-            <a:off x="831850" y="1709738"/>
-            <a:ext cx="10515600" cy="2852737"/>
+            <a:off x="2695194" y="4352465"/>
+            <a:ext cx="6801612" cy="1265082"/>
           </a:xfrm>
         </p:spPr>
         <p:txBody>
-          <a:bodyPr anchor="b"/>
-          <a:lstStyle>
-            <a:lvl1pPr>
-              <a:defRPr sz="6000"/>
-            </a:lvl1pPr>
-          </a:lstStyle>
-          <a:p>
-            <a:r>
-              <a:rPr lang="en-US"/>
-              <a:t>Click to edit Master title style</a:t>
-            </a:r>
-            <a:endParaRPr lang="en-IN"/>
-          </a:p>
-        </p:txBody>
-      </p:sp>
-      <p:sp>
-        <p:nvSpPr>
-          <p:cNvPr id="3" name="Text Placeholder 2">
-            <a:extLst>
-              <a:ext uri="{FF2B5EF4-FFF2-40B4-BE49-F238E27FC236}">
-                <a16:creationId xmlns:a16="http://schemas.microsoft.com/office/drawing/2014/main" id="{7F54938D-58BB-B464-8B51-7B264396ED77}"/>
-              </a:ext>
-            </a:extLst>
-          </p:cNvPr>
-          <p:cNvSpPr>
-            <a:spLocks noGrp="1"/>
-          </p:cNvSpPr>
-          <p:nvPr>
-            <p:ph type="body" idx="1"/>
-          </p:nvPr>
-        </p:nvSpPr>
-        <p:spPr>
-          <a:xfrm>
-            <a:off x="831850" y="4589463"/>
-            <a:ext cx="10515600" cy="1500187"/>
-          </a:xfrm>
-        </p:spPr>
-        <p:txBody>
-          <a:bodyPr/>
+          <a:bodyPr anchor="t" anchorCtr="1">
+            <a:normAutofit/>
+          </a:bodyPr>
           <a:lstStyle>
             <a:lvl1pPr marL="0" indent="0">
               <a:buNone/>
-              <a:defRPr sz="2400">
+              <a:defRPr sz="2000">
                 <a:solidFill>
-                  <a:schemeClr val="tx1">
-                    <a:tint val="82000"/>
-                  </a:schemeClr>
+                  <a:schemeClr val="tx1"/>
                 </a:solidFill>
               </a:defRPr>
             </a:lvl1pPr>
@@ -1047,7 +972,7 @@
               <a:defRPr sz="2000">
                 <a:solidFill>
                   <a:schemeClr val="tx1">
-                    <a:tint val="82000"/>
+                    <a:tint val="75000"/>
                   </a:schemeClr>
                 </a:solidFill>
               </a:defRPr>
@@ -1057,7 +982,7 @@
               <a:defRPr sz="1800">
                 <a:solidFill>
                   <a:schemeClr val="tx1">
-                    <a:tint val="82000"/>
+                    <a:tint val="75000"/>
                   </a:schemeClr>
                 </a:solidFill>
               </a:defRPr>
@@ -1067,7 +992,7 @@
               <a:defRPr sz="1600">
                 <a:solidFill>
                   <a:schemeClr val="tx1">
-                    <a:tint val="82000"/>
+                    <a:tint val="75000"/>
                   </a:schemeClr>
                 </a:solidFill>
               </a:defRPr>
@@ -1077,7 +1002,7 @@
               <a:defRPr sz="1600">
                 <a:solidFill>
                   <a:schemeClr val="tx1">
-                    <a:tint val="82000"/>
+                    <a:tint val="75000"/>
                   </a:schemeClr>
                 </a:solidFill>
               </a:defRPr>
@@ -1087,7 +1012,7 @@
               <a:defRPr sz="1600">
                 <a:solidFill>
                   <a:schemeClr val="tx1">
-                    <a:tint val="82000"/>
+                    <a:tint val="75000"/>
                   </a:schemeClr>
                 </a:solidFill>
               </a:defRPr>
@@ -1097,7 +1022,7 @@
               <a:defRPr sz="1600">
                 <a:solidFill>
                   <a:schemeClr val="tx1">
-                    <a:tint val="82000"/>
+                    <a:tint val="75000"/>
                   </a:schemeClr>
                 </a:solidFill>
               </a:defRPr>
@@ -1107,7 +1032,7 @@
               <a:defRPr sz="1600">
                 <a:solidFill>
                   <a:schemeClr val="tx1">
-                    <a:tint val="82000"/>
+                    <a:tint val="75000"/>
                   </a:schemeClr>
                 </a:solidFill>
               </a:defRPr>
@@ -1117,7 +1042,7 @@
               <a:defRPr sz="1600">
                 <a:solidFill>
                   <a:schemeClr val="tx1">
-                    <a:tint val="82000"/>
+                    <a:tint val="75000"/>
                   </a:schemeClr>
                 </a:solidFill>
               </a:defRPr>
@@ -1134,13 +1059,7 @@
       </p:sp>
       <p:sp>
         <p:nvSpPr>
-          <p:cNvPr id="4" name="Date Placeholder 3">
-            <a:extLst>
-              <a:ext uri="{FF2B5EF4-FFF2-40B4-BE49-F238E27FC236}">
-                <a16:creationId xmlns:a16="http://schemas.microsoft.com/office/drawing/2014/main" id="{20869AFC-3246-9FAB-CE22-8C260EC1659C}"/>
-              </a:ext>
-            </a:extLst>
-          </p:cNvPr>
+          <p:cNvPr id="7" name="Date Placeholder 6"/>
           <p:cNvSpPr>
             <a:spLocks noGrp="1"/>
           </p:cNvSpPr>
@@ -1155,7 +1074,7 @@
           <a:p>
             <a:fld id="{01F0E23C-E03C-4D10-AB12-92DDDE6BAB9B}" type="datetimeFigureOut">
               <a:rPr lang="en-IN" smtClean="0"/>
-              <a:t>04-04-2026</a:t>
+              <a:t>06-04-2026</a:t>
             </a:fld>
             <a:endParaRPr lang="en-IN"/>
           </a:p>
@@ -1163,13 +1082,7 @@
       </p:sp>
       <p:sp>
         <p:nvSpPr>
-          <p:cNvPr id="5" name="Footer Placeholder 4">
-            <a:extLst>
-              <a:ext uri="{FF2B5EF4-FFF2-40B4-BE49-F238E27FC236}">
-                <a16:creationId xmlns:a16="http://schemas.microsoft.com/office/drawing/2014/main" id="{37E42835-24EA-0918-7F42-5AE9D8709945}"/>
-              </a:ext>
-            </a:extLst>
-          </p:cNvPr>
+          <p:cNvPr id="8" name="Footer Placeholder 7"/>
           <p:cNvSpPr>
             <a:spLocks noGrp="1"/>
           </p:cNvSpPr>
@@ -1188,13 +1101,7 @@
       </p:sp>
       <p:sp>
         <p:nvSpPr>
-          <p:cNvPr id="6" name="Slide Number Placeholder 5">
-            <a:extLst>
-              <a:ext uri="{FF2B5EF4-FFF2-40B4-BE49-F238E27FC236}">
-                <a16:creationId xmlns:a16="http://schemas.microsoft.com/office/drawing/2014/main" id="{A6C452D9-9880-93E0-CD78-C4F4F3E3C588}"/>
-              </a:ext>
-            </a:extLst>
-          </p:cNvPr>
+          <p:cNvPr id="9" name="Slide Number Placeholder 8"/>
           <p:cNvSpPr>
             <a:spLocks noGrp="1"/>
           </p:cNvSpPr>
@@ -1218,12 +1125,12 @@
     </p:spTree>
     <p:extLst>
       <p:ext uri="{BB962C8B-B14F-4D97-AF65-F5344CB8AC3E}">
-        <p14:creationId xmlns:p14="http://schemas.microsoft.com/office/powerpoint/2010/main" val="2369872858"/>
+        <p14:creationId xmlns:p14="http://schemas.microsoft.com/office/powerpoint/2010/main" val="63997570"/>
       </p:ext>
     </p:extLst>
   </p:cSld>
   <p:clrMapOvr>
-    <a:masterClrMapping/>
+    <a:overrideClrMapping bg1="dk1" tx1="lt1" bg2="dk2" tx2="lt2" accent1="accent1" accent2="accent2" accent3="accent3" accent4="accent4" accent5="accent5" accent6="accent6" hlink="hlink" folHlink="folHlink"/>
   </p:clrMapOvr>
 </p:sldLayout>
 </file>
@@ -1247,13 +1154,7 @@
       </p:grpSpPr>
       <p:sp>
         <p:nvSpPr>
-          <p:cNvPr id="2" name="Title 1">
-            <a:extLst>
-              <a:ext uri="{FF2B5EF4-FFF2-40B4-BE49-F238E27FC236}">
-                <a16:creationId xmlns:a16="http://schemas.microsoft.com/office/drawing/2014/main" id="{40BBC6AC-8FCC-8EEB-D93B-37D021E72396}"/>
-              </a:ext>
-            </a:extLst>
-          </p:cNvPr>
+          <p:cNvPr id="2" name="Title 1"/>
           <p:cNvSpPr>
             <a:spLocks noGrp="1"/>
           </p:cNvSpPr>
@@ -1270,19 +1171,13 @@
               <a:rPr lang="en-US"/>
               <a:t>Click to edit Master title style</a:t>
             </a:r>
-            <a:endParaRPr lang="en-IN"/>
-          </a:p>
-        </p:txBody>
-      </p:sp>
-      <p:sp>
-        <p:nvSpPr>
-          <p:cNvPr id="3" name="Content Placeholder 2">
-            <a:extLst>
-              <a:ext uri="{FF2B5EF4-FFF2-40B4-BE49-F238E27FC236}">
-                <a16:creationId xmlns:a16="http://schemas.microsoft.com/office/drawing/2014/main" id="{EB489262-9AC2-8253-FFBE-96F73480C3F5}"/>
-              </a:ext>
-            </a:extLst>
-          </p:cNvPr>
+            <a:endParaRPr lang="en-US" dirty="0"/>
+          </a:p>
+        </p:txBody>
+      </p:sp>
+      <p:sp>
+        <p:nvSpPr>
+          <p:cNvPr id="3" name="Content Placeholder 2"/>
           <p:cNvSpPr>
             <a:spLocks noGrp="1"/>
           </p:cNvSpPr>
@@ -1292,8 +1187,8 @@
         </p:nvSpPr>
         <p:spPr>
           <a:xfrm>
-            <a:off x="838200" y="1825625"/>
-            <a:ext cx="5181600" cy="4351338"/>
+            <a:off x="1581912" y="2638044"/>
+            <a:ext cx="4271771" cy="3101982"/>
           </a:xfrm>
         </p:spPr>
         <p:txBody>
@@ -1333,19 +1228,13 @@
               <a:rPr lang="en-US"/>
               <a:t>Fifth level</a:t>
             </a:r>
-            <a:endParaRPr lang="en-IN"/>
-          </a:p>
-        </p:txBody>
-      </p:sp>
-      <p:sp>
-        <p:nvSpPr>
-          <p:cNvPr id="4" name="Content Placeholder 3">
-            <a:extLst>
-              <a:ext uri="{FF2B5EF4-FFF2-40B4-BE49-F238E27FC236}">
-                <a16:creationId xmlns:a16="http://schemas.microsoft.com/office/drawing/2014/main" id="{13CC08CC-1FF8-E4E4-9997-99C5B40CE415}"/>
-              </a:ext>
-            </a:extLst>
-          </p:cNvPr>
+            <a:endParaRPr lang="en-US" dirty="0"/>
+          </a:p>
+        </p:txBody>
+      </p:sp>
+      <p:sp>
+        <p:nvSpPr>
+          <p:cNvPr id="4" name="Content Placeholder 3"/>
           <p:cNvSpPr>
             <a:spLocks noGrp="1"/>
           </p:cNvSpPr>
@@ -1355,8 +1244,8 @@
         </p:nvSpPr>
         <p:spPr>
           <a:xfrm>
-            <a:off x="6172200" y="1825625"/>
-            <a:ext cx="5181600" cy="4351338"/>
+            <a:off x="6338315" y="2638044"/>
+            <a:ext cx="4270247" cy="3101982"/>
           </a:xfrm>
         </p:spPr>
         <p:txBody>
@@ -1396,19 +1285,13 @@
               <a:rPr lang="en-US"/>
               <a:t>Fifth level</a:t>
             </a:r>
-            <a:endParaRPr lang="en-IN"/>
-          </a:p>
-        </p:txBody>
-      </p:sp>
-      <p:sp>
-        <p:nvSpPr>
-          <p:cNvPr id="5" name="Date Placeholder 4">
-            <a:extLst>
-              <a:ext uri="{FF2B5EF4-FFF2-40B4-BE49-F238E27FC236}">
-                <a16:creationId xmlns:a16="http://schemas.microsoft.com/office/drawing/2014/main" id="{D4BFCBB2-6AB8-2A32-536D-25B3B3A57AD8}"/>
-              </a:ext>
-            </a:extLst>
-          </p:cNvPr>
+            <a:endParaRPr lang="en-US" dirty="0"/>
+          </a:p>
+        </p:txBody>
+      </p:sp>
+      <p:sp>
+        <p:nvSpPr>
+          <p:cNvPr id="8" name="Date Placeholder 7"/>
           <p:cNvSpPr>
             <a:spLocks noGrp="1"/>
           </p:cNvSpPr>
@@ -1423,7 +1306,7 @@
           <a:p>
             <a:fld id="{01F0E23C-E03C-4D10-AB12-92DDDE6BAB9B}" type="datetimeFigureOut">
               <a:rPr lang="en-IN" smtClean="0"/>
-              <a:t>04-04-2026</a:t>
+              <a:t>06-04-2026</a:t>
             </a:fld>
             <a:endParaRPr lang="en-IN"/>
           </a:p>
@@ -1431,13 +1314,7 @@
       </p:sp>
       <p:sp>
         <p:nvSpPr>
-          <p:cNvPr id="6" name="Footer Placeholder 5">
-            <a:extLst>
-              <a:ext uri="{FF2B5EF4-FFF2-40B4-BE49-F238E27FC236}">
-                <a16:creationId xmlns:a16="http://schemas.microsoft.com/office/drawing/2014/main" id="{9913C5BF-6227-EE36-962E-410294BA9637}"/>
-              </a:ext>
-            </a:extLst>
-          </p:cNvPr>
+          <p:cNvPr id="9" name="Footer Placeholder 8"/>
           <p:cNvSpPr>
             <a:spLocks noGrp="1"/>
           </p:cNvSpPr>
@@ -1456,13 +1333,7 @@
       </p:sp>
       <p:sp>
         <p:nvSpPr>
-          <p:cNvPr id="7" name="Slide Number Placeholder 6">
-            <a:extLst>
-              <a:ext uri="{FF2B5EF4-FFF2-40B4-BE49-F238E27FC236}">
-                <a16:creationId xmlns:a16="http://schemas.microsoft.com/office/drawing/2014/main" id="{DAE5392D-B65A-6AFF-6B0D-78C6135059E0}"/>
-              </a:ext>
-            </a:extLst>
-          </p:cNvPr>
+          <p:cNvPr id="10" name="Slide Number Placeholder 9"/>
           <p:cNvSpPr>
             <a:spLocks noGrp="1"/>
           </p:cNvSpPr>
@@ -1486,7 +1357,7 @@
     </p:spTree>
     <p:extLst>
       <p:ext uri="{BB962C8B-B14F-4D97-AF65-F5344CB8AC3E}">
-        <p14:creationId xmlns:p14="http://schemas.microsoft.com/office/powerpoint/2010/main" val="1098044060"/>
+        <p14:creationId xmlns:p14="http://schemas.microsoft.com/office/powerpoint/2010/main" val="3133860343"/>
       </p:ext>
     </p:extLst>
   </p:cSld>
@@ -1515,70 +1386,38 @@
       </p:grpSpPr>
       <p:sp>
         <p:nvSpPr>
-          <p:cNvPr id="2" name="Title 1">
-            <a:extLst>
-              <a:ext uri="{FF2B5EF4-FFF2-40B4-BE49-F238E27FC236}">
-                <a16:creationId xmlns:a16="http://schemas.microsoft.com/office/drawing/2014/main" id="{35F52C16-2315-F28C-6C19-75FD88824D03}"/>
-              </a:ext>
-            </a:extLst>
-          </p:cNvPr>
-          <p:cNvSpPr>
-            <a:spLocks noGrp="1"/>
-          </p:cNvSpPr>
-          <p:nvPr>
-            <p:ph type="title"/>
+          <p:cNvPr id="3" name="Text Placeholder 2"/>
+          <p:cNvSpPr>
+            <a:spLocks noGrp="1"/>
+          </p:cNvSpPr>
+          <p:nvPr>
+            <p:ph type="body" idx="1"/>
           </p:nvPr>
         </p:nvSpPr>
         <p:spPr>
           <a:xfrm>
-            <a:off x="839788" y="365125"/>
-            <a:ext cx="10515600" cy="1325563"/>
+            <a:off x="1583436" y="2313433"/>
+            <a:ext cx="4270248" cy="704087"/>
           </a:xfrm>
         </p:spPr>
         <p:txBody>
-          <a:bodyPr/>
-          <a:lstStyle/>
-          <a:p>
-            <a:r>
-              <a:rPr lang="en-US"/>
-              <a:t>Click to edit Master title style</a:t>
-            </a:r>
-            <a:endParaRPr lang="en-IN"/>
-          </a:p>
-        </p:txBody>
-      </p:sp>
-      <p:sp>
-        <p:nvSpPr>
-          <p:cNvPr id="3" name="Text Placeholder 2">
-            <a:extLst>
-              <a:ext uri="{FF2B5EF4-FFF2-40B4-BE49-F238E27FC236}">
-                <a16:creationId xmlns:a16="http://schemas.microsoft.com/office/drawing/2014/main" id="{BDA6FABA-4452-ED81-7C1C-9A0300FC5FB5}"/>
-              </a:ext>
-            </a:extLst>
-          </p:cNvPr>
-          <p:cNvSpPr>
-            <a:spLocks noGrp="1"/>
-          </p:cNvSpPr>
-          <p:nvPr>
-            <p:ph type="body" idx="1"/>
-          </p:nvPr>
-        </p:nvSpPr>
-        <p:spPr>
-          <a:xfrm>
-            <a:off x="839788" y="1681163"/>
-            <a:ext cx="5157787" cy="823912"/>
-          </a:xfrm>
-        </p:spPr>
-        <p:txBody>
-          <a:bodyPr anchor="b"/>
+          <a:bodyPr anchor="b" anchorCtr="1">
+            <a:normAutofit/>
+          </a:bodyPr>
           <a:lstStyle>
-            <a:lvl1pPr marL="0" indent="0">
-              <a:buNone/>
-              <a:defRPr sz="2400" b="1"/>
+            <a:lvl1pPr marL="0" indent="0" algn="ctr">
+              <a:buNone/>
+              <a:defRPr sz="1900" b="0" cap="all" spc="100" baseline="0">
+                <a:solidFill>
+                  <a:schemeClr val="accent2">
+                    <a:lumMod val="75000"/>
+                  </a:schemeClr>
+                </a:solidFill>
+              </a:defRPr>
             </a:lvl1pPr>
             <a:lvl2pPr marL="457200" indent="0">
               <a:buNone/>
-              <a:defRPr sz="2000" b="1"/>
+              <a:defRPr sz="1900" b="1"/>
             </a:lvl2pPr>
             <a:lvl3pPr marL="914400" indent="0">
               <a:buNone/>
@@ -1620,13 +1459,7 @@
       </p:sp>
       <p:sp>
         <p:nvSpPr>
-          <p:cNvPr id="4" name="Content Placeholder 3">
-            <a:extLst>
-              <a:ext uri="{FF2B5EF4-FFF2-40B4-BE49-F238E27FC236}">
-                <a16:creationId xmlns:a16="http://schemas.microsoft.com/office/drawing/2014/main" id="{64285C75-26E5-C6EF-A4C3-7155F39E74F2}"/>
-              </a:ext>
-            </a:extLst>
-          </p:cNvPr>
+          <p:cNvPr id="4" name="Content Placeholder 3"/>
           <p:cNvSpPr>
             <a:spLocks noGrp="1"/>
           </p:cNvSpPr>
@@ -1636,8 +1469,8 @@
         </p:nvSpPr>
         <p:spPr>
           <a:xfrm>
-            <a:off x="839788" y="2505075"/>
-            <a:ext cx="5157787" cy="3684588"/>
+            <a:off x="1583436" y="3143250"/>
+            <a:ext cx="4270248" cy="2596776"/>
           </a:xfrm>
         </p:spPr>
         <p:txBody>
@@ -1677,42 +1510,105 @@
               <a:rPr lang="en-US"/>
               <a:t>Fifth level</a:t>
             </a:r>
-            <a:endParaRPr lang="en-IN"/>
-          </a:p>
-        </p:txBody>
-      </p:sp>
-      <p:sp>
-        <p:nvSpPr>
-          <p:cNvPr id="5" name="Text Placeholder 4">
-            <a:extLst>
-              <a:ext uri="{FF2B5EF4-FFF2-40B4-BE49-F238E27FC236}">
-                <a16:creationId xmlns:a16="http://schemas.microsoft.com/office/drawing/2014/main" id="{D76D5414-DA94-1405-94B8-25188D4ADA0F}"/>
-              </a:ext>
-            </a:extLst>
-          </p:cNvPr>
-          <p:cNvSpPr>
-            <a:spLocks noGrp="1"/>
-          </p:cNvSpPr>
-          <p:nvPr>
-            <p:ph type="body" sz="quarter" idx="3"/>
+            <a:endParaRPr lang="en-US" dirty="0"/>
+          </a:p>
+        </p:txBody>
+      </p:sp>
+      <p:sp>
+        <p:nvSpPr>
+          <p:cNvPr id="6" name="Content Placeholder 5"/>
+          <p:cNvSpPr>
+            <a:spLocks noGrp="1"/>
+          </p:cNvSpPr>
+          <p:nvPr>
+            <p:ph sz="quarter" idx="4"/>
           </p:nvPr>
         </p:nvSpPr>
         <p:spPr>
           <a:xfrm>
-            <a:off x="6172200" y="1681163"/>
-            <a:ext cx="5183188" cy="823912"/>
+            <a:off x="6338316" y="3143250"/>
+            <a:ext cx="4253484" cy="2596776"/>
           </a:xfrm>
         </p:spPr>
         <p:txBody>
-          <a:bodyPr anchor="b"/>
+          <a:bodyPr/>
           <a:lstStyle>
-            <a:lvl1pPr marL="0" indent="0">
-              <a:buNone/>
-              <a:defRPr sz="2400" b="1"/>
+            <a:lvl5pPr>
+              <a:defRPr/>
+            </a:lvl5pPr>
+          </a:lstStyle>
+          <a:p>
+            <a:pPr lvl="0"/>
+            <a:r>
+              <a:rPr lang="en-US"/>
+              <a:t>Click to edit Master text styles</a:t>
+            </a:r>
+          </a:p>
+          <a:p>
+            <a:pPr lvl="1"/>
+            <a:r>
+              <a:rPr lang="en-US"/>
+              <a:t>Second level</a:t>
+            </a:r>
+          </a:p>
+          <a:p>
+            <a:pPr lvl="2"/>
+            <a:r>
+              <a:rPr lang="en-US"/>
+              <a:t>Third level</a:t>
+            </a:r>
+          </a:p>
+          <a:p>
+            <a:pPr lvl="3"/>
+            <a:r>
+              <a:rPr lang="en-US"/>
+              <a:t>Fourth level</a:t>
+            </a:r>
+          </a:p>
+          <a:p>
+            <a:pPr lvl="4"/>
+            <a:r>
+              <a:rPr lang="en-US"/>
+              <a:t>Fifth level</a:t>
+            </a:r>
+            <a:endParaRPr lang="en-US" dirty="0"/>
+          </a:p>
+        </p:txBody>
+      </p:sp>
+      <p:sp>
+        <p:nvSpPr>
+          <p:cNvPr id="11" name="Text Placeholder 4"/>
+          <p:cNvSpPr>
+            <a:spLocks noGrp="1"/>
+          </p:cNvSpPr>
+          <p:nvPr>
+            <p:ph type="body" sz="quarter" idx="13"/>
+          </p:nvPr>
+        </p:nvSpPr>
+        <p:spPr>
+          <a:xfrm>
+            <a:off x="6338316" y="2313433"/>
+            <a:ext cx="4270248" cy="704087"/>
+          </a:xfrm>
+        </p:spPr>
+        <p:txBody>
+          <a:bodyPr anchor="b" anchorCtr="1">
+            <a:normAutofit/>
+          </a:bodyPr>
+          <a:lstStyle>
+            <a:lvl1pPr marL="0" indent="0" algn="ctr">
+              <a:buNone/>
+              <a:defRPr sz="1900" b="0" cap="all" spc="100" baseline="0">
+                <a:solidFill>
+                  <a:schemeClr val="accent2">
+                    <a:lumMod val="75000"/>
+                  </a:schemeClr>
+                </a:solidFill>
+              </a:defRPr>
             </a:lvl1pPr>
             <a:lvl2pPr marL="457200" indent="0">
               <a:buNone/>
-              <a:defRPr sz="2000" b="1"/>
+              <a:defRPr sz="1900" b="1"/>
             </a:lvl2pPr>
             <a:lvl3pPr marL="914400" indent="0">
               <a:buNone/>
@@ -1754,76 +1650,7 @@
       </p:sp>
       <p:sp>
         <p:nvSpPr>
-          <p:cNvPr id="6" name="Content Placeholder 5">
-            <a:extLst>
-              <a:ext uri="{FF2B5EF4-FFF2-40B4-BE49-F238E27FC236}">
-                <a16:creationId xmlns:a16="http://schemas.microsoft.com/office/drawing/2014/main" id="{7A7572B3-F35F-23F7-9AAA-6DDACF3E3A43}"/>
-              </a:ext>
-            </a:extLst>
-          </p:cNvPr>
-          <p:cNvSpPr>
-            <a:spLocks noGrp="1"/>
-          </p:cNvSpPr>
-          <p:nvPr>
-            <p:ph sz="quarter" idx="4"/>
-          </p:nvPr>
-        </p:nvSpPr>
-        <p:spPr>
-          <a:xfrm>
-            <a:off x="6172200" y="2505075"/>
-            <a:ext cx="5183188" cy="3684588"/>
-          </a:xfrm>
-        </p:spPr>
-        <p:txBody>
-          <a:bodyPr/>
-          <a:lstStyle/>
-          <a:p>
-            <a:pPr lvl="0"/>
-            <a:r>
-              <a:rPr lang="en-US"/>
-              <a:t>Click to edit Master text styles</a:t>
-            </a:r>
-          </a:p>
-          <a:p>
-            <a:pPr lvl="1"/>
-            <a:r>
-              <a:rPr lang="en-US"/>
-              <a:t>Second level</a:t>
-            </a:r>
-          </a:p>
-          <a:p>
-            <a:pPr lvl="2"/>
-            <a:r>
-              <a:rPr lang="en-US"/>
-              <a:t>Third level</a:t>
-            </a:r>
-          </a:p>
-          <a:p>
-            <a:pPr lvl="3"/>
-            <a:r>
-              <a:rPr lang="en-US"/>
-              <a:t>Fourth level</a:t>
-            </a:r>
-          </a:p>
-          <a:p>
-            <a:pPr lvl="4"/>
-            <a:r>
-              <a:rPr lang="en-US"/>
-              <a:t>Fifth level</a:t>
-            </a:r>
-            <a:endParaRPr lang="en-IN"/>
-          </a:p>
-        </p:txBody>
-      </p:sp>
-      <p:sp>
-        <p:nvSpPr>
-          <p:cNvPr id="7" name="Date Placeholder 6">
-            <a:extLst>
-              <a:ext uri="{FF2B5EF4-FFF2-40B4-BE49-F238E27FC236}">
-                <a16:creationId xmlns:a16="http://schemas.microsoft.com/office/drawing/2014/main" id="{A3529F3C-74F5-0AC6-C0D6-DBBBC303D107}"/>
-              </a:ext>
-            </a:extLst>
-          </p:cNvPr>
+          <p:cNvPr id="7" name="Date Placeholder 6"/>
           <p:cNvSpPr>
             <a:spLocks noGrp="1"/>
           </p:cNvSpPr>
@@ -1838,7 +1665,7 @@
           <a:p>
             <a:fld id="{01F0E23C-E03C-4D10-AB12-92DDDE6BAB9B}" type="datetimeFigureOut">
               <a:rPr lang="en-IN" smtClean="0"/>
-              <a:t>04-04-2026</a:t>
+              <a:t>06-04-2026</a:t>
             </a:fld>
             <a:endParaRPr lang="en-IN"/>
           </a:p>
@@ -1846,13 +1673,7 @@
       </p:sp>
       <p:sp>
         <p:nvSpPr>
-          <p:cNvPr id="8" name="Footer Placeholder 7">
-            <a:extLst>
-              <a:ext uri="{FF2B5EF4-FFF2-40B4-BE49-F238E27FC236}">
-                <a16:creationId xmlns:a16="http://schemas.microsoft.com/office/drawing/2014/main" id="{A96673FA-3030-D998-C129-DC0BEC0E2BF4}"/>
-              </a:ext>
-            </a:extLst>
-          </p:cNvPr>
+          <p:cNvPr id="8" name="Footer Placeholder 7"/>
           <p:cNvSpPr>
             <a:spLocks noGrp="1"/>
           </p:cNvSpPr>
@@ -1871,13 +1692,7 @@
       </p:sp>
       <p:sp>
         <p:nvSpPr>
-          <p:cNvPr id="9" name="Slide Number Placeholder 8">
-            <a:extLst>
-              <a:ext uri="{FF2B5EF4-FFF2-40B4-BE49-F238E27FC236}">
-                <a16:creationId xmlns:a16="http://schemas.microsoft.com/office/drawing/2014/main" id="{842F4149-1B11-BB6F-FA42-4642528BB6F1}"/>
-              </a:ext>
-            </a:extLst>
-          </p:cNvPr>
+          <p:cNvPr id="9" name="Slide Number Placeholder 8"/>
           <p:cNvSpPr>
             <a:spLocks noGrp="1"/>
           </p:cNvSpPr>
@@ -1898,10 +1713,33 @@
           </a:p>
         </p:txBody>
       </p:sp>
+      <p:sp>
+        <p:nvSpPr>
+          <p:cNvPr id="10" name="Title 9"/>
+          <p:cNvSpPr>
+            <a:spLocks noGrp="1"/>
+          </p:cNvSpPr>
+          <p:nvPr>
+            <p:ph type="title"/>
+          </p:nvPr>
+        </p:nvSpPr>
+        <p:spPr/>
+        <p:txBody>
+          <a:bodyPr/>
+          <a:lstStyle/>
+          <a:p>
+            <a:r>
+              <a:rPr lang="en-US"/>
+              <a:t>Click to edit Master title style</a:t>
+            </a:r>
+            <a:endParaRPr lang="en-US" dirty="0"/>
+          </a:p>
+        </p:txBody>
+      </p:sp>
     </p:spTree>
     <p:extLst>
       <p:ext uri="{BB962C8B-B14F-4D97-AF65-F5344CB8AC3E}">
-        <p14:creationId xmlns:p14="http://schemas.microsoft.com/office/powerpoint/2010/main" val="1700654840"/>
+        <p14:creationId xmlns:p14="http://schemas.microsoft.com/office/powerpoint/2010/main" val="2935711764"/>
       </p:ext>
     </p:extLst>
   </p:cSld>
@@ -1930,13 +1768,7 @@
       </p:grpSpPr>
       <p:sp>
         <p:nvSpPr>
-          <p:cNvPr id="2" name="Title 1">
-            <a:extLst>
-              <a:ext uri="{FF2B5EF4-FFF2-40B4-BE49-F238E27FC236}">
-                <a16:creationId xmlns:a16="http://schemas.microsoft.com/office/drawing/2014/main" id="{461E3431-02A8-C3DC-972F-6C4D3774EE84}"/>
-              </a:ext>
-            </a:extLst>
-          </p:cNvPr>
+          <p:cNvPr id="2" name="Title 1"/>
           <p:cNvSpPr>
             <a:spLocks noGrp="1"/>
           </p:cNvSpPr>
@@ -1953,19 +1785,13 @@
               <a:rPr lang="en-US"/>
               <a:t>Click to edit Master title style</a:t>
             </a:r>
-            <a:endParaRPr lang="en-IN"/>
-          </a:p>
-        </p:txBody>
-      </p:sp>
-      <p:sp>
-        <p:nvSpPr>
-          <p:cNvPr id="3" name="Date Placeholder 2">
-            <a:extLst>
-              <a:ext uri="{FF2B5EF4-FFF2-40B4-BE49-F238E27FC236}">
-                <a16:creationId xmlns:a16="http://schemas.microsoft.com/office/drawing/2014/main" id="{2F203D6A-9B95-E347-A3B7-198FF6653F80}"/>
-              </a:ext>
-            </a:extLst>
-          </p:cNvPr>
+            <a:endParaRPr lang="en-US" dirty="0"/>
+          </a:p>
+        </p:txBody>
+      </p:sp>
+      <p:sp>
+        <p:nvSpPr>
+          <p:cNvPr id="3" name="Date Placeholder 2"/>
           <p:cNvSpPr>
             <a:spLocks noGrp="1"/>
           </p:cNvSpPr>
@@ -1980,7 +1806,7 @@
           <a:p>
             <a:fld id="{01F0E23C-E03C-4D10-AB12-92DDDE6BAB9B}" type="datetimeFigureOut">
               <a:rPr lang="en-IN" smtClean="0"/>
-              <a:t>04-04-2026</a:t>
+              <a:t>06-04-2026</a:t>
             </a:fld>
             <a:endParaRPr lang="en-IN"/>
           </a:p>
@@ -1988,13 +1814,7 @@
       </p:sp>
       <p:sp>
         <p:nvSpPr>
-          <p:cNvPr id="4" name="Footer Placeholder 3">
-            <a:extLst>
-              <a:ext uri="{FF2B5EF4-FFF2-40B4-BE49-F238E27FC236}">
-                <a16:creationId xmlns:a16="http://schemas.microsoft.com/office/drawing/2014/main" id="{4F25E6B6-80E6-4FF7-C682-1A87581342D1}"/>
-              </a:ext>
-            </a:extLst>
-          </p:cNvPr>
+          <p:cNvPr id="4" name="Footer Placeholder 3"/>
           <p:cNvSpPr>
             <a:spLocks noGrp="1"/>
           </p:cNvSpPr>
@@ -2013,13 +1833,7 @@
       </p:sp>
       <p:sp>
         <p:nvSpPr>
-          <p:cNvPr id="5" name="Slide Number Placeholder 4">
-            <a:extLst>
-              <a:ext uri="{FF2B5EF4-FFF2-40B4-BE49-F238E27FC236}">
-                <a16:creationId xmlns:a16="http://schemas.microsoft.com/office/drawing/2014/main" id="{CA583CED-4917-EDDC-0885-3C0BF3A6CC1C}"/>
-              </a:ext>
-            </a:extLst>
-          </p:cNvPr>
+          <p:cNvPr id="5" name="Slide Number Placeholder 4"/>
           <p:cNvSpPr>
             <a:spLocks noGrp="1"/>
           </p:cNvSpPr>
@@ -2043,7 +1857,7 @@
     </p:spTree>
     <p:extLst>
       <p:ext uri="{BB962C8B-B14F-4D97-AF65-F5344CB8AC3E}">
-        <p14:creationId xmlns:p14="http://schemas.microsoft.com/office/powerpoint/2010/main" val="2069998847"/>
+        <p14:creationId xmlns:p14="http://schemas.microsoft.com/office/powerpoint/2010/main" val="3483121464"/>
       </p:ext>
     </p:extLst>
   </p:cSld>
@@ -2072,13 +1886,7 @@
       </p:grpSpPr>
       <p:sp>
         <p:nvSpPr>
-          <p:cNvPr id="2" name="Date Placeholder 1">
-            <a:extLst>
-              <a:ext uri="{FF2B5EF4-FFF2-40B4-BE49-F238E27FC236}">
-                <a16:creationId xmlns:a16="http://schemas.microsoft.com/office/drawing/2014/main" id="{3CB7010E-9A23-F35C-A27B-404907A92936}"/>
-              </a:ext>
-            </a:extLst>
-          </p:cNvPr>
+          <p:cNvPr id="2" name="Date Placeholder 1"/>
           <p:cNvSpPr>
             <a:spLocks noGrp="1"/>
           </p:cNvSpPr>
@@ -2093,7 +1901,7 @@
           <a:p>
             <a:fld id="{01F0E23C-E03C-4D10-AB12-92DDDE6BAB9B}" type="datetimeFigureOut">
               <a:rPr lang="en-IN" smtClean="0"/>
-              <a:t>04-04-2026</a:t>
+              <a:t>06-04-2026</a:t>
             </a:fld>
             <a:endParaRPr lang="en-IN"/>
           </a:p>
@@ -2101,13 +1909,7 @@
       </p:sp>
       <p:sp>
         <p:nvSpPr>
-          <p:cNvPr id="3" name="Footer Placeholder 2">
-            <a:extLst>
-              <a:ext uri="{FF2B5EF4-FFF2-40B4-BE49-F238E27FC236}">
-                <a16:creationId xmlns:a16="http://schemas.microsoft.com/office/drawing/2014/main" id="{4B76436E-A75E-98EC-1B85-0F2DD0299E30}"/>
-              </a:ext>
-            </a:extLst>
-          </p:cNvPr>
+          <p:cNvPr id="3" name="Footer Placeholder 2"/>
           <p:cNvSpPr>
             <a:spLocks noGrp="1"/>
           </p:cNvSpPr>
@@ -2126,13 +1928,7 @@
       </p:sp>
       <p:sp>
         <p:nvSpPr>
-          <p:cNvPr id="4" name="Slide Number Placeholder 3">
-            <a:extLst>
-              <a:ext uri="{FF2B5EF4-FFF2-40B4-BE49-F238E27FC236}">
-                <a16:creationId xmlns:a16="http://schemas.microsoft.com/office/drawing/2014/main" id="{DA0EF151-3D6A-7A53-94C9-A4D88B2AE4F2}"/>
-              </a:ext>
-            </a:extLst>
-          </p:cNvPr>
+          <p:cNvPr id="4" name="Slide Number Placeholder 3"/>
           <p:cNvSpPr>
             <a:spLocks noGrp="1"/>
           </p:cNvSpPr>
@@ -2156,7 +1952,7 @@
     </p:spTree>
     <p:extLst>
       <p:ext uri="{BB962C8B-B14F-4D97-AF65-F5344CB8AC3E}">
-        <p14:creationId xmlns:p14="http://schemas.microsoft.com/office/powerpoint/2010/main" val="1381242627"/>
+        <p14:creationId xmlns:p14="http://schemas.microsoft.com/office/powerpoint/2010/main" val="2392527800"/>
       </p:ext>
     </p:extLst>
   </p:cSld>
@@ -2185,267 +1981,326 @@
       </p:grpSpPr>
       <p:sp>
         <p:nvSpPr>
-          <p:cNvPr id="2" name="Title 1">
-            <a:extLst>
-              <a:ext uri="{FF2B5EF4-FFF2-40B4-BE49-F238E27FC236}">
-                <a16:creationId xmlns:a16="http://schemas.microsoft.com/office/drawing/2014/main" id="{1CD19EE4-C6AD-29EF-DA8E-F4F62D8993C3}"/>
-              </a:ext>
-            </a:extLst>
-          </p:cNvPr>
-          <p:cNvSpPr>
-            <a:spLocks noGrp="1"/>
-          </p:cNvSpPr>
-          <p:nvPr>
-            <p:ph type="title"/>
-          </p:nvPr>
+          <p:cNvPr id="26" name="Rectangle 25"/>
+          <p:cNvSpPr/>
+          <p:nvPr/>
         </p:nvSpPr>
         <p:spPr>
           <a:xfrm>
-            <a:off x="839788" y="457200"/>
-            <a:ext cx="3932237" cy="1600200"/>
+            <a:off x="0" y="0"/>
+            <a:ext cx="6096000" cy="6858000"/>
+          </a:xfrm>
+          <a:prstGeom prst="rect">
+            <a:avLst/>
+          </a:prstGeom>
+          <a:solidFill>
+            <a:schemeClr val="accent2"/>
+          </a:solidFill>
+          <a:ln>
+            <a:noFill/>
+          </a:ln>
+        </p:spPr>
+        <p:style>
+          <a:lnRef idx="2">
+            <a:schemeClr val="accent1">
+              <a:shade val="50000"/>
+            </a:schemeClr>
+          </a:lnRef>
+          <a:fillRef idx="1">
+            <a:schemeClr val="accent1"/>
+          </a:fillRef>
+          <a:effectRef idx="0">
+            <a:schemeClr val="accent1"/>
+          </a:effectRef>
+          <a:fontRef idx="minor">
+            <a:schemeClr val="lt1"/>
+          </a:fontRef>
+        </p:style>
+      </p:sp>
+      <p:sp>
+        <p:nvSpPr>
+          <p:cNvPr id="2" name="Title 1"/>
+          <p:cNvSpPr>
+            <a:spLocks noGrp="1"/>
+          </p:cNvSpPr>
+          <p:nvPr>
+            <p:ph type="title"/>
+          </p:nvPr>
+        </p:nvSpPr>
+        <p:spPr bwMode="blackWhite">
+          <a:xfrm>
+            <a:off x="804672" y="2243828"/>
+            <a:ext cx="4486656" cy="1141497"/>
+          </a:xfrm>
+          <a:solidFill>
+            <a:srgbClr val="FFFFFF"/>
+          </a:solidFill>
+          <a:ln>
+            <a:solidFill>
+              <a:srgbClr val="404040"/>
+            </a:solidFill>
+          </a:ln>
+        </p:spPr>
+        <p:txBody>
+          <a:bodyPr anchor="ctr" anchorCtr="1">
+            <a:normAutofit/>
+          </a:bodyPr>
+          <a:lstStyle>
+            <a:lvl1pPr>
+              <a:defRPr sz="2200">
+                <a:solidFill>
+                  <a:srgbClr val="262626"/>
+                </a:solidFill>
+              </a:defRPr>
+            </a:lvl1pPr>
+          </a:lstStyle>
+          <a:p>
+            <a:r>
+              <a:rPr lang="en-US"/>
+              <a:t>Click to edit Master title style</a:t>
+            </a:r>
+            <a:endParaRPr lang="en-US" dirty="0"/>
+          </a:p>
+        </p:txBody>
+      </p:sp>
+      <p:sp>
+        <p:nvSpPr>
+          <p:cNvPr id="3" name="Content Placeholder 2"/>
+          <p:cNvSpPr>
+            <a:spLocks noGrp="1"/>
+          </p:cNvSpPr>
+          <p:nvPr>
+            <p:ph idx="1"/>
+          </p:nvPr>
+        </p:nvSpPr>
+        <p:spPr>
+          <a:xfrm>
+            <a:off x="6736080" y="804672"/>
+            <a:ext cx="4815840" cy="5248656"/>
           </a:xfrm>
         </p:spPr>
         <p:txBody>
-          <a:bodyPr anchor="b"/>
+          <a:bodyPr>
+            <a:normAutofit/>
+          </a:bodyPr>
           <a:lstStyle>
             <a:lvl1pPr>
-              <a:defRPr sz="3200"/>
+              <a:defRPr sz="1900">
+                <a:solidFill>
+                  <a:schemeClr val="tx1"/>
+                </a:solidFill>
+              </a:defRPr>
             </a:lvl1pPr>
+            <a:lvl2pPr>
+              <a:defRPr sz="1600">
+                <a:solidFill>
+                  <a:schemeClr val="tx1"/>
+                </a:solidFill>
+              </a:defRPr>
+            </a:lvl2pPr>
+            <a:lvl3pPr>
+              <a:defRPr sz="1600">
+                <a:solidFill>
+                  <a:schemeClr val="tx1"/>
+                </a:solidFill>
+              </a:defRPr>
+            </a:lvl3pPr>
+            <a:lvl4pPr>
+              <a:defRPr sz="1600">
+                <a:solidFill>
+                  <a:schemeClr val="tx1"/>
+                </a:solidFill>
+              </a:defRPr>
+            </a:lvl4pPr>
+            <a:lvl5pPr>
+              <a:defRPr sz="1600">
+                <a:solidFill>
+                  <a:schemeClr val="tx1"/>
+                </a:solidFill>
+              </a:defRPr>
+            </a:lvl5pPr>
+            <a:lvl6pPr>
+              <a:defRPr sz="1600"/>
+            </a:lvl6pPr>
+            <a:lvl7pPr>
+              <a:defRPr sz="1600"/>
+            </a:lvl7pPr>
+            <a:lvl8pPr>
+              <a:defRPr sz="1600"/>
+            </a:lvl8pPr>
+            <a:lvl9pPr>
+              <a:defRPr sz="1600"/>
+            </a:lvl9pPr>
           </a:lstStyle>
           <a:p>
-            <a:r>
-              <a:rPr lang="en-US"/>
-              <a:t>Click to edit Master title style</a:t>
-            </a:r>
-            <a:endParaRPr lang="en-IN"/>
-          </a:p>
-        </p:txBody>
-      </p:sp>
-      <p:sp>
-        <p:nvSpPr>
-          <p:cNvPr id="3" name="Content Placeholder 2">
-            <a:extLst>
-              <a:ext uri="{FF2B5EF4-FFF2-40B4-BE49-F238E27FC236}">
-                <a16:creationId xmlns:a16="http://schemas.microsoft.com/office/drawing/2014/main" id="{A83E2A46-98E4-BA59-9508-9AD493F83622}"/>
-              </a:ext>
-            </a:extLst>
-          </p:cNvPr>
-          <p:cNvSpPr>
-            <a:spLocks noGrp="1"/>
-          </p:cNvSpPr>
-          <p:nvPr>
-            <p:ph idx="1"/>
+            <a:pPr lvl="0"/>
+            <a:r>
+              <a:rPr lang="en-US"/>
+              <a:t>Click to edit Master text styles</a:t>
+            </a:r>
+          </a:p>
+          <a:p>
+            <a:pPr lvl="1"/>
+            <a:r>
+              <a:rPr lang="en-US"/>
+              <a:t>Second level</a:t>
+            </a:r>
+          </a:p>
+          <a:p>
+            <a:pPr lvl="2"/>
+            <a:r>
+              <a:rPr lang="en-US"/>
+              <a:t>Third level</a:t>
+            </a:r>
+          </a:p>
+          <a:p>
+            <a:pPr lvl="3"/>
+            <a:r>
+              <a:rPr lang="en-US"/>
+              <a:t>Fourth level</a:t>
+            </a:r>
+          </a:p>
+          <a:p>
+            <a:pPr lvl="4"/>
+            <a:r>
+              <a:rPr lang="en-US"/>
+              <a:t>Fifth level</a:t>
+            </a:r>
+            <a:endParaRPr lang="en-US" dirty="0"/>
+          </a:p>
+        </p:txBody>
+      </p:sp>
+      <p:sp>
+        <p:nvSpPr>
+          <p:cNvPr id="4" name="Text Placeholder 3"/>
+          <p:cNvSpPr>
+            <a:spLocks noGrp="1"/>
+          </p:cNvSpPr>
+          <p:nvPr>
+            <p:ph type="body" sz="half" idx="2"/>
           </p:nvPr>
         </p:nvSpPr>
         <p:spPr>
           <a:xfrm>
-            <a:off x="5183188" y="987425"/>
-            <a:ext cx="6172200" cy="4873625"/>
+            <a:off x="1115568" y="3549918"/>
+            <a:ext cx="3794760" cy="2194036"/>
+          </a:xfrm>
+        </p:spPr>
+        <p:txBody>
+          <a:bodyPr anchor="t" anchorCtr="1">
+            <a:normAutofit/>
+          </a:bodyPr>
+          <a:lstStyle>
+            <a:lvl1pPr marL="0" indent="0" algn="ctr">
+              <a:buNone/>
+              <a:defRPr sz="1500">
+                <a:solidFill>
+                  <a:srgbClr val="FFFFFF"/>
+                </a:solidFill>
+              </a:defRPr>
+            </a:lvl1pPr>
+            <a:lvl2pPr marL="457200" indent="0">
+              <a:buNone/>
+              <a:defRPr sz="1400"/>
+            </a:lvl2pPr>
+            <a:lvl3pPr marL="914400" indent="0">
+              <a:buNone/>
+              <a:defRPr sz="1200"/>
+            </a:lvl3pPr>
+            <a:lvl4pPr marL="1371600" indent="0">
+              <a:buNone/>
+              <a:defRPr sz="1000"/>
+            </a:lvl4pPr>
+            <a:lvl5pPr marL="1828800" indent="0">
+              <a:buNone/>
+              <a:defRPr sz="1000"/>
+            </a:lvl5pPr>
+            <a:lvl6pPr marL="2286000" indent="0">
+              <a:buNone/>
+              <a:defRPr sz="1000"/>
+            </a:lvl6pPr>
+            <a:lvl7pPr marL="2743200" indent="0">
+              <a:buNone/>
+              <a:defRPr sz="1000"/>
+            </a:lvl7pPr>
+            <a:lvl8pPr marL="3200400" indent="0">
+              <a:buNone/>
+              <a:defRPr sz="1000"/>
+            </a:lvl8pPr>
+            <a:lvl9pPr marL="3657600" indent="0">
+              <a:buNone/>
+              <a:defRPr sz="1000"/>
+            </a:lvl9pPr>
+          </a:lstStyle>
+          <a:p>
+            <a:pPr lvl="0"/>
+            <a:r>
+              <a:rPr lang="en-US"/>
+              <a:t>Click to edit Master text styles</a:t>
+            </a:r>
+          </a:p>
+        </p:txBody>
+      </p:sp>
+      <p:sp>
+        <p:nvSpPr>
+          <p:cNvPr id="9" name="Date Placeholder 8"/>
+          <p:cNvSpPr>
+            <a:spLocks noGrp="1"/>
+          </p:cNvSpPr>
+          <p:nvPr>
+            <p:ph type="dt" sz="half" idx="10"/>
+          </p:nvPr>
+        </p:nvSpPr>
+        <p:spPr/>
+        <p:txBody>
+          <a:bodyPr/>
+          <a:lstStyle/>
+          <a:p>
+            <a:fld id="{01F0E23C-E03C-4D10-AB12-92DDDE6BAB9B}" type="datetimeFigureOut">
+              <a:rPr lang="en-IN" smtClean="0"/>
+              <a:t>06-04-2026</a:t>
+            </a:fld>
+            <a:endParaRPr lang="en-IN"/>
+          </a:p>
+        </p:txBody>
+      </p:sp>
+      <p:sp>
+        <p:nvSpPr>
+          <p:cNvPr id="10" name="Footer Placeholder 9"/>
+          <p:cNvSpPr>
+            <a:spLocks noGrp="1"/>
+          </p:cNvSpPr>
+          <p:nvPr>
+            <p:ph type="ftr" sz="quarter" idx="11"/>
+          </p:nvPr>
+        </p:nvSpPr>
+        <p:spPr>
+          <a:xfrm>
+            <a:off x="804672" y="6236208"/>
+            <a:ext cx="5124797" cy="320040"/>
           </a:xfrm>
         </p:spPr>
         <p:txBody>
           <a:bodyPr/>
           <a:lstStyle>
             <a:lvl1pPr>
-              <a:defRPr sz="3200"/>
+              <a:defRPr>
+                <a:solidFill>
+                  <a:srgbClr val="FFFFFF">
+                    <a:alpha val="70000"/>
+                  </a:srgbClr>
+                </a:solidFill>
+              </a:defRPr>
             </a:lvl1pPr>
-            <a:lvl2pPr>
-              <a:defRPr sz="2800"/>
-            </a:lvl2pPr>
-            <a:lvl3pPr>
-              <a:defRPr sz="2400"/>
-            </a:lvl3pPr>
-            <a:lvl4pPr>
-              <a:defRPr sz="2000"/>
-            </a:lvl4pPr>
-            <a:lvl5pPr>
-              <a:defRPr sz="2000"/>
-            </a:lvl5pPr>
-            <a:lvl6pPr>
-              <a:defRPr sz="2000"/>
-            </a:lvl6pPr>
-            <a:lvl7pPr>
-              <a:defRPr sz="2000"/>
-            </a:lvl7pPr>
-            <a:lvl8pPr>
-              <a:defRPr sz="2000"/>
-            </a:lvl8pPr>
-            <a:lvl9pPr>
-              <a:defRPr sz="2000"/>
-            </a:lvl9pPr>
           </a:lstStyle>
           <a:p>
-            <a:pPr lvl="0"/>
-            <a:r>
-              <a:rPr lang="en-US"/>
-              <a:t>Click to edit Master text styles</a:t>
-            </a:r>
-          </a:p>
-          <a:p>
-            <a:pPr lvl="1"/>
-            <a:r>
-              <a:rPr lang="en-US"/>
-              <a:t>Second level</a:t>
-            </a:r>
-          </a:p>
-          <a:p>
-            <a:pPr lvl="2"/>
-            <a:r>
-              <a:rPr lang="en-US"/>
-              <a:t>Third level</a:t>
-            </a:r>
-          </a:p>
-          <a:p>
-            <a:pPr lvl="3"/>
-            <a:r>
-              <a:rPr lang="en-US"/>
-              <a:t>Fourth level</a:t>
-            </a:r>
-          </a:p>
-          <a:p>
-            <a:pPr lvl="4"/>
-            <a:r>
-              <a:rPr lang="en-US"/>
-              <a:t>Fifth level</a:t>
-            </a:r>
             <a:endParaRPr lang="en-IN"/>
           </a:p>
         </p:txBody>
       </p:sp>
       <p:sp>
         <p:nvSpPr>
-          <p:cNvPr id="4" name="Text Placeholder 3">
-            <a:extLst>
-              <a:ext uri="{FF2B5EF4-FFF2-40B4-BE49-F238E27FC236}">
-                <a16:creationId xmlns:a16="http://schemas.microsoft.com/office/drawing/2014/main" id="{D2EBD94C-6211-3287-5896-D50AA39AA6C7}"/>
-              </a:ext>
-            </a:extLst>
-          </p:cNvPr>
-          <p:cNvSpPr>
-            <a:spLocks noGrp="1"/>
-          </p:cNvSpPr>
-          <p:nvPr>
-            <p:ph type="body" sz="half" idx="2"/>
-          </p:nvPr>
-        </p:nvSpPr>
-        <p:spPr>
-          <a:xfrm>
-            <a:off x="839788" y="2057400"/>
-            <a:ext cx="3932237" cy="3811588"/>
-          </a:xfrm>
-        </p:spPr>
-        <p:txBody>
-          <a:bodyPr/>
-          <a:lstStyle>
-            <a:lvl1pPr marL="0" indent="0">
-              <a:buNone/>
-              <a:defRPr sz="1600"/>
-            </a:lvl1pPr>
-            <a:lvl2pPr marL="457200" indent="0">
-              <a:buNone/>
-              <a:defRPr sz="1400"/>
-            </a:lvl2pPr>
-            <a:lvl3pPr marL="914400" indent="0">
-              <a:buNone/>
-              <a:defRPr sz="1200"/>
-            </a:lvl3pPr>
-            <a:lvl4pPr marL="1371600" indent="0">
-              <a:buNone/>
-              <a:defRPr sz="1000"/>
-            </a:lvl4pPr>
-            <a:lvl5pPr marL="1828800" indent="0">
-              <a:buNone/>
-              <a:defRPr sz="1000"/>
-            </a:lvl5pPr>
-            <a:lvl6pPr marL="2286000" indent="0">
-              <a:buNone/>
-              <a:defRPr sz="1000"/>
-            </a:lvl6pPr>
-            <a:lvl7pPr marL="2743200" indent="0">
-              <a:buNone/>
-              <a:defRPr sz="1000"/>
-            </a:lvl7pPr>
-            <a:lvl8pPr marL="3200400" indent="0">
-              <a:buNone/>
-              <a:defRPr sz="1000"/>
-            </a:lvl8pPr>
-            <a:lvl9pPr marL="3657600" indent="0">
-              <a:buNone/>
-              <a:defRPr sz="1000"/>
-            </a:lvl9pPr>
-          </a:lstStyle>
-          <a:p>
-            <a:pPr lvl="0"/>
-            <a:r>
-              <a:rPr lang="en-US"/>
-              <a:t>Click to edit Master text styles</a:t>
-            </a:r>
-          </a:p>
-        </p:txBody>
-      </p:sp>
-      <p:sp>
-        <p:nvSpPr>
-          <p:cNvPr id="5" name="Date Placeholder 4">
-            <a:extLst>
-              <a:ext uri="{FF2B5EF4-FFF2-40B4-BE49-F238E27FC236}">
-                <a16:creationId xmlns:a16="http://schemas.microsoft.com/office/drawing/2014/main" id="{008420E3-23A6-B13A-2A63-7FAAE6D2FBD7}"/>
-              </a:ext>
-            </a:extLst>
-          </p:cNvPr>
-          <p:cNvSpPr>
-            <a:spLocks noGrp="1"/>
-          </p:cNvSpPr>
-          <p:nvPr>
-            <p:ph type="dt" sz="half" idx="10"/>
-          </p:nvPr>
-        </p:nvSpPr>
-        <p:spPr/>
-        <p:txBody>
-          <a:bodyPr/>
-          <a:lstStyle/>
-          <a:p>
-            <a:fld id="{01F0E23C-E03C-4D10-AB12-92DDDE6BAB9B}" type="datetimeFigureOut">
-              <a:rPr lang="en-IN" smtClean="0"/>
-              <a:t>04-04-2026</a:t>
-            </a:fld>
-            <a:endParaRPr lang="en-IN"/>
-          </a:p>
-        </p:txBody>
-      </p:sp>
-      <p:sp>
-        <p:nvSpPr>
-          <p:cNvPr id="6" name="Footer Placeholder 5">
-            <a:extLst>
-              <a:ext uri="{FF2B5EF4-FFF2-40B4-BE49-F238E27FC236}">
-                <a16:creationId xmlns:a16="http://schemas.microsoft.com/office/drawing/2014/main" id="{4F4B0798-8F5E-5080-AC05-8C0DB110D0A0}"/>
-              </a:ext>
-            </a:extLst>
-          </p:cNvPr>
-          <p:cNvSpPr>
-            <a:spLocks noGrp="1"/>
-          </p:cNvSpPr>
-          <p:nvPr>
-            <p:ph type="ftr" sz="quarter" idx="11"/>
-          </p:nvPr>
-        </p:nvSpPr>
-        <p:spPr/>
-        <p:txBody>
-          <a:bodyPr/>
-          <a:lstStyle/>
-          <a:p>
-            <a:endParaRPr lang="en-IN"/>
-          </a:p>
-        </p:txBody>
-      </p:sp>
-      <p:sp>
-        <p:nvSpPr>
-          <p:cNvPr id="7" name="Slide Number Placeholder 6">
-            <a:extLst>
-              <a:ext uri="{FF2B5EF4-FFF2-40B4-BE49-F238E27FC236}">
-                <a16:creationId xmlns:a16="http://schemas.microsoft.com/office/drawing/2014/main" id="{AC86D686-4C63-8BBA-425E-C474C5C5DD11}"/>
-              </a:ext>
-            </a:extLst>
-          </p:cNvPr>
+          <p:cNvPr id="11" name="Slide Number Placeholder 10"/>
           <p:cNvSpPr>
             <a:spLocks noGrp="1"/>
           </p:cNvSpPr>
@@ -2469,7 +2324,7 @@
     </p:spTree>
     <p:extLst>
       <p:ext uri="{BB962C8B-B14F-4D97-AF65-F5344CB8AC3E}">
-        <p14:creationId xmlns:p14="http://schemas.microsoft.com/office/powerpoint/2010/main" val="975846202"/>
+        <p14:creationId xmlns:p14="http://schemas.microsoft.com/office/powerpoint/2010/main" val="513925333"/>
       </p:ext>
     </p:extLst>
   </p:cSld>
@@ -2498,31 +2353,77 @@
       </p:grpSpPr>
       <p:sp>
         <p:nvSpPr>
-          <p:cNvPr id="2" name="Title 1">
-            <a:extLst>
-              <a:ext uri="{FF2B5EF4-FFF2-40B4-BE49-F238E27FC236}">
-                <a16:creationId xmlns:a16="http://schemas.microsoft.com/office/drawing/2014/main" id="{09DC4D38-A3D6-146C-5285-8A7EAC3C8FD1}"/>
-              </a:ext>
-            </a:extLst>
-          </p:cNvPr>
-          <p:cNvSpPr>
-            <a:spLocks noGrp="1"/>
-          </p:cNvSpPr>
-          <p:nvPr>
-            <p:ph type="title"/>
-          </p:nvPr>
+          <p:cNvPr id="18" name="Rectangle 17"/>
+          <p:cNvSpPr/>
+          <p:nvPr/>
         </p:nvSpPr>
         <p:spPr>
           <a:xfrm>
-            <a:off x="839788" y="457200"/>
-            <a:ext cx="3932237" cy="1600200"/>
+            <a:off x="0" y="0"/>
+            <a:ext cx="6095999" cy="6858000"/>
           </a:xfrm>
+          <a:prstGeom prst="rect">
+            <a:avLst/>
+          </a:prstGeom>
+          <a:solidFill>
+            <a:schemeClr val="accent2"/>
+          </a:solidFill>
+          <a:ln>
+            <a:noFill/>
+          </a:ln>
         </p:spPr>
-        <p:txBody>
-          <a:bodyPr anchor="b"/>
+        <p:style>
+          <a:lnRef idx="2">
+            <a:schemeClr val="accent1">
+              <a:shade val="50000"/>
+            </a:schemeClr>
+          </a:lnRef>
+          <a:fillRef idx="1">
+            <a:schemeClr val="accent1"/>
+          </a:fillRef>
+          <a:effectRef idx="0">
+            <a:schemeClr val="accent1"/>
+          </a:effectRef>
+          <a:fontRef idx="minor">
+            <a:schemeClr val="lt1"/>
+          </a:fontRef>
+        </p:style>
+      </p:sp>
+      <p:sp>
+        <p:nvSpPr>
+          <p:cNvPr id="2" name="Title 1"/>
+          <p:cNvSpPr>
+            <a:spLocks noGrp="1"/>
+          </p:cNvSpPr>
+          <p:nvPr>
+            <p:ph type="title"/>
+          </p:nvPr>
+        </p:nvSpPr>
+        <p:spPr bwMode="blackWhite">
+          <a:xfrm>
+            <a:off x="808523" y="2243828"/>
+            <a:ext cx="4494998" cy="1134640"/>
+          </a:xfrm>
+          <a:solidFill>
+            <a:srgbClr val="FFFFFF"/>
+          </a:solidFill>
+          <a:ln>
+            <a:solidFill>
+              <a:srgbClr val="404040"/>
+            </a:solidFill>
+          </a:ln>
+        </p:spPr>
+        <p:txBody>
+          <a:bodyPr anchor="ctr" anchorCtr="1">
+            <a:noAutofit/>
+          </a:bodyPr>
           <a:lstStyle>
             <a:lvl1pPr>
-              <a:defRPr sz="3200"/>
+              <a:defRPr sz="2200">
+                <a:solidFill>
+                  <a:srgbClr val="262626"/>
+                </a:solidFill>
+              </a:defRPr>
             </a:lvl1pPr>
           </a:lstStyle>
           <a:p>
@@ -2530,21 +2431,15 @@
               <a:rPr lang="en-US"/>
               <a:t>Click to edit Master title style</a:t>
             </a:r>
-            <a:endParaRPr lang="en-IN"/>
-          </a:p>
-        </p:txBody>
-      </p:sp>
-      <p:sp>
-        <p:nvSpPr>
-          <p:cNvPr id="3" name="Picture Placeholder 2">
-            <a:extLst>
-              <a:ext uri="{FF2B5EF4-FFF2-40B4-BE49-F238E27FC236}">
-                <a16:creationId xmlns:a16="http://schemas.microsoft.com/office/drawing/2014/main" id="{C50CC4BB-BD37-C122-164C-B6AAB811505A}"/>
-              </a:ext>
-            </a:extLst>
-          </p:cNvPr>
-          <p:cNvSpPr>
-            <a:spLocks noGrp="1"/>
+            <a:endParaRPr lang="en-US" dirty="0"/>
+          </a:p>
+        </p:txBody>
+      </p:sp>
+      <p:sp>
+        <p:nvSpPr>
+          <p:cNvPr id="3" name="Picture Placeholder 2"/>
+          <p:cNvSpPr>
+            <a:spLocks noGrp="1" noChangeAspect="1"/>
           </p:cNvSpPr>
           <p:nvPr>
             <p:ph type="pic" idx="1"/>
@@ -2552,16 +2447,28 @@
         </p:nvSpPr>
         <p:spPr>
           <a:xfrm>
-            <a:off x="5183188" y="987425"/>
-            <a:ext cx="6172200" cy="4873625"/>
+            <a:off x="6095999" y="0"/>
+            <a:ext cx="6102097" cy="6858000"/>
           </a:xfrm>
+          <a:solidFill>
+            <a:schemeClr val="bg1">
+              <a:lumMod val="75000"/>
+            </a:schemeClr>
+          </a:solidFill>
         </p:spPr>
         <p:txBody>
-          <a:bodyPr/>
+          <a:bodyPr anchor="t"/>
           <a:lstStyle>
             <a:lvl1pPr marL="0" indent="0">
               <a:buNone/>
-              <a:defRPr sz="3200"/>
+              <a:defRPr sz="3200">
+                <a:solidFill>
+                  <a:schemeClr val="bg1">
+                    <a:lumMod val="85000"/>
+                    <a:lumOff val="15000"/>
+                  </a:schemeClr>
+                </a:solidFill>
+              </a:defRPr>
             </a:lvl1pPr>
             <a:lvl2pPr marL="457200" indent="0">
               <a:buNone/>
@@ -2597,19 +2504,17 @@
             </a:lvl9pPr>
           </a:lstStyle>
           <a:p>
-            <a:endParaRPr lang="en-IN"/>
-          </a:p>
-        </p:txBody>
-      </p:sp>
-      <p:sp>
-        <p:nvSpPr>
-          <p:cNvPr id="4" name="Text Placeholder 3">
-            <a:extLst>
-              <a:ext uri="{FF2B5EF4-FFF2-40B4-BE49-F238E27FC236}">
-                <a16:creationId xmlns:a16="http://schemas.microsoft.com/office/drawing/2014/main" id="{CDB05758-7E8F-41A7-0793-31D08C0D7231}"/>
-              </a:ext>
-            </a:extLst>
-          </p:cNvPr>
+            <a:r>
+              <a:rPr lang="en-US"/>
+              <a:t>Click icon to add picture</a:t>
+            </a:r>
+            <a:endParaRPr lang="en-US" dirty="0"/>
+          </a:p>
+        </p:txBody>
+      </p:sp>
+      <p:sp>
+        <p:nvSpPr>
+          <p:cNvPr id="4" name="Text Placeholder 3"/>
           <p:cNvSpPr>
             <a:spLocks noGrp="1"/>
           </p:cNvSpPr>
@@ -2619,16 +2524,22 @@
         </p:nvSpPr>
         <p:spPr>
           <a:xfrm>
-            <a:off x="839788" y="2057400"/>
-            <a:ext cx="3932237" cy="3811588"/>
+            <a:off x="1115568" y="3549918"/>
+            <a:ext cx="3794760" cy="2194037"/>
           </a:xfrm>
         </p:spPr>
         <p:txBody>
-          <a:bodyPr/>
+          <a:bodyPr anchor="t" anchorCtr="1">
+            <a:normAutofit/>
+          </a:bodyPr>
           <a:lstStyle>
-            <a:lvl1pPr marL="0" indent="0">
-              <a:buNone/>
-              <a:defRPr sz="1600"/>
+            <a:lvl1pPr marL="0" indent="0" algn="ctr">
+              <a:buNone/>
+              <a:defRPr sz="1500">
+                <a:solidFill>
+                  <a:srgbClr val="FFFFFF"/>
+                </a:solidFill>
+              </a:defRPr>
             </a:lvl1pPr>
             <a:lvl2pPr marL="457200" indent="0">
               <a:buNone/>
@@ -2674,13 +2585,7 @@
       </p:sp>
       <p:sp>
         <p:nvSpPr>
-          <p:cNvPr id="5" name="Date Placeholder 4">
-            <a:extLst>
-              <a:ext uri="{FF2B5EF4-FFF2-40B4-BE49-F238E27FC236}">
-                <a16:creationId xmlns:a16="http://schemas.microsoft.com/office/drawing/2014/main" id="{932EA373-FF34-5413-BAEC-A238554E02A8}"/>
-              </a:ext>
-            </a:extLst>
-          </p:cNvPr>
+          <p:cNvPr id="8" name="Date Placeholder 7"/>
           <p:cNvSpPr>
             <a:spLocks noGrp="1"/>
           </p:cNvSpPr>
@@ -2691,11 +2596,26 @@
         <p:spPr/>
         <p:txBody>
           <a:bodyPr/>
-          <a:lstStyle/>
+          <a:lstStyle>
+            <a:lvl1pPr>
+              <a:defRPr>
+                <a:solidFill>
+                  <a:srgbClr val="FFFFFF"/>
+                </a:solidFill>
+                <a:effectLst>
+                  <a:outerShdw blurRad="50800" dist="38100" dir="2700000" algn="tl" rotWithShape="0">
+                    <a:prstClr val="black">
+                      <a:alpha val="43000"/>
+                    </a:prstClr>
+                  </a:outerShdw>
+                </a:effectLst>
+              </a:defRPr>
+            </a:lvl1pPr>
+          </a:lstStyle>
           <a:p>
             <a:fld id="{01F0E23C-E03C-4D10-AB12-92DDDE6BAB9B}" type="datetimeFigureOut">
               <a:rPr lang="en-IN" smtClean="0"/>
-              <a:t>04-04-2026</a:t>
+              <a:t>06-04-2026</a:t>
             </a:fld>
             <a:endParaRPr lang="en-IN"/>
           </a:p>
@@ -2703,13 +2623,7 @@
       </p:sp>
       <p:sp>
         <p:nvSpPr>
-          <p:cNvPr id="6" name="Footer Placeholder 5">
-            <a:extLst>
-              <a:ext uri="{FF2B5EF4-FFF2-40B4-BE49-F238E27FC236}">
-                <a16:creationId xmlns:a16="http://schemas.microsoft.com/office/drawing/2014/main" id="{FBA606F5-031B-8586-4C1A-A481BF49F819}"/>
-              </a:ext>
-            </a:extLst>
-          </p:cNvPr>
+          <p:cNvPr id="9" name="Footer Placeholder 8"/>
           <p:cNvSpPr>
             <a:spLocks noGrp="1"/>
           </p:cNvSpPr>
@@ -2717,24 +2631,33 @@
             <p:ph type="ftr" sz="quarter" idx="11"/>
           </p:nvPr>
         </p:nvSpPr>
-        <p:spPr/>
+        <p:spPr>
+          <a:xfrm>
+            <a:off x="804672" y="6236208"/>
+            <a:ext cx="5124797" cy="320040"/>
+          </a:xfrm>
+        </p:spPr>
         <p:txBody>
           <a:bodyPr/>
-          <a:lstStyle/>
-          <a:p>
-            <a:endParaRPr lang="en-IN"/>
-          </a:p>
-        </p:txBody>
-      </p:sp>
-      <p:sp>
-        <p:nvSpPr>
-          <p:cNvPr id="7" name="Slide Number Placeholder 6">
-            <a:extLst>
-              <a:ext uri="{FF2B5EF4-FFF2-40B4-BE49-F238E27FC236}">
-                <a16:creationId xmlns:a16="http://schemas.microsoft.com/office/drawing/2014/main" id="{23E06590-1D3F-F9A3-1919-639A26D9B03D}"/>
-              </a:ext>
-            </a:extLst>
-          </p:cNvPr>
+          <a:lstStyle>
+            <a:lvl1pPr>
+              <a:defRPr>
+                <a:solidFill>
+                  <a:srgbClr val="FFFFFF">
+                    <a:alpha val="70000"/>
+                  </a:srgbClr>
+                </a:solidFill>
+              </a:defRPr>
+            </a:lvl1pPr>
+          </a:lstStyle>
+          <a:p>
+            <a:endParaRPr lang="en-US" dirty="0"/>
+          </a:p>
+        </p:txBody>
+      </p:sp>
+      <p:sp>
+        <p:nvSpPr>
+          <p:cNvPr id="10" name="Slide Number Placeholder 9"/>
           <p:cNvSpPr>
             <a:spLocks noGrp="1"/>
           </p:cNvSpPr>
@@ -2758,7 +2681,7 @@
     </p:spTree>
     <p:extLst>
       <p:ext uri="{BB962C8B-B14F-4D97-AF65-F5344CB8AC3E}">
-        <p14:creationId xmlns:p14="http://schemas.microsoft.com/office/powerpoint/2010/main" val="8746921"/>
+        <p14:creationId xmlns:p14="http://schemas.microsoft.com/office/powerpoint/2010/main" val="4108826696"/>
       </p:ext>
     </p:extLst>
   </p:cSld>
@@ -2772,9 +2695,14 @@
 <p:sldMaster xmlns:a="http://schemas.openxmlformats.org/drawingml/2006/main" xmlns:r="http://schemas.openxmlformats.org/officeDocument/2006/relationships" xmlns:p="http://schemas.openxmlformats.org/presentationml/2006/main">
   <p:cSld>
     <p:bg>
-      <p:bgRef idx="1001">
-        <a:schemeClr val="bg1"/>
-      </p:bgRef>
+      <p:bgPr>
+        <a:solidFill>
+          <a:schemeClr val="bg1">
+            <a:lumMod val="95000"/>
+          </a:schemeClr>
+        </a:solidFill>
+        <a:effectLst/>
+      </p:bgPr>
     </p:bg>
     <p:spTree>
       <p:nvGrpSpPr>
@@ -2792,131 +2720,163 @@
       </p:grpSpPr>
       <p:sp>
         <p:nvSpPr>
-          <p:cNvPr id="2" name="Title Placeholder 1">
-            <a:extLst>
-              <a:ext uri="{FF2B5EF4-FFF2-40B4-BE49-F238E27FC236}">
-                <a16:creationId xmlns:a16="http://schemas.microsoft.com/office/drawing/2014/main" id="{B9AFA4DF-23AD-1410-53AF-701C80239C33}"/>
-              </a:ext>
-            </a:extLst>
-          </p:cNvPr>
+          <p:cNvPr id="2" name="Title Placeholder 1"/>
           <p:cNvSpPr>
             <a:spLocks noGrp="1"/>
           </p:cNvSpPr>
           <p:nvPr>
             <p:ph type="title"/>
+          </p:nvPr>
+        </p:nvSpPr>
+        <p:spPr bwMode="black">
+          <a:xfrm>
+            <a:off x="2231136" y="964692"/>
+            <a:ext cx="7729728" cy="1188720"/>
+          </a:xfrm>
+          <a:prstGeom prst="rect">
+            <a:avLst/>
+          </a:prstGeom>
+          <a:solidFill>
+            <a:srgbClr val="FFFFFF"/>
+          </a:solidFill>
+          <a:ln w="31750" cap="sq">
+            <a:solidFill>
+              <a:srgbClr val="404040"/>
+            </a:solidFill>
+            <a:miter lim="800000"/>
+          </a:ln>
+        </p:spPr>
+        <p:txBody>
+          <a:bodyPr vert="horz" lIns="182880" tIns="182880" rIns="182880" bIns="182880" rtlCol="0" anchor="ctr">
+            <a:normAutofit/>
+          </a:bodyPr>
+          <a:lstStyle/>
+          <a:p>
+            <a:r>
+              <a:rPr lang="en-US"/>
+              <a:t>Click to edit Master title style</a:t>
+            </a:r>
+            <a:endParaRPr lang="en-US" dirty="0"/>
+          </a:p>
+        </p:txBody>
+      </p:sp>
+      <p:sp>
+        <p:nvSpPr>
+          <p:cNvPr id="3" name="Text Placeholder 2"/>
+          <p:cNvSpPr>
+            <a:spLocks noGrp="1"/>
+          </p:cNvSpPr>
+          <p:nvPr>
+            <p:ph type="body" idx="1"/>
           </p:nvPr>
         </p:nvSpPr>
         <p:spPr>
           <a:xfrm>
-            <a:off x="838200" y="365125"/>
-            <a:ext cx="10515600" cy="1325563"/>
+            <a:off x="2231136" y="2638044"/>
+            <a:ext cx="7729728" cy="3101983"/>
           </a:xfrm>
           <a:prstGeom prst="rect">
             <a:avLst/>
           </a:prstGeom>
         </p:spPr>
         <p:txBody>
-          <a:bodyPr vert="horz" lIns="91440" tIns="45720" rIns="91440" bIns="45720" rtlCol="0" anchor="ctr">
+          <a:bodyPr vert="horz" lIns="91440" tIns="45720" rIns="91440" bIns="45720" rtlCol="0">
             <a:normAutofit/>
           </a:bodyPr>
           <a:lstStyle/>
           <a:p>
-            <a:r>
-              <a:rPr lang="en-US"/>
-              <a:t>Click to edit Master title style</a:t>
-            </a:r>
-            <a:endParaRPr lang="en-IN"/>
-          </a:p>
-        </p:txBody>
-      </p:sp>
-      <p:sp>
-        <p:nvSpPr>
-          <p:cNvPr id="3" name="Text Placeholder 2">
-            <a:extLst>
-              <a:ext uri="{FF2B5EF4-FFF2-40B4-BE49-F238E27FC236}">
-                <a16:creationId xmlns:a16="http://schemas.microsoft.com/office/drawing/2014/main" id="{71F3B849-59F4-7A57-E039-2A9924DED80D}"/>
-              </a:ext>
-            </a:extLst>
-          </p:cNvPr>
-          <p:cNvSpPr>
-            <a:spLocks noGrp="1"/>
-          </p:cNvSpPr>
-          <p:nvPr>
-            <p:ph type="body" idx="1"/>
+            <a:pPr lvl="0"/>
+            <a:r>
+              <a:rPr lang="en-US"/>
+              <a:t>Click to edit Master text styles</a:t>
+            </a:r>
+          </a:p>
+          <a:p>
+            <a:pPr lvl="1"/>
+            <a:r>
+              <a:rPr lang="en-US"/>
+              <a:t>Second level</a:t>
+            </a:r>
+          </a:p>
+          <a:p>
+            <a:pPr lvl="2"/>
+            <a:r>
+              <a:rPr lang="en-US"/>
+              <a:t>Third level</a:t>
+            </a:r>
+          </a:p>
+          <a:p>
+            <a:pPr lvl="3"/>
+            <a:r>
+              <a:rPr lang="en-US"/>
+              <a:t>Fourth level</a:t>
+            </a:r>
+          </a:p>
+          <a:p>
+            <a:pPr lvl="4"/>
+            <a:r>
+              <a:rPr lang="en-US"/>
+              <a:t>Fifth level</a:t>
+            </a:r>
+            <a:endParaRPr lang="en-US" dirty="0"/>
+          </a:p>
+        </p:txBody>
+      </p:sp>
+      <p:sp>
+        <p:nvSpPr>
+          <p:cNvPr id="4" name="Date Placeholder 3"/>
+          <p:cNvSpPr>
+            <a:spLocks noGrp="1"/>
+          </p:cNvSpPr>
+          <p:nvPr>
+            <p:ph type="dt" sz="half" idx="2"/>
           </p:nvPr>
         </p:nvSpPr>
         <p:spPr>
           <a:xfrm>
-            <a:off x="838200" y="1825625"/>
-            <a:ext cx="10515600" cy="4351338"/>
+            <a:off x="7821429" y="6238816"/>
+            <a:ext cx="2753746" cy="323968"/>
           </a:xfrm>
           <a:prstGeom prst="rect">
             <a:avLst/>
           </a:prstGeom>
         </p:spPr>
         <p:txBody>
-          <a:bodyPr vert="horz" lIns="91440" tIns="45720" rIns="91440" bIns="45720" rtlCol="0">
-            <a:normAutofit/>
-          </a:bodyPr>
-          <a:lstStyle/>
-          <a:p>
-            <a:pPr lvl="0"/>
-            <a:r>
-              <a:rPr lang="en-US"/>
-              <a:t>Click to edit Master text styles</a:t>
-            </a:r>
-          </a:p>
-          <a:p>
-            <a:pPr lvl="1"/>
-            <a:r>
-              <a:rPr lang="en-US"/>
-              <a:t>Second level</a:t>
-            </a:r>
-          </a:p>
-          <a:p>
-            <a:pPr lvl="2"/>
-            <a:r>
-              <a:rPr lang="en-US"/>
-              <a:t>Third level</a:t>
-            </a:r>
-          </a:p>
-          <a:p>
-            <a:pPr lvl="3"/>
-            <a:r>
-              <a:rPr lang="en-US"/>
-              <a:t>Fourth level</a:t>
-            </a:r>
-          </a:p>
-          <a:p>
-            <a:pPr lvl="4"/>
-            <a:r>
-              <a:rPr lang="en-US"/>
-              <a:t>Fifth level</a:t>
-            </a:r>
+          <a:bodyPr vert="horz" lIns="91440" tIns="45720" rIns="91440" bIns="45720" rtlCol="0" anchor="ctr"/>
+          <a:lstStyle>
+            <a:lvl1pPr algn="r">
+              <a:defRPr sz="1050">
+                <a:solidFill>
+                  <a:schemeClr val="tx1">
+                    <a:alpha val="70000"/>
+                  </a:schemeClr>
+                </a:solidFill>
+              </a:defRPr>
+            </a:lvl1pPr>
+          </a:lstStyle>
+          <a:p>
+            <a:fld id="{01F0E23C-E03C-4D10-AB12-92DDDE6BAB9B}" type="datetimeFigureOut">
+              <a:rPr lang="en-IN" smtClean="0"/>
+              <a:t>06-04-2026</a:t>
+            </a:fld>
             <a:endParaRPr lang="en-IN"/>
           </a:p>
         </p:txBody>
       </p:sp>
       <p:sp>
         <p:nvSpPr>
-          <p:cNvPr id="4" name="Date Placeholder 3">
-            <a:extLst>
-              <a:ext uri="{FF2B5EF4-FFF2-40B4-BE49-F238E27FC236}">
-                <a16:creationId xmlns:a16="http://schemas.microsoft.com/office/drawing/2014/main" id="{7B638EF5-B460-96FC-F39E-346322D472A1}"/>
-              </a:ext>
-            </a:extLst>
-          </p:cNvPr>
-          <p:cNvSpPr>
-            <a:spLocks noGrp="1"/>
-          </p:cNvSpPr>
-          <p:nvPr>
-            <p:ph type="dt" sz="half" idx="2"/>
+          <p:cNvPr id="5" name="Footer Placeholder 4"/>
+          <p:cNvSpPr>
+            <a:spLocks noGrp="1"/>
+          </p:cNvSpPr>
+          <p:nvPr>
+            <p:ph type="ftr" sz="quarter" idx="3"/>
           </p:nvPr>
         </p:nvSpPr>
         <p:spPr>
           <a:xfrm>
-            <a:off x="838200" y="6356350"/>
-            <a:ext cx="2743200" cy="365125"/>
+            <a:off x="1600200" y="6236208"/>
+            <a:ext cx="5901189" cy="320040"/>
           </a:xfrm>
           <a:prstGeom prst="rect">
             <a:avLst/>
@@ -2926,101 +2886,53 @@
           <a:bodyPr vert="horz" lIns="91440" tIns="45720" rIns="91440" bIns="45720" rtlCol="0" anchor="ctr"/>
           <a:lstStyle>
             <a:lvl1pPr algn="l">
-              <a:defRPr sz="1200">
+              <a:defRPr sz="1050">
                 <a:solidFill>
                   <a:schemeClr val="tx1">
-                    <a:tint val="82000"/>
+                    <a:alpha val="70000"/>
                   </a:schemeClr>
                 </a:solidFill>
               </a:defRPr>
             </a:lvl1pPr>
           </a:lstStyle>
           <a:p>
-            <a:fld id="{01F0E23C-E03C-4D10-AB12-92DDDE6BAB9B}" type="datetimeFigureOut">
-              <a:rPr lang="en-IN" smtClean="0"/>
-              <a:t>04-04-2026</a:t>
-            </a:fld>
             <a:endParaRPr lang="en-IN"/>
           </a:p>
         </p:txBody>
       </p:sp>
       <p:sp>
         <p:nvSpPr>
-          <p:cNvPr id="5" name="Footer Placeholder 4">
-            <a:extLst>
-              <a:ext uri="{FF2B5EF4-FFF2-40B4-BE49-F238E27FC236}">
-                <a16:creationId xmlns:a16="http://schemas.microsoft.com/office/drawing/2014/main" id="{38E85213-4637-0BEB-6A0B-EC75F0EF1D6A}"/>
-              </a:ext>
-            </a:extLst>
-          </p:cNvPr>
-          <p:cNvSpPr>
-            <a:spLocks noGrp="1"/>
-          </p:cNvSpPr>
-          <p:nvPr>
-            <p:ph type="ftr" sz="quarter" idx="3"/>
+          <p:cNvPr id="6" name="Slide Number Placeholder 5"/>
+          <p:cNvSpPr>
+            <a:spLocks noGrp="1"/>
+          </p:cNvSpPr>
+          <p:nvPr>
+            <p:ph type="sldNum" sz="quarter" idx="4"/>
           </p:nvPr>
         </p:nvSpPr>
         <p:spPr>
           <a:xfrm>
-            <a:off x="4038600" y="6356350"/>
-            <a:ext cx="4114800" cy="365125"/>
+            <a:off x="10758922" y="6217920"/>
+            <a:ext cx="365760" cy="365760"/>
           </a:xfrm>
-          <a:prstGeom prst="rect">
+          <a:prstGeom prst="ellipse">
             <a:avLst/>
           </a:prstGeom>
+          <a:solidFill>
+            <a:srgbClr val="1D1D1D">
+              <a:alpha val="70000"/>
+            </a:srgbClr>
+          </a:solidFill>
         </p:spPr>
         <p:txBody>
-          <a:bodyPr vert="horz" lIns="91440" tIns="45720" rIns="91440" bIns="45720" rtlCol="0" anchor="ctr"/>
+          <a:bodyPr vert="horz" lIns="18288" tIns="45720" rIns="18288" bIns="45720" rtlCol="0" anchor="ctr">
+            <a:noAutofit/>
+          </a:bodyPr>
           <a:lstStyle>
             <a:lvl1pPr algn="ctr">
-              <a:defRPr sz="1200">
+              <a:defRPr sz="1100" spc="0" baseline="0">
                 <a:solidFill>
-                  <a:schemeClr val="tx1">
-                    <a:tint val="82000"/>
-                  </a:schemeClr>
-                </a:solidFill>
-              </a:defRPr>
-            </a:lvl1pPr>
-          </a:lstStyle>
-          <a:p>
-            <a:endParaRPr lang="en-IN"/>
-          </a:p>
-        </p:txBody>
-      </p:sp>
-      <p:sp>
-        <p:nvSpPr>
-          <p:cNvPr id="6" name="Slide Number Placeholder 5">
-            <a:extLst>
-              <a:ext uri="{FF2B5EF4-FFF2-40B4-BE49-F238E27FC236}">
-                <a16:creationId xmlns:a16="http://schemas.microsoft.com/office/drawing/2014/main" id="{2C0C6BA6-2CC7-519F-3673-438B65A80E8B}"/>
-              </a:ext>
-            </a:extLst>
-          </p:cNvPr>
-          <p:cNvSpPr>
-            <a:spLocks noGrp="1"/>
-          </p:cNvSpPr>
-          <p:nvPr>
-            <p:ph type="sldNum" sz="quarter" idx="4"/>
-          </p:nvPr>
-        </p:nvSpPr>
-        <p:spPr>
-          <a:xfrm>
-            <a:off x="8610600" y="6356350"/>
-            <a:ext cx="2743200" cy="365125"/>
-          </a:xfrm>
-          <a:prstGeom prst="rect">
-            <a:avLst/>
-          </a:prstGeom>
-        </p:spPr>
-        <p:txBody>
-          <a:bodyPr vert="horz" lIns="91440" tIns="45720" rIns="91440" bIns="45720" rtlCol="0" anchor="ctr"/>
-          <a:lstStyle>
-            <a:lvl1pPr algn="r">
-              <a:defRPr sz="1200">
-                <a:solidFill>
-                  <a:schemeClr val="tx1">
-                    <a:tint val="82000"/>
-                  </a:schemeClr>
+                  <a:srgbClr val="FFFFFF"/>
                 </a:solidFill>
               </a:defRPr>
             </a:lvl1pPr>
@@ -3037,27 +2949,27 @@
     </p:spTree>
     <p:extLst>
       <p:ext uri="{BB962C8B-B14F-4D97-AF65-F5344CB8AC3E}">
-        <p14:creationId xmlns:p14="http://schemas.microsoft.com/office/powerpoint/2010/main" val="1775267455"/>
+        <p14:creationId xmlns:p14="http://schemas.microsoft.com/office/powerpoint/2010/main" val="2808336456"/>
       </p:ext>
     </p:extLst>
   </p:cSld>
   <p:clrMap bg1="lt1" tx1="dk1" bg2="lt2" tx2="dk2" accent1="accent1" accent2="accent2" accent3="accent3" accent4="accent4" accent5="accent5" accent6="accent6" hlink="hlink" folHlink="folHlink"/>
   <p:sldLayoutIdLst>
-    <p:sldLayoutId id="2147483708" r:id="rId1"/>
-    <p:sldLayoutId id="2147483709" r:id="rId2"/>
-    <p:sldLayoutId id="2147483710" r:id="rId3"/>
-    <p:sldLayoutId id="2147483711" r:id="rId4"/>
-    <p:sldLayoutId id="2147483712" r:id="rId5"/>
-    <p:sldLayoutId id="2147483713" r:id="rId6"/>
-    <p:sldLayoutId id="2147483714" r:id="rId7"/>
-    <p:sldLayoutId id="2147483715" r:id="rId8"/>
-    <p:sldLayoutId id="2147483716" r:id="rId9"/>
-    <p:sldLayoutId id="2147483717" r:id="rId10"/>
-    <p:sldLayoutId id="2147483718" r:id="rId11"/>
+    <p:sldLayoutId id="2147483786" r:id="rId1"/>
+    <p:sldLayoutId id="2147483787" r:id="rId2"/>
+    <p:sldLayoutId id="2147483788" r:id="rId3"/>
+    <p:sldLayoutId id="2147483789" r:id="rId4"/>
+    <p:sldLayoutId id="2147483790" r:id="rId5"/>
+    <p:sldLayoutId id="2147483791" r:id="rId6"/>
+    <p:sldLayoutId id="2147483792" r:id="rId7"/>
+    <p:sldLayoutId id="2147483793" r:id="rId8"/>
+    <p:sldLayoutId id="2147483794" r:id="rId9"/>
+    <p:sldLayoutId id="2147483795" r:id="rId10"/>
+    <p:sldLayoutId id="2147483796" r:id="rId11"/>
   </p:sldLayoutIdLst>
   <p:txStyles>
     <p:titleStyle>
-      <a:lvl1pPr algn="l" defTabSz="914400" rtl="0" eaLnBrk="1" latinLnBrk="0" hangingPunct="1">
+      <a:lvl1pPr algn="ctr" defTabSz="914400" rtl="0" eaLnBrk="1" latinLnBrk="0" hangingPunct="1">
         <a:lnSpc>
           <a:spcPct val="90000"/>
         </a:lnSpc>
@@ -3065,9 +2977,9 @@
           <a:spcPct val="0"/>
         </a:spcBef>
         <a:buNone/>
-        <a:defRPr sz="4400" kern="1200">
+        <a:defRPr sz="2800" kern="1200" cap="all" spc="200" baseline="0">
           <a:solidFill>
-            <a:schemeClr val="tx1"/>
+            <a:srgbClr val="262626"/>
           </a:solidFill>
           <a:latin typeface="+mj-lt"/>
           <a:ea typeface="+mj-ea"/>
@@ -3078,104 +2990,137 @@
     <p:bodyStyle>
       <a:lvl1pPr marL="228600" indent="-228600" algn="l" defTabSz="914400" rtl="0" eaLnBrk="1" latinLnBrk="0" hangingPunct="1">
         <a:lnSpc>
-          <a:spcPct val="90000"/>
+          <a:spcPct val="100000"/>
         </a:lnSpc>
         <a:spcBef>
           <a:spcPts val="1000"/>
         </a:spcBef>
+        <a:buClr>
+          <a:schemeClr val="accent2"/>
+        </a:buClr>
         <a:buFont typeface="Arial" panose="020B0604020202020204" pitchFamily="34" charset="0"/>
         <a:buChar char="•"/>
-        <a:defRPr sz="2800" kern="1200">
+        <a:defRPr sz="1800" kern="1200">
           <a:solidFill>
-            <a:schemeClr val="tx1"/>
+            <a:schemeClr val="tx1">
+              <a:lumMod val="85000"/>
+              <a:lumOff val="15000"/>
+            </a:schemeClr>
           </a:solidFill>
           <a:latin typeface="+mn-lt"/>
           <a:ea typeface="+mn-ea"/>
           <a:cs typeface="+mn-cs"/>
         </a:defRPr>
       </a:lvl1pPr>
-      <a:lvl2pPr marL="685800" indent="-228600" algn="l" defTabSz="914400" rtl="0" eaLnBrk="1" latinLnBrk="0" hangingPunct="1">
+      <a:lvl2pPr marL="457200" indent="-228600" algn="l" defTabSz="914400" rtl="0" eaLnBrk="1" latinLnBrk="0" hangingPunct="1">
         <a:lnSpc>
-          <a:spcPct val="90000"/>
+          <a:spcPct val="100000"/>
         </a:lnSpc>
         <a:spcBef>
-          <a:spcPts val="500"/>
+          <a:spcPts val="1000"/>
         </a:spcBef>
+        <a:buClr>
+          <a:schemeClr val="accent2"/>
+        </a:buClr>
         <a:buFont typeface="Arial" panose="020B0604020202020204" pitchFamily="34" charset="0"/>
         <a:buChar char="•"/>
-        <a:defRPr sz="2400" kern="1200">
+        <a:defRPr sz="1600" kern="1200">
           <a:solidFill>
-            <a:schemeClr val="tx1"/>
+            <a:schemeClr val="tx1">
+              <a:lumMod val="85000"/>
+              <a:lumOff val="15000"/>
+            </a:schemeClr>
           </a:solidFill>
           <a:latin typeface="+mn-lt"/>
           <a:ea typeface="+mn-ea"/>
           <a:cs typeface="+mn-cs"/>
         </a:defRPr>
       </a:lvl2pPr>
-      <a:lvl3pPr marL="1143000" indent="-228600" algn="l" defTabSz="914400" rtl="0" eaLnBrk="1" latinLnBrk="0" hangingPunct="1">
+      <a:lvl3pPr marL="685800" indent="-228600" algn="l" defTabSz="914400" rtl="0" eaLnBrk="1" latinLnBrk="0" hangingPunct="1">
         <a:lnSpc>
-          <a:spcPct val="90000"/>
+          <a:spcPct val="100000"/>
         </a:lnSpc>
         <a:spcBef>
-          <a:spcPts val="500"/>
+          <a:spcPts val="1000"/>
         </a:spcBef>
+        <a:buClr>
+          <a:schemeClr val="accent2"/>
+        </a:buClr>
         <a:buFont typeface="Arial" panose="020B0604020202020204" pitchFamily="34" charset="0"/>
         <a:buChar char="•"/>
-        <a:defRPr sz="2000" kern="1200">
+        <a:defRPr sz="1600" kern="1200">
           <a:solidFill>
-            <a:schemeClr val="tx1"/>
+            <a:schemeClr val="tx1">
+              <a:lumMod val="85000"/>
+              <a:lumOff val="15000"/>
+            </a:schemeClr>
           </a:solidFill>
           <a:latin typeface="+mn-lt"/>
           <a:ea typeface="+mn-ea"/>
           <a:cs typeface="+mn-cs"/>
         </a:defRPr>
       </a:lvl3pPr>
-      <a:lvl4pPr marL="1600200" indent="-228600" algn="l" defTabSz="914400" rtl="0" eaLnBrk="1" latinLnBrk="0" hangingPunct="1">
+      <a:lvl4pPr marL="914400" indent="-228600" algn="l" defTabSz="914400" rtl="0" eaLnBrk="1" latinLnBrk="0" hangingPunct="1">
         <a:lnSpc>
-          <a:spcPct val="90000"/>
+          <a:spcPct val="100000"/>
         </a:lnSpc>
         <a:spcBef>
-          <a:spcPts val="500"/>
+          <a:spcPts val="1000"/>
         </a:spcBef>
+        <a:buClr>
+          <a:schemeClr val="accent2"/>
+        </a:buClr>
         <a:buFont typeface="Arial" panose="020B0604020202020204" pitchFamily="34" charset="0"/>
         <a:buChar char="•"/>
-        <a:defRPr sz="1800" kern="1200">
+        <a:defRPr sz="1600" kern="1200">
           <a:solidFill>
-            <a:schemeClr val="tx1"/>
+            <a:schemeClr val="tx1">
+              <a:lumMod val="85000"/>
+              <a:lumOff val="15000"/>
+            </a:schemeClr>
           </a:solidFill>
           <a:latin typeface="+mn-lt"/>
           <a:ea typeface="+mn-ea"/>
           <a:cs typeface="+mn-cs"/>
         </a:defRPr>
       </a:lvl4pPr>
-      <a:lvl5pPr marL="2057400" indent="-228600" algn="l" defTabSz="914400" rtl="0" eaLnBrk="1" latinLnBrk="0" hangingPunct="1">
+      <a:lvl5pPr marL="1143000" indent="-228600" algn="l" defTabSz="914400" rtl="0" eaLnBrk="1" latinLnBrk="0" hangingPunct="1">
         <a:lnSpc>
-          <a:spcPct val="90000"/>
+          <a:spcPct val="100000"/>
         </a:lnSpc>
         <a:spcBef>
-          <a:spcPts val="500"/>
+          <a:spcPts val="1000"/>
         </a:spcBef>
+        <a:buClr>
+          <a:schemeClr val="accent2"/>
+        </a:buClr>
         <a:buFont typeface="Arial" panose="020B0604020202020204" pitchFamily="34" charset="0"/>
         <a:buChar char="•"/>
-        <a:defRPr sz="1800" kern="1200">
+        <a:defRPr sz="1600" kern="1200">
           <a:solidFill>
-            <a:schemeClr val="tx1"/>
+            <a:schemeClr val="tx1">
+              <a:lumMod val="85000"/>
+              <a:lumOff val="15000"/>
+            </a:schemeClr>
           </a:solidFill>
           <a:latin typeface="+mn-lt"/>
           <a:ea typeface="+mn-ea"/>
           <a:cs typeface="+mn-cs"/>
         </a:defRPr>
       </a:lvl5pPr>
-      <a:lvl6pPr marL="2514600" indent="-228600" algn="l" defTabSz="914400" rtl="0" eaLnBrk="1" latinLnBrk="0" hangingPunct="1">
+      <a:lvl6pPr marL="1312863" indent="-228600" algn="l" defTabSz="914400" rtl="0" eaLnBrk="1" latinLnBrk="0" hangingPunct="1">
         <a:lnSpc>
-          <a:spcPct val="90000"/>
+          <a:spcPct val="100000"/>
         </a:lnSpc>
         <a:spcBef>
-          <a:spcPts val="500"/>
+          <a:spcPts val="1000"/>
         </a:spcBef>
+        <a:buClr>
+          <a:schemeClr val="accent2"/>
+        </a:buClr>
         <a:buFont typeface="Arial" panose="020B0604020202020204" pitchFamily="34" charset="0"/>
         <a:buChar char="•"/>
-        <a:defRPr sz="1800" kern="1200">
+        <a:defRPr sz="1600" kern="1200">
           <a:solidFill>
             <a:schemeClr val="tx1"/>
           </a:solidFill>
@@ -3184,16 +3129,19 @@
           <a:cs typeface="+mn-cs"/>
         </a:defRPr>
       </a:lvl6pPr>
-      <a:lvl7pPr marL="2971800" indent="-228600" algn="l" defTabSz="914400" rtl="0" eaLnBrk="1" latinLnBrk="0" hangingPunct="1">
+      <a:lvl7pPr marL="1484313" indent="-228600" algn="l" defTabSz="914400" rtl="0" eaLnBrk="1" latinLnBrk="0" hangingPunct="1">
         <a:lnSpc>
-          <a:spcPct val="90000"/>
+          <a:spcPct val="100000"/>
         </a:lnSpc>
         <a:spcBef>
-          <a:spcPts val="500"/>
+          <a:spcPts val="1000"/>
         </a:spcBef>
+        <a:buClr>
+          <a:schemeClr val="accent2"/>
+        </a:buClr>
         <a:buFont typeface="Arial" panose="020B0604020202020204" pitchFamily="34" charset="0"/>
         <a:buChar char="•"/>
-        <a:defRPr sz="1800" kern="1200">
+        <a:defRPr sz="1600" kern="1200">
           <a:solidFill>
             <a:schemeClr val="tx1"/>
           </a:solidFill>
@@ -3202,16 +3150,19 @@
           <a:cs typeface="+mn-cs"/>
         </a:defRPr>
       </a:lvl7pPr>
-      <a:lvl8pPr marL="3429000" indent="-228600" algn="l" defTabSz="914400" rtl="0" eaLnBrk="1" latinLnBrk="0" hangingPunct="1">
+      <a:lvl8pPr marL="1657350" indent="-228600" algn="l" defTabSz="914400" rtl="0" eaLnBrk="1" latinLnBrk="0" hangingPunct="1">
         <a:lnSpc>
-          <a:spcPct val="90000"/>
+          <a:spcPct val="100000"/>
         </a:lnSpc>
         <a:spcBef>
-          <a:spcPts val="500"/>
+          <a:spcPts val="1000"/>
         </a:spcBef>
+        <a:buClr>
+          <a:schemeClr val="accent2"/>
+        </a:buClr>
         <a:buFont typeface="Arial" panose="020B0604020202020204" pitchFamily="34" charset="0"/>
         <a:buChar char="•"/>
-        <a:defRPr sz="1800" kern="1200">
+        <a:defRPr sz="1600" kern="1200" baseline="0">
           <a:solidFill>
             <a:schemeClr val="tx1"/>
           </a:solidFill>
@@ -3220,16 +3171,19 @@
           <a:cs typeface="+mn-cs"/>
         </a:defRPr>
       </a:lvl8pPr>
-      <a:lvl9pPr marL="3886200" indent="-228600" algn="l" defTabSz="914400" rtl="0" eaLnBrk="1" latinLnBrk="0" hangingPunct="1">
+      <a:lvl9pPr marL="1882775" indent="-228600" algn="l" defTabSz="914400" rtl="0" eaLnBrk="1" latinLnBrk="0" hangingPunct="1">
         <a:lnSpc>
-          <a:spcPct val="90000"/>
+          <a:spcPct val="100000"/>
         </a:lnSpc>
         <a:spcBef>
-          <a:spcPts val="500"/>
+          <a:spcPts val="1000"/>
         </a:spcBef>
+        <a:buClr>
+          <a:schemeClr val="accent2"/>
+        </a:buClr>
         <a:buFont typeface="Arial" panose="020B0604020202020204" pitchFamily="34" charset="0"/>
         <a:buChar char="•"/>
-        <a:defRPr sz="1800" kern="1200">
+        <a:defRPr sz="1600" kern="1200" baseline="0">
           <a:solidFill>
             <a:schemeClr val="tx1"/>
           </a:solidFill>
@@ -3440,15 +3394,38 @@
         </p:spPr>
         <p:txBody>
           <a:bodyPr anchor="ctr">
-            <a:normAutofit/>
+            <a:normAutofit fontScale="92500" lnSpcReduction="20000"/>
           </a:bodyPr>
           <a:lstStyle/>
           <a:p>
-            <a:endParaRPr lang="en-IN">
-              <a:solidFill>
-                <a:schemeClr val="bg1"/>
-              </a:solidFill>
-            </a:endParaRPr>
+            <a:r>
+              <a:rPr lang="en-IN" dirty="0">
+                <a:solidFill>
+                  <a:schemeClr val="bg1"/>
+                </a:solidFill>
+              </a:rPr>
+              <a:t>Created and Presented by</a:t>
+            </a:r>
+          </a:p>
+          <a:p>
+            <a:r>
+              <a:rPr lang="en-IN" dirty="0">
+                <a:solidFill>
+                  <a:schemeClr val="bg1"/>
+                </a:solidFill>
+              </a:rPr>
+              <a:t>Name: Rishi Pratap Yadav</a:t>
+            </a:r>
+          </a:p>
+          <a:p>
+            <a:r>
+              <a:rPr lang="en-IN" dirty="0">
+                <a:solidFill>
+                  <a:schemeClr val="bg1"/>
+                </a:solidFill>
+              </a:rPr>
+              <a:t>Emp Id: 3145887</a:t>
+            </a:r>
           </a:p>
         </p:txBody>
       </p:sp>
@@ -3456,6 +3433,463 @@
     <p:extLst>
       <p:ext uri="{BB962C8B-B14F-4D97-AF65-F5344CB8AC3E}">
         <p14:creationId xmlns:p14="http://schemas.microsoft.com/office/powerpoint/2010/main" val="2949998921"/>
+      </p:ext>
+    </p:extLst>
+  </p:cSld>
+  <p:clrMapOvr>
+    <a:masterClrMapping/>
+  </p:clrMapOvr>
+</p:sld>
+</file>
+
+<file path=ppt/slides/slide10.xml><?xml version="1.0" encoding="utf-8"?>
+<p:sld xmlns:a="http://schemas.openxmlformats.org/drawingml/2006/main" xmlns:r="http://schemas.openxmlformats.org/officeDocument/2006/relationships" xmlns:p="http://schemas.openxmlformats.org/presentationml/2006/main">
+  <p:cSld>
+    <p:bg>
+      <p:bgPr>
+        <a:solidFill>
+          <a:schemeClr val="bg1"/>
+        </a:solidFill>
+        <a:effectLst/>
+      </p:bgPr>
+    </p:bg>
+    <p:spTree>
+      <p:nvGrpSpPr>
+        <p:cNvPr id="1" name="">
+          <a:extLst>
+            <a:ext uri="{FF2B5EF4-FFF2-40B4-BE49-F238E27FC236}">
+              <a16:creationId xmlns:a16="http://schemas.microsoft.com/office/drawing/2014/main" id="{835A087C-E877-20DC-311D-C848D0344BE3}"/>
+            </a:ext>
+          </a:extLst>
+        </p:cNvPr>
+        <p:cNvGrpSpPr/>
+        <p:nvPr/>
+      </p:nvGrpSpPr>
+      <p:grpSpPr>
+        <a:xfrm>
+          <a:off x="0" y="0"/>
+          <a:ext cx="0" cy="0"/>
+          <a:chOff x="0" y="0"/>
+          <a:chExt cx="0" cy="0"/>
+        </a:xfrm>
+      </p:grpSpPr>
+      <p:pic>
+        <p:nvPicPr>
+          <p:cNvPr id="5" name="Content Placeholder 4">
+            <a:extLst>
+              <a:ext uri="{FF2B5EF4-FFF2-40B4-BE49-F238E27FC236}">
+                <a16:creationId xmlns:a16="http://schemas.microsoft.com/office/drawing/2014/main" id="{C8BCFBBF-0291-A60C-B404-1A08B1A4D320}"/>
+              </a:ext>
+            </a:extLst>
+          </p:cNvPr>
+          <p:cNvPicPr>
+            <a:picLocks noChangeAspect="1"/>
+          </p:cNvPicPr>
+          <p:nvPr/>
+        </p:nvPicPr>
+        <p:blipFill>
+          <a:blip r:embed="rId2">
+            <a:extLst>
+              <a:ext uri="{28A0092B-C50C-407E-A947-70E740481C1C}">
+                <a14:useLocalDpi xmlns:a14="http://schemas.microsoft.com/office/drawing/2010/main" val="0"/>
+              </a:ext>
+            </a:extLst>
+          </a:blip>
+          <a:srcRect t="12222" b="11183"/>
+          <a:stretch>
+            <a:fillRect/>
+          </a:stretch>
+        </p:blipFill>
+        <p:spPr>
+          <a:xfrm>
+            <a:off x="20" y="10"/>
+            <a:ext cx="12191979" cy="5486390"/>
+          </a:xfrm>
+          <a:prstGeom prst="rect">
+            <a:avLst/>
+          </a:prstGeom>
+          <a:effectLst>
+            <a:outerShdw blurRad="596900" dist="330200" dir="8820000" sx="87000" sy="87000" algn="ctr" rotWithShape="0">
+              <a:srgbClr val="000000">
+                <a:alpha val="29000"/>
+              </a:srgbClr>
+            </a:outerShdw>
+          </a:effectLst>
+        </p:spPr>
+      </p:pic>
+      <p:sp>
+        <p:nvSpPr>
+          <p:cNvPr id="2" name="Title 1">
+            <a:extLst>
+              <a:ext uri="{FF2B5EF4-FFF2-40B4-BE49-F238E27FC236}">
+                <a16:creationId xmlns:a16="http://schemas.microsoft.com/office/drawing/2014/main" id="{FEA4572F-AAEA-0CAF-BE37-2D98170449C7}"/>
+              </a:ext>
+            </a:extLst>
+          </p:cNvPr>
+          <p:cNvSpPr>
+            <a:spLocks noGrp="1"/>
+          </p:cNvSpPr>
+          <p:nvPr>
+            <p:ph type="title"/>
+          </p:nvPr>
+        </p:nvSpPr>
+        <p:spPr>
+          <a:xfrm>
+            <a:off x="589556" y="5746071"/>
+            <a:ext cx="7015499" cy="852260"/>
+          </a:xfrm>
+        </p:spPr>
+        <p:txBody>
+          <a:bodyPr vert="horz" lIns="91440" tIns="45720" rIns="91440" bIns="45720" rtlCol="0" anchor="ctr">
+            <a:normAutofit/>
+          </a:bodyPr>
+          <a:lstStyle/>
+          <a:p>
+            <a:r>
+              <a:rPr lang="en-US" sz="3600"/>
+              <a:t>Backend CI/CD</a:t>
+            </a:r>
+          </a:p>
+        </p:txBody>
+      </p:sp>
+    </p:spTree>
+    <p:extLst>
+      <p:ext uri="{BB962C8B-B14F-4D97-AF65-F5344CB8AC3E}">
+        <p14:creationId xmlns:p14="http://schemas.microsoft.com/office/powerpoint/2010/main" val="757524977"/>
+      </p:ext>
+    </p:extLst>
+  </p:cSld>
+  <p:clrMapOvr>
+    <a:masterClrMapping/>
+  </p:clrMapOvr>
+</p:sld>
+</file>
+
+<file path=ppt/slides/slide11.xml><?xml version="1.0" encoding="utf-8"?>
+<p:sld xmlns:a="http://schemas.openxmlformats.org/drawingml/2006/main" xmlns:r="http://schemas.openxmlformats.org/officeDocument/2006/relationships" xmlns:p="http://schemas.openxmlformats.org/presentationml/2006/main">
+  <p:cSld>
+    <p:spTree>
+      <p:nvGrpSpPr>
+        <p:cNvPr id="1" name=""/>
+        <p:cNvGrpSpPr/>
+        <p:nvPr/>
+      </p:nvGrpSpPr>
+      <p:grpSpPr>
+        <a:xfrm>
+          <a:off x="0" y="0"/>
+          <a:ext cx="0" cy="0"/>
+          <a:chOff x="0" y="0"/>
+          <a:chExt cx="0" cy="0"/>
+        </a:xfrm>
+      </p:grpSpPr>
+      <p:sp>
+        <p:nvSpPr>
+          <p:cNvPr id="2" name="Title 1">
+            <a:extLst>
+              <a:ext uri="{FF2B5EF4-FFF2-40B4-BE49-F238E27FC236}">
+                <a16:creationId xmlns:a16="http://schemas.microsoft.com/office/drawing/2014/main" id="{34FBBE4D-D351-2AF6-749C-43949A40FF83}"/>
+              </a:ext>
+            </a:extLst>
+          </p:cNvPr>
+          <p:cNvSpPr>
+            <a:spLocks noGrp="1"/>
+          </p:cNvSpPr>
+          <p:nvPr>
+            <p:ph type="title"/>
+          </p:nvPr>
+        </p:nvSpPr>
+        <p:spPr/>
+        <p:txBody>
+          <a:bodyPr/>
+          <a:lstStyle/>
+          <a:p>
+            <a:r>
+              <a:rPr lang="en-IN" dirty="0"/>
+              <a:t>DAR</a:t>
+            </a:r>
+          </a:p>
+        </p:txBody>
+      </p:sp>
+      <p:sp>
+        <p:nvSpPr>
+          <p:cNvPr id="6" name="TextBox 5">
+            <a:extLst>
+              <a:ext uri="{FF2B5EF4-FFF2-40B4-BE49-F238E27FC236}">
+                <a16:creationId xmlns:a16="http://schemas.microsoft.com/office/drawing/2014/main" id="{70D2485C-263A-03CF-9B5E-7D13A1B5C7D8}"/>
+              </a:ext>
+            </a:extLst>
+          </p:cNvPr>
+          <p:cNvSpPr txBox="1"/>
+          <p:nvPr/>
+        </p:nvSpPr>
+        <p:spPr>
+          <a:xfrm>
+            <a:off x="2231136" y="2292620"/>
+            <a:ext cx="7729728" cy="3240000"/>
+          </a:xfrm>
+          <a:prstGeom prst="rect">
+            <a:avLst/>
+          </a:prstGeom>
+          <a:solidFill>
+            <a:schemeClr val="bg1"/>
+          </a:solidFill>
+          <a:ln>
+            <a:solidFill>
+              <a:schemeClr val="tx1"/>
+            </a:solidFill>
+          </a:ln>
+          <a:effectLst>
+            <a:softEdge rad="0"/>
+          </a:effectLst>
+        </p:spPr>
+        <p:txBody>
+          <a:bodyPr wrap="square" rtlCol="0">
+            <a:spAutoFit/>
+          </a:bodyPr>
+          <a:lstStyle/>
+          <a:p>
+            <a:pPr marL="285750" indent="-285750">
+              <a:buFont typeface="Arial" panose="020B0604020202020204" pitchFamily="34" charset="0"/>
+              <a:buChar char="•"/>
+            </a:pPr>
+            <a:r>
+              <a:rPr lang="en-IN" dirty="0"/>
+              <a:t>Failover Strategy – DAR</a:t>
+            </a:r>
+          </a:p>
+          <a:p>
+            <a:pPr marL="285750" indent="-285750">
+              <a:buFont typeface="Arial" panose="020B0604020202020204" pitchFamily="34" charset="0"/>
+              <a:buChar char="•"/>
+            </a:pPr>
+            <a:endParaRPr lang="en-IN" dirty="0"/>
+          </a:p>
+          <a:p>
+            <a:pPr marL="285750" indent="-285750">
+              <a:buFont typeface="Arial" panose="020B0604020202020204" pitchFamily="34" charset="0"/>
+              <a:buChar char="•"/>
+            </a:pPr>
+            <a:endParaRPr lang="en-IN" dirty="0"/>
+          </a:p>
+          <a:p>
+            <a:pPr marL="285750" indent="-285750">
+              <a:buFont typeface="Arial" panose="020B0604020202020204" pitchFamily="34" charset="0"/>
+              <a:buChar char="•"/>
+            </a:pPr>
+            <a:endParaRPr lang="en-IN" dirty="0"/>
+          </a:p>
+          <a:p>
+            <a:pPr marL="285750" indent="-285750">
+              <a:buFont typeface="Arial" panose="020B0604020202020204" pitchFamily="34" charset="0"/>
+              <a:buChar char="•"/>
+            </a:pPr>
+            <a:r>
+              <a:rPr lang="en-IN" dirty="0"/>
+              <a:t>DR strategy – DAR    </a:t>
+            </a:r>
+          </a:p>
+          <a:p>
+            <a:pPr marL="285750" indent="-285750">
+              <a:buFont typeface="Arial" panose="020B0604020202020204" pitchFamily="34" charset="0"/>
+              <a:buChar char="•"/>
+            </a:pPr>
+            <a:endParaRPr lang="en-IN" dirty="0"/>
+          </a:p>
+        </p:txBody>
+      </p:sp>
+      <p:graphicFrame>
+        <p:nvGraphicFramePr>
+          <p:cNvPr id="7" name="Object 6">
+            <a:extLst>
+              <a:ext uri="{FF2B5EF4-FFF2-40B4-BE49-F238E27FC236}">
+                <a16:creationId xmlns:a16="http://schemas.microsoft.com/office/drawing/2014/main" id="{A5E0A1CF-20C1-3287-BE5D-2230AB281D5A}"/>
+              </a:ext>
+            </a:extLst>
+          </p:cNvPr>
+          <p:cNvGraphicFramePr>
+            <a:graphicFrameLocks noChangeAspect="1"/>
+          </p:cNvGraphicFramePr>
+          <p:nvPr>
+            <p:extLst>
+              <p:ext uri="{D42A27DB-BD31-4B8C-83A1-F6EECF244321}">
+                <p14:modId xmlns:p14="http://schemas.microsoft.com/office/powerpoint/2010/main" val="3367641186"/>
+              </p:ext>
+            </p:extLst>
+          </p:nvPr>
+        </p:nvGraphicFramePr>
+        <p:xfrm>
+          <a:off x="4811486" y="3245663"/>
+          <a:ext cx="914400" cy="806450"/>
+        </p:xfrm>
+        <a:graphic>
+          <a:graphicData uri="http://schemas.openxmlformats.org/presentationml/2006/ole">
+            <mc:AlternateContent xmlns:mc="http://schemas.openxmlformats.org/markup-compatibility/2006">
+              <mc:Choice xmlns:v="urn:schemas-microsoft-com:vml" Requires="v">
+                <p:oleObj name="Document" showAsIcon="1" r:id="rId2" imgW="914597" imgH="806311" progId="Word.Document.12">
+                  <p:embed/>
+                </p:oleObj>
+              </mc:Choice>
+              <mc:Fallback>
+                <p:oleObj name="Document" showAsIcon="1" r:id="rId2" imgW="914597" imgH="806311" progId="Word.Document.12">
+                  <p:embed/>
+                  <p:pic>
+                    <p:nvPicPr>
+                      <p:cNvPr id="0" name=""/>
+                      <p:cNvPicPr/>
+                      <p:nvPr/>
+                    </p:nvPicPr>
+                    <p:blipFill>
+                      <a:blip r:embed="rId3"/>
+                      <a:stretch>
+                        <a:fillRect/>
+                      </a:stretch>
+                    </p:blipFill>
+                    <p:spPr>
+                      <a:xfrm>
+                        <a:off x="4811486" y="3245663"/>
+                        <a:ext cx="914400" cy="806450"/>
+                      </a:xfrm>
+                      <a:prstGeom prst="rect">
+                        <a:avLst/>
+                      </a:prstGeom>
+                    </p:spPr>
+                  </p:pic>
+                </p:oleObj>
+              </mc:Fallback>
+            </mc:AlternateContent>
+          </a:graphicData>
+        </a:graphic>
+      </p:graphicFrame>
+      <p:graphicFrame>
+        <p:nvGraphicFramePr>
+          <p:cNvPr id="5" name="Object 4">
+            <a:extLst>
+              <a:ext uri="{FF2B5EF4-FFF2-40B4-BE49-F238E27FC236}">
+                <a16:creationId xmlns:a16="http://schemas.microsoft.com/office/drawing/2014/main" id="{91243CAF-C3A5-7CA9-1D21-2C856177D697}"/>
+              </a:ext>
+            </a:extLst>
+          </p:cNvPr>
+          <p:cNvGraphicFramePr>
+            <a:graphicFrameLocks noChangeAspect="1"/>
+          </p:cNvGraphicFramePr>
+          <p:nvPr>
+            <p:extLst>
+              <p:ext uri="{D42A27DB-BD31-4B8C-83A1-F6EECF244321}">
+                <p14:modId xmlns:p14="http://schemas.microsoft.com/office/powerpoint/2010/main" val="4234007843"/>
+              </p:ext>
+            </p:extLst>
+          </p:nvPr>
+        </p:nvGraphicFramePr>
+        <p:xfrm>
+          <a:off x="4974773" y="2363333"/>
+          <a:ext cx="914400" cy="806450"/>
+        </p:xfrm>
+        <a:graphic>
+          <a:graphicData uri="http://schemas.openxmlformats.org/presentationml/2006/ole">
+            <mc:AlternateContent xmlns:mc="http://schemas.openxmlformats.org/markup-compatibility/2006">
+              <mc:Choice xmlns:v="urn:schemas-microsoft-com:vml" Requires="v">
+                <p:oleObj name="Document" showAsIcon="1" r:id="rId4" imgW="914597" imgH="806311" progId="Word.Document.12">
+                  <p:embed/>
+                </p:oleObj>
+              </mc:Choice>
+              <mc:Fallback>
+                <p:oleObj name="Document" showAsIcon="1" r:id="rId4" imgW="914597" imgH="806311" progId="Word.Document.12">
+                  <p:embed/>
+                  <p:pic>
+                    <p:nvPicPr>
+                      <p:cNvPr id="0" name=""/>
+                      <p:cNvPicPr/>
+                      <p:nvPr/>
+                    </p:nvPicPr>
+                    <p:blipFill>
+                      <a:blip r:embed="rId5"/>
+                      <a:stretch>
+                        <a:fillRect/>
+                      </a:stretch>
+                    </p:blipFill>
+                    <p:spPr>
+                      <a:xfrm>
+                        <a:off x="4974773" y="2363333"/>
+                        <a:ext cx="914400" cy="806450"/>
+                      </a:xfrm>
+                      <a:prstGeom prst="rect">
+                        <a:avLst/>
+                      </a:prstGeom>
+                    </p:spPr>
+                  </p:pic>
+                </p:oleObj>
+              </mc:Fallback>
+            </mc:AlternateContent>
+          </a:graphicData>
+        </a:graphic>
+      </p:graphicFrame>
+    </p:spTree>
+    <p:extLst>
+      <p:ext uri="{BB962C8B-B14F-4D97-AF65-F5344CB8AC3E}">
+        <p14:creationId xmlns:p14="http://schemas.microsoft.com/office/powerpoint/2010/main" val="2539194987"/>
+      </p:ext>
+    </p:extLst>
+  </p:cSld>
+  <p:clrMapOvr>
+    <a:masterClrMapping/>
+  </p:clrMapOvr>
+</p:sld>
+</file>
+
+<file path=ppt/slides/slide12.xml><?xml version="1.0" encoding="utf-8"?>
+<p:sld xmlns:a="http://schemas.openxmlformats.org/drawingml/2006/main" xmlns:r="http://schemas.openxmlformats.org/officeDocument/2006/relationships" xmlns:p="http://schemas.openxmlformats.org/presentationml/2006/main">
+  <p:cSld>
+    <p:spTree>
+      <p:nvGrpSpPr>
+        <p:cNvPr id="1" name=""/>
+        <p:cNvGrpSpPr/>
+        <p:nvPr/>
+      </p:nvGrpSpPr>
+      <p:grpSpPr>
+        <a:xfrm>
+          <a:off x="0" y="0"/>
+          <a:ext cx="0" cy="0"/>
+          <a:chOff x="0" y="0"/>
+          <a:chExt cx="0" cy="0"/>
+        </a:xfrm>
+      </p:grpSpPr>
+      <p:sp>
+        <p:nvSpPr>
+          <p:cNvPr id="2" name="Title 1">
+            <a:extLst>
+              <a:ext uri="{FF2B5EF4-FFF2-40B4-BE49-F238E27FC236}">
+                <a16:creationId xmlns:a16="http://schemas.microsoft.com/office/drawing/2014/main" id="{49E792FC-1BFD-9B0E-13D1-2BF6D0556F25}"/>
+              </a:ext>
+            </a:extLst>
+          </p:cNvPr>
+          <p:cNvSpPr>
+            <a:spLocks noGrp="1"/>
+          </p:cNvSpPr>
+          <p:nvPr>
+            <p:ph type="title"/>
+          </p:nvPr>
+        </p:nvSpPr>
+        <p:spPr>
+          <a:xfrm>
+            <a:off x="2231136" y="2456035"/>
+            <a:ext cx="7729728" cy="1188720"/>
+          </a:xfrm>
+        </p:spPr>
+        <p:txBody>
+          <a:bodyPr/>
+          <a:lstStyle/>
+          <a:p>
+            <a:r>
+              <a:rPr lang="en-IN" dirty="0"/>
+              <a:t>Demo</a:t>
+            </a:r>
+          </a:p>
+        </p:txBody>
+      </p:sp>
+    </p:spTree>
+    <p:extLst>
+      <p:ext uri="{BB962C8B-B14F-4D97-AF65-F5344CB8AC3E}">
+        <p14:creationId xmlns:p14="http://schemas.microsoft.com/office/powerpoint/2010/main" val="737526370"/>
       </p:ext>
     </p:extLst>
   </p:cSld>
@@ -3648,7 +4082,7 @@
         <p:spPr/>
         <p:txBody>
           <a:bodyPr>
-            <a:normAutofit lnSpcReduction="10000"/>
+            <a:normAutofit fontScale="92500" lnSpcReduction="20000"/>
           </a:bodyPr>
           <a:lstStyle/>
           <a:p>
@@ -3893,7 +4327,7 @@
             </a:pPr>
             <a:r>
               <a:rPr lang="en-IN" dirty="0"/>
-              <a:t>Ability to handle millions of concurrent requests</a:t>
+              <a:t>Ability to handle thousands of concurrent requests</a:t>
             </a:r>
           </a:p>
           <a:p>
@@ -4034,7 +4468,7 @@
             </a:pPr>
             <a:r>
               <a:rPr lang="en-IN" dirty="0"/>
-              <a:t>Third party integration with Payment gateway.</a:t>
+              <a:t>Third party integration with Payment gateway and Logistics.</a:t>
             </a:r>
           </a:p>
           <a:p>
@@ -4062,14 +4496,6 @@
 <file path=ppt/slides/slide6.xml><?xml version="1.0" encoding="utf-8"?>
 <p:sld xmlns:a="http://schemas.openxmlformats.org/drawingml/2006/main" xmlns:r="http://schemas.openxmlformats.org/officeDocument/2006/relationships" xmlns:p="http://schemas.openxmlformats.org/presentationml/2006/main">
   <p:cSld>
-    <p:bg>
-      <p:bgPr>
-        <a:solidFill>
-          <a:schemeClr val="bg1"/>
-        </a:solidFill>
-        <a:effectLst/>
-      </p:bgPr>
-    </p:bg>
     <p:spTree>
       <p:nvGrpSpPr>
         <p:cNvPr id="1" name=""/>
@@ -4084,153 +4510,87 @@
           <a:chExt cx="0" cy="0"/>
         </a:xfrm>
       </p:grpSpPr>
-      <p:sp useBgFill="1">
-        <p:nvSpPr>
-          <p:cNvPr id="58" name="Rectangle 57">
+      <p:sp>
+        <p:nvSpPr>
+          <p:cNvPr id="2" name="Title 1">
             <a:extLst>
               <a:ext uri="{FF2B5EF4-FFF2-40B4-BE49-F238E27FC236}">
-                <a16:creationId xmlns:a16="http://schemas.microsoft.com/office/drawing/2014/main" id="{04812C46-200A-4DEB-A05E-3ED6C68C2387}"/>
-              </a:ext>
-              <a:ext uri="{C183D7F6-B498-43B3-948B-1728B52AA6E4}">
-                <adec:decorative xmlns:adec="http://schemas.microsoft.com/office/drawing/2017/decorative" val="1"/>
+                <a16:creationId xmlns:a16="http://schemas.microsoft.com/office/drawing/2014/main" id="{3718B6A8-CBD4-7566-7D54-88B1EEF61EE0}"/>
               </a:ext>
             </a:extLst>
           </p:cNvPr>
           <p:cNvSpPr>
-            <a:spLocks noGrp="1" noRot="1" noChangeAspect="1" noMove="1" noResize="1" noEditPoints="1" noAdjustHandles="1" noChangeArrowheads="1" noChangeShapeType="1" noTextEdit="1"/>
-          </p:cNvSpPr>
-          <p:nvPr>
-            <p:extLst>
-              <p:ext uri="{386F3935-93C4-4BCD-93E2-E3B085C9AB24}">
-                <p16:designElem xmlns:p16="http://schemas.microsoft.com/office/powerpoint/2015/main" val="1"/>
-              </p:ext>
-            </p:extLst>
-          </p:nvPr>
-        </p:nvSpPr>
-        <p:spPr>
-          <a:xfrm>
-            <a:off x="-1" y="0"/>
-            <a:ext cx="12188952" cy="6858000"/>
-          </a:xfrm>
-          <a:prstGeom prst="rect">
-            <a:avLst/>
-          </a:prstGeom>
-          <a:ln>
-            <a:noFill/>
-          </a:ln>
-        </p:spPr>
-        <p:style>
-          <a:lnRef idx="2">
-            <a:schemeClr val="accent1">
-              <a:shade val="50000"/>
-            </a:schemeClr>
-          </a:lnRef>
-          <a:fillRef idx="1">
-            <a:schemeClr val="accent1"/>
-          </a:fillRef>
-          <a:effectRef idx="0">
-            <a:schemeClr val="accent1"/>
-          </a:effectRef>
-          <a:fontRef idx="minor">
-            <a:schemeClr val="lt1"/>
-          </a:fontRef>
-        </p:style>
-        <p:txBody>
-          <a:bodyPr rtlCol="0" anchor="ctr"/>
-          <a:lstStyle/>
-          <a:p>
-            <a:pPr algn="ctr"/>
-            <a:endParaRPr lang="en-US"/>
-          </a:p>
-        </p:txBody>
-      </p:sp>
-      <p:sp>
-        <p:nvSpPr>
-          <p:cNvPr id="6" name="TextBox 5">
+            <a:spLocks noGrp="1"/>
+          </p:cNvSpPr>
+          <p:nvPr>
+            <p:ph type="title"/>
+          </p:nvPr>
+        </p:nvSpPr>
+        <p:spPr/>
+        <p:txBody>
+          <a:bodyPr/>
+          <a:lstStyle/>
+          <a:p>
+            <a:r>
+              <a:rPr lang="en-IN" dirty="0"/>
+              <a:t>Feedback from Interim Demo</a:t>
+            </a:r>
+          </a:p>
+        </p:txBody>
+      </p:sp>
+      <p:sp>
+        <p:nvSpPr>
+          <p:cNvPr id="3" name="Content Placeholder 2">
             <a:extLst>
               <a:ext uri="{FF2B5EF4-FFF2-40B4-BE49-F238E27FC236}">
-                <a16:creationId xmlns:a16="http://schemas.microsoft.com/office/drawing/2014/main" id="{D32378B3-CC15-3A6F-B04A-7E94753C01A3}"/>
+                <a16:creationId xmlns:a16="http://schemas.microsoft.com/office/drawing/2014/main" id="{07CE20D9-71F3-A9E0-17AA-61C8D2A44E4F}"/>
               </a:ext>
             </a:extLst>
           </p:cNvPr>
-          <p:cNvSpPr txBox="1"/>
-          <p:nvPr/>
-        </p:nvSpPr>
-        <p:spPr>
-          <a:xfrm>
-            <a:off x="334018" y="3149439"/>
-            <a:ext cx="939612" cy="1368132"/>
-          </a:xfrm>
-          <a:prstGeom prst="rect">
-            <a:avLst/>
-          </a:prstGeom>
-        </p:spPr>
-        <p:txBody>
-          <a:bodyPr vert="horz" lIns="91440" tIns="45720" rIns="91440" bIns="45720" rtlCol="0">
-            <a:normAutofit/>
-          </a:bodyPr>
-          <a:lstStyle/>
-          <a:p>
-            <a:pPr>
-              <a:lnSpc>
-                <a:spcPct val="90000"/>
-              </a:lnSpc>
-              <a:spcBef>
-                <a:spcPct val="0"/>
-              </a:spcBef>
-              <a:spcAft>
-                <a:spcPts val="600"/>
-              </a:spcAft>
-            </a:pPr>
-            <a:r>
-              <a:rPr lang="en-US" sz="2000" b="1" dirty="0"/>
-              <a:t>HLD</a:t>
-            </a:r>
-          </a:p>
-        </p:txBody>
-      </p:sp>
-      <p:pic>
-        <p:nvPicPr>
-          <p:cNvPr id="23" name="Content Placeholder 22">
-            <a:extLst>
-              <a:ext uri="{FF2B5EF4-FFF2-40B4-BE49-F238E27FC236}">
-                <a16:creationId xmlns:a16="http://schemas.microsoft.com/office/drawing/2014/main" id="{5E76C315-426F-BFD3-C58F-C1F470CDFEF4}"/>
-              </a:ext>
-            </a:extLst>
-          </p:cNvPr>
-          <p:cNvPicPr>
-            <a:picLocks noGrp="1" noChangeAspect="1"/>
-          </p:cNvPicPr>
+          <p:cNvSpPr>
+            <a:spLocks noGrp="1"/>
+          </p:cNvSpPr>
           <p:nvPr>
             <p:ph idx="1"/>
           </p:nvPr>
-        </p:nvPicPr>
-        <p:blipFill>
-          <a:blip r:embed="rId2">
-            <a:extLst>
-              <a:ext uri="{28A0092B-C50C-407E-A947-70E740481C1C}">
-                <a14:useLocalDpi xmlns:a14="http://schemas.microsoft.com/office/drawing/2010/main" val="0"/>
-              </a:ext>
-            </a:extLst>
-          </a:blip>
-          <a:stretch>
-            <a:fillRect/>
-          </a:stretch>
-        </p:blipFill>
-        <p:spPr>
-          <a:xfrm>
-            <a:off x="1996705" y="0"/>
-            <a:ext cx="7904781" cy="6892201"/>
-          </a:xfrm>
-          <a:prstGeom prst="rect">
-            <a:avLst/>
-          </a:prstGeom>
-        </p:spPr>
-      </p:pic>
+        </p:nvSpPr>
+        <p:spPr/>
+        <p:txBody>
+          <a:bodyPr/>
+          <a:lstStyle/>
+          <a:p>
+            <a:r>
+              <a:rPr lang="en-IN" dirty="0"/>
+              <a:t>Show each DB per service</a:t>
+            </a:r>
+          </a:p>
+          <a:p>
+            <a:r>
+              <a:rPr lang="en-IN" dirty="0"/>
+              <a:t>Show cross cutting concerns in HLD</a:t>
+            </a:r>
+          </a:p>
+          <a:p>
+            <a:r>
+              <a:rPr lang="en-IN" dirty="0"/>
+              <a:t>Improve icons or colour coding for different components</a:t>
+            </a:r>
+          </a:p>
+          <a:p>
+            <a:r>
+              <a:rPr lang="en-IN" dirty="0"/>
+              <a:t>Show where product images and invoices would be stored.</a:t>
+            </a:r>
+          </a:p>
+          <a:p>
+            <a:endParaRPr lang="en-IN" dirty="0"/>
+          </a:p>
+        </p:txBody>
+      </p:sp>
     </p:spTree>
     <p:extLst>
       <p:ext uri="{BB962C8B-B14F-4D97-AF65-F5344CB8AC3E}">
-        <p14:creationId xmlns:p14="http://schemas.microsoft.com/office/powerpoint/2010/main" val="3209907004"/>
+        <p14:creationId xmlns:p14="http://schemas.microsoft.com/office/powerpoint/2010/main" val="3507156365"/>
       </p:ext>
     </p:extLst>
   </p:cSld>
@@ -4265,227 +4625,117 @@
           <a:chExt cx="0" cy="0"/>
         </a:xfrm>
       </p:grpSpPr>
-      <p:sp useBgFill="1">
-        <p:nvSpPr>
-          <p:cNvPr id="19" name="Slide Background">
+      <p:pic>
+        <p:nvPicPr>
+          <p:cNvPr id="5" name="Content Placeholder 4">
             <a:extLst>
               <a:ext uri="{FF2B5EF4-FFF2-40B4-BE49-F238E27FC236}">
-                <a16:creationId xmlns:a16="http://schemas.microsoft.com/office/drawing/2014/main" id="{9D768B77-8742-43A0-AF16-6AC4D378E482}"/>
-              </a:ext>
-              <a:ext uri="{C183D7F6-B498-43B3-948B-1728B52AA6E4}">
-                <adec:decorative xmlns:adec="http://schemas.microsoft.com/office/drawing/2017/decorative" val="1"/>
+                <a16:creationId xmlns:a16="http://schemas.microsoft.com/office/drawing/2014/main" id="{4B7C50FB-DD90-7214-5A38-2F8F9A95FFE9}"/>
               </a:ext>
             </a:extLst>
           </p:cNvPr>
-          <p:cNvSpPr>
-            <a:spLocks noGrp="1" noRot="1" noChangeAspect="1" noMove="1" noResize="1" noEditPoints="1" noAdjustHandles="1" noChangeArrowheads="1" noChangeShapeType="1" noTextEdit="1"/>
-          </p:cNvSpPr>
-          <p:nvPr>
-            <p:extLst>
-              <p:ext uri="{386F3935-93C4-4BCD-93E2-E3B085C9AB24}">
-                <p16:designElem xmlns:p16="http://schemas.microsoft.com/office/powerpoint/2015/main" val="1"/>
-              </p:ext>
-            </p:extLst>
-          </p:nvPr>
-        </p:nvSpPr>
-        <p:spPr bwMode="white">
+          <p:cNvPicPr>
+            <a:picLocks noGrp="1" noChangeAspect="1"/>
+          </p:cNvPicPr>
+          <p:nvPr>
+            <p:ph idx="1"/>
+          </p:nvPr>
+        </p:nvPicPr>
+        <p:blipFill>
+          <a:blip r:embed="rId2">
+            <a:extLst>
+              <a:ext uri="{28A0092B-C50C-407E-A947-70E740481C1C}">
+                <a14:useLocalDpi xmlns:a14="http://schemas.microsoft.com/office/drawing/2010/main" val="0"/>
+              </a:ext>
+            </a:extLst>
+          </a:blip>
+          <a:stretch>
+            <a:fillRect/>
+          </a:stretch>
+        </p:blipFill>
+        <p:spPr>
           <a:xfrm>
-            <a:off x="1" y="0"/>
-            <a:ext cx="12191999" cy="6858000"/>
+            <a:off x="4284664" y="-36429"/>
+            <a:ext cx="7907336" cy="6894429"/>
           </a:xfrm>
           <a:prstGeom prst="rect">
             <a:avLst/>
           </a:prstGeom>
-          <a:ln>
-            <a:noFill/>
-          </a:ln>
         </p:spPr>
-        <p:style>
-          <a:lnRef idx="2">
-            <a:schemeClr val="accent1">
-              <a:shade val="50000"/>
-            </a:schemeClr>
-          </a:lnRef>
-          <a:fillRef idx="1">
-            <a:schemeClr val="accent1"/>
-          </a:fillRef>
-          <a:effectRef idx="0">
-            <a:schemeClr val="accent1"/>
-          </a:effectRef>
-          <a:fontRef idx="minor">
-            <a:schemeClr val="lt1"/>
-          </a:fontRef>
-        </p:style>
-        <p:txBody>
-          <a:bodyPr rtlCol="0" anchor="ctr"/>
-          <a:lstStyle>
-            <a:defPPr>
-              <a:defRPr lang="en-US"/>
-            </a:defPPr>
-            <a:lvl1pPr marL="0" algn="l" defTabSz="914400" rtl="0" eaLnBrk="1" latinLnBrk="0" hangingPunct="1">
-              <a:defRPr sz="1800" kern="1200">
-                <a:solidFill>
-                  <a:schemeClr val="lt1"/>
-                </a:solidFill>
-                <a:latin typeface="+mn-lt"/>
-                <a:ea typeface="+mn-ea"/>
-                <a:cs typeface="+mn-cs"/>
-              </a:defRPr>
-            </a:lvl1pPr>
-            <a:lvl2pPr marL="457200" algn="l" defTabSz="914400" rtl="0" eaLnBrk="1" latinLnBrk="0" hangingPunct="1">
-              <a:defRPr sz="1800" kern="1200">
-                <a:solidFill>
-                  <a:schemeClr val="lt1"/>
-                </a:solidFill>
-                <a:latin typeface="+mn-lt"/>
-                <a:ea typeface="+mn-ea"/>
-                <a:cs typeface="+mn-cs"/>
-              </a:defRPr>
-            </a:lvl2pPr>
-            <a:lvl3pPr marL="914400" algn="l" defTabSz="914400" rtl="0" eaLnBrk="1" latinLnBrk="0" hangingPunct="1">
-              <a:defRPr sz="1800" kern="1200">
-                <a:solidFill>
-                  <a:schemeClr val="lt1"/>
-                </a:solidFill>
-                <a:latin typeface="+mn-lt"/>
-                <a:ea typeface="+mn-ea"/>
-                <a:cs typeface="+mn-cs"/>
-              </a:defRPr>
-            </a:lvl3pPr>
-            <a:lvl4pPr marL="1371600" algn="l" defTabSz="914400" rtl="0" eaLnBrk="1" latinLnBrk="0" hangingPunct="1">
-              <a:defRPr sz="1800" kern="1200">
-                <a:solidFill>
-                  <a:schemeClr val="lt1"/>
-                </a:solidFill>
-                <a:latin typeface="+mn-lt"/>
-                <a:ea typeface="+mn-ea"/>
-                <a:cs typeface="+mn-cs"/>
-              </a:defRPr>
-            </a:lvl4pPr>
-            <a:lvl5pPr marL="1828800" algn="l" defTabSz="914400" rtl="0" eaLnBrk="1" latinLnBrk="0" hangingPunct="1">
-              <a:defRPr sz="1800" kern="1200">
-                <a:solidFill>
-                  <a:schemeClr val="lt1"/>
-                </a:solidFill>
-                <a:latin typeface="+mn-lt"/>
-                <a:ea typeface="+mn-ea"/>
-                <a:cs typeface="+mn-cs"/>
-              </a:defRPr>
-            </a:lvl5pPr>
-            <a:lvl6pPr marL="2286000" algn="l" defTabSz="914400" rtl="0" eaLnBrk="1" latinLnBrk="0" hangingPunct="1">
-              <a:defRPr sz="1800" kern="1200">
-                <a:solidFill>
-                  <a:schemeClr val="lt1"/>
-                </a:solidFill>
-                <a:latin typeface="+mn-lt"/>
-                <a:ea typeface="+mn-ea"/>
-                <a:cs typeface="+mn-cs"/>
-              </a:defRPr>
-            </a:lvl6pPr>
-            <a:lvl7pPr marL="2743200" algn="l" defTabSz="914400" rtl="0" eaLnBrk="1" latinLnBrk="0" hangingPunct="1">
-              <a:defRPr sz="1800" kern="1200">
-                <a:solidFill>
-                  <a:schemeClr val="lt1"/>
-                </a:solidFill>
-                <a:latin typeface="+mn-lt"/>
-                <a:ea typeface="+mn-ea"/>
-                <a:cs typeface="+mn-cs"/>
-              </a:defRPr>
-            </a:lvl7pPr>
-            <a:lvl8pPr marL="3200400" algn="l" defTabSz="914400" rtl="0" eaLnBrk="1" latinLnBrk="0" hangingPunct="1">
-              <a:defRPr sz="1800" kern="1200">
-                <a:solidFill>
-                  <a:schemeClr val="lt1"/>
-                </a:solidFill>
-                <a:latin typeface="+mn-lt"/>
-                <a:ea typeface="+mn-ea"/>
-                <a:cs typeface="+mn-cs"/>
-              </a:defRPr>
-            </a:lvl8pPr>
-            <a:lvl9pPr marL="3657600" algn="l" defTabSz="914400" rtl="0" eaLnBrk="1" latinLnBrk="0" hangingPunct="1">
-              <a:defRPr sz="1800" kern="1200">
-                <a:solidFill>
-                  <a:schemeClr val="lt1"/>
-                </a:solidFill>
-                <a:latin typeface="+mn-lt"/>
-                <a:ea typeface="+mn-ea"/>
-                <a:cs typeface="+mn-cs"/>
-              </a:defRPr>
-            </a:lvl9pPr>
-          </a:lstStyle>
-          <a:p>
-            <a:pPr algn="ctr"/>
-            <a:endParaRPr lang="en-US"/>
-          </a:p>
-        </p:txBody>
-      </p:sp>
-      <p:sp useBgFill="1">
-        <p:nvSpPr>
-          <p:cNvPr id="21" name="Rectangle 20">
+      </p:pic>
+      <p:sp>
+        <p:nvSpPr>
+          <p:cNvPr id="2" name="Title 1">
             <a:extLst>
               <a:ext uri="{FF2B5EF4-FFF2-40B4-BE49-F238E27FC236}">
-                <a16:creationId xmlns:a16="http://schemas.microsoft.com/office/drawing/2014/main" id="{48B13CA8-CBEA-4805-955D-CEBE32236560}"/>
-              </a:ext>
-              <a:ext uri="{C183D7F6-B498-43B3-948B-1728B52AA6E4}">
-                <adec:decorative xmlns:adec="http://schemas.microsoft.com/office/drawing/2017/decorative" val="1"/>
+                <a16:creationId xmlns:a16="http://schemas.microsoft.com/office/drawing/2014/main" id="{162D8B7C-C2C6-3188-7B8A-4A0654FFAA23}"/>
               </a:ext>
             </a:extLst>
           </p:cNvPr>
           <p:cNvSpPr>
-            <a:spLocks noGrp="1" noRot="1" noChangeAspect="1" noMove="1" noResize="1" noEditPoints="1" noAdjustHandles="1" noChangeArrowheads="1" noChangeShapeType="1" noTextEdit="1"/>
-          </p:cNvSpPr>
-          <p:nvPr>
-            <p:extLst>
-              <p:ext uri="{386F3935-93C4-4BCD-93E2-E3B085C9AB24}">
-                <p16:designElem xmlns:p16="http://schemas.microsoft.com/office/powerpoint/2015/main" val="1"/>
-              </p:ext>
-            </p:extLst>
+            <a:spLocks noGrp="1"/>
+          </p:cNvSpPr>
+          <p:nvPr>
+            <p:ph type="title"/>
           </p:nvPr>
         </p:nvSpPr>
         <p:spPr>
           <a:xfrm>
-            <a:off x="1" y="1"/>
-            <a:ext cx="4617490" cy="5486399"/>
+            <a:off x="268703" y="2672176"/>
+            <a:ext cx="3693305" cy="658853"/>
           </a:xfrm>
-          <a:prstGeom prst="rect">
-            <a:avLst/>
-          </a:prstGeom>
-          <a:ln>
-            <a:noFill/>
-          </a:ln>
-          <a:effectLst>
-            <a:outerShdw blurRad="393700" dist="127000" dir="5400000" sx="95000" sy="95000" algn="t" rotWithShape="0">
-              <a:srgbClr val="000000">
-                <a:alpha val="31000"/>
-              </a:srgbClr>
-            </a:outerShdw>
-          </a:effectLst>
         </p:spPr>
-        <p:style>
-          <a:lnRef idx="2">
-            <a:schemeClr val="accent1">
-              <a:shade val="50000"/>
-            </a:schemeClr>
-          </a:lnRef>
-          <a:fillRef idx="1">
-            <a:schemeClr val="accent1"/>
-          </a:fillRef>
-          <a:effectRef idx="0">
-            <a:schemeClr val="accent1"/>
-          </a:effectRef>
-          <a:fontRef idx="minor">
-            <a:schemeClr val="lt1"/>
-          </a:fontRef>
-        </p:style>
-        <p:txBody>
-          <a:bodyPr rtlCol="0" anchor="ctr"/>
-          <a:lstStyle/>
-          <a:p>
-            <a:pPr algn="ctr"/>
-            <a:endParaRPr lang="en-US"/>
-          </a:p>
-        </p:txBody>
-      </p:sp>
+        <p:txBody>
+          <a:bodyPr vert="horz" lIns="91440" tIns="45720" rIns="91440" bIns="45720" rtlCol="0" anchor="t">
+            <a:normAutofit/>
+          </a:bodyPr>
+          <a:lstStyle/>
+          <a:p>
+            <a:r>
+              <a:rPr lang="en-US" sz="4000" dirty="0"/>
+              <a:t>HLD</a:t>
+            </a:r>
+          </a:p>
+        </p:txBody>
+      </p:sp>
+    </p:spTree>
+    <p:extLst>
+      <p:ext uri="{BB962C8B-B14F-4D97-AF65-F5344CB8AC3E}">
+        <p14:creationId xmlns:p14="http://schemas.microsoft.com/office/powerpoint/2010/main" val="3209907004"/>
+      </p:ext>
+    </p:extLst>
+  </p:cSld>
+  <p:clrMapOvr>
+    <a:masterClrMapping/>
+  </p:clrMapOvr>
+</p:sld>
+</file>
+
+<file path=ppt/slides/slide8.xml><?xml version="1.0" encoding="utf-8"?>
+<p:sld xmlns:a="http://schemas.openxmlformats.org/drawingml/2006/main" xmlns:r="http://schemas.openxmlformats.org/officeDocument/2006/relationships" xmlns:p="http://schemas.openxmlformats.org/presentationml/2006/main">
+  <p:cSld>
+    <p:bg>
+      <p:bgPr>
+        <a:solidFill>
+          <a:schemeClr val="bg1"/>
+        </a:solidFill>
+        <a:effectLst/>
+      </p:bgPr>
+    </p:bg>
+    <p:spTree>
+      <p:nvGrpSpPr>
+        <p:cNvPr id="1" name=""/>
+        <p:cNvGrpSpPr/>
+        <p:nvPr/>
+      </p:nvGrpSpPr>
+      <p:grpSpPr>
+        <a:xfrm>
+          <a:off x="0" y="0"/>
+          <a:ext cx="0" cy="0"/>
+          <a:chOff x="0" y="0"/>
+          <a:chExt cx="0" cy="0"/>
+        </a:xfrm>
+      </p:grpSpPr>
       <p:sp>
         <p:nvSpPr>
           <p:cNvPr id="2" name="Title 1">
@@ -4504,8 +4754,8 @@
         </p:nvSpPr>
         <p:spPr>
           <a:xfrm>
-            <a:off x="835152" y="2312948"/>
-            <a:ext cx="3221377" cy="3859252"/>
+            <a:off x="541238" y="2302062"/>
+            <a:ext cx="3693305" cy="1322881"/>
           </a:xfrm>
         </p:spPr>
         <p:txBody>
@@ -4578,7 +4828,7 @@
 </p:sld>
 </file>
 
-<file path=ppt/slides/slide8.xml><?xml version="1.0" encoding="utf-8"?>
+<file path=ppt/slides/slide9.xml><?xml version="1.0" encoding="utf-8"?>
 <p:sld xmlns:a="http://schemas.openxmlformats.org/drawingml/2006/main" xmlns:r="http://schemas.openxmlformats.org/officeDocument/2006/relationships" xmlns:p="http://schemas.openxmlformats.org/presentationml/2006/main">
   <p:cSld>
     <p:bg>
@@ -4603,227 +4853,6 @@
           <a:chExt cx="0" cy="0"/>
         </a:xfrm>
       </p:grpSpPr>
-      <p:sp useBgFill="1">
-        <p:nvSpPr>
-          <p:cNvPr id="21" name="Slide Background">
-            <a:extLst>
-              <a:ext uri="{FF2B5EF4-FFF2-40B4-BE49-F238E27FC236}">
-                <a16:creationId xmlns:a16="http://schemas.microsoft.com/office/drawing/2014/main" id="{9D768B77-8742-43A0-AF16-6AC4D378E482}"/>
-              </a:ext>
-              <a:ext uri="{C183D7F6-B498-43B3-948B-1728B52AA6E4}">
-                <adec:decorative xmlns:adec="http://schemas.microsoft.com/office/drawing/2017/decorative" val="1"/>
-              </a:ext>
-            </a:extLst>
-          </p:cNvPr>
-          <p:cNvSpPr>
-            <a:spLocks noGrp="1" noRot="1" noChangeAspect="1" noMove="1" noResize="1" noEditPoints="1" noAdjustHandles="1" noChangeArrowheads="1" noChangeShapeType="1" noTextEdit="1"/>
-          </p:cNvSpPr>
-          <p:nvPr>
-            <p:extLst>
-              <p:ext uri="{386F3935-93C4-4BCD-93E2-E3B085C9AB24}">
-                <p16:designElem xmlns:p16="http://schemas.microsoft.com/office/powerpoint/2015/main" val="1"/>
-              </p:ext>
-            </p:extLst>
-          </p:nvPr>
-        </p:nvSpPr>
-        <p:spPr bwMode="white">
-          <a:xfrm>
-            <a:off x="1" y="0"/>
-            <a:ext cx="12191999" cy="6858000"/>
-          </a:xfrm>
-          <a:prstGeom prst="rect">
-            <a:avLst/>
-          </a:prstGeom>
-          <a:ln>
-            <a:noFill/>
-          </a:ln>
-        </p:spPr>
-        <p:style>
-          <a:lnRef idx="2">
-            <a:schemeClr val="accent1">
-              <a:shade val="50000"/>
-            </a:schemeClr>
-          </a:lnRef>
-          <a:fillRef idx="1">
-            <a:schemeClr val="accent1"/>
-          </a:fillRef>
-          <a:effectRef idx="0">
-            <a:schemeClr val="accent1"/>
-          </a:effectRef>
-          <a:fontRef idx="minor">
-            <a:schemeClr val="lt1"/>
-          </a:fontRef>
-        </p:style>
-        <p:txBody>
-          <a:bodyPr rtlCol="0" anchor="ctr"/>
-          <a:lstStyle>
-            <a:defPPr>
-              <a:defRPr lang="en-US"/>
-            </a:defPPr>
-            <a:lvl1pPr marL="0" algn="l" defTabSz="914400" rtl="0" eaLnBrk="1" latinLnBrk="0" hangingPunct="1">
-              <a:defRPr sz="1800" kern="1200">
-                <a:solidFill>
-                  <a:schemeClr val="lt1"/>
-                </a:solidFill>
-                <a:latin typeface="+mn-lt"/>
-                <a:ea typeface="+mn-ea"/>
-                <a:cs typeface="+mn-cs"/>
-              </a:defRPr>
-            </a:lvl1pPr>
-            <a:lvl2pPr marL="457200" algn="l" defTabSz="914400" rtl="0" eaLnBrk="1" latinLnBrk="0" hangingPunct="1">
-              <a:defRPr sz="1800" kern="1200">
-                <a:solidFill>
-                  <a:schemeClr val="lt1"/>
-                </a:solidFill>
-                <a:latin typeface="+mn-lt"/>
-                <a:ea typeface="+mn-ea"/>
-                <a:cs typeface="+mn-cs"/>
-              </a:defRPr>
-            </a:lvl2pPr>
-            <a:lvl3pPr marL="914400" algn="l" defTabSz="914400" rtl="0" eaLnBrk="1" latinLnBrk="0" hangingPunct="1">
-              <a:defRPr sz="1800" kern="1200">
-                <a:solidFill>
-                  <a:schemeClr val="lt1"/>
-                </a:solidFill>
-                <a:latin typeface="+mn-lt"/>
-                <a:ea typeface="+mn-ea"/>
-                <a:cs typeface="+mn-cs"/>
-              </a:defRPr>
-            </a:lvl3pPr>
-            <a:lvl4pPr marL="1371600" algn="l" defTabSz="914400" rtl="0" eaLnBrk="1" latinLnBrk="0" hangingPunct="1">
-              <a:defRPr sz="1800" kern="1200">
-                <a:solidFill>
-                  <a:schemeClr val="lt1"/>
-                </a:solidFill>
-                <a:latin typeface="+mn-lt"/>
-                <a:ea typeface="+mn-ea"/>
-                <a:cs typeface="+mn-cs"/>
-              </a:defRPr>
-            </a:lvl4pPr>
-            <a:lvl5pPr marL="1828800" algn="l" defTabSz="914400" rtl="0" eaLnBrk="1" latinLnBrk="0" hangingPunct="1">
-              <a:defRPr sz="1800" kern="1200">
-                <a:solidFill>
-                  <a:schemeClr val="lt1"/>
-                </a:solidFill>
-                <a:latin typeface="+mn-lt"/>
-                <a:ea typeface="+mn-ea"/>
-                <a:cs typeface="+mn-cs"/>
-              </a:defRPr>
-            </a:lvl5pPr>
-            <a:lvl6pPr marL="2286000" algn="l" defTabSz="914400" rtl="0" eaLnBrk="1" latinLnBrk="0" hangingPunct="1">
-              <a:defRPr sz="1800" kern="1200">
-                <a:solidFill>
-                  <a:schemeClr val="lt1"/>
-                </a:solidFill>
-                <a:latin typeface="+mn-lt"/>
-                <a:ea typeface="+mn-ea"/>
-                <a:cs typeface="+mn-cs"/>
-              </a:defRPr>
-            </a:lvl6pPr>
-            <a:lvl7pPr marL="2743200" algn="l" defTabSz="914400" rtl="0" eaLnBrk="1" latinLnBrk="0" hangingPunct="1">
-              <a:defRPr sz="1800" kern="1200">
-                <a:solidFill>
-                  <a:schemeClr val="lt1"/>
-                </a:solidFill>
-                <a:latin typeface="+mn-lt"/>
-                <a:ea typeface="+mn-ea"/>
-                <a:cs typeface="+mn-cs"/>
-              </a:defRPr>
-            </a:lvl7pPr>
-            <a:lvl8pPr marL="3200400" algn="l" defTabSz="914400" rtl="0" eaLnBrk="1" latinLnBrk="0" hangingPunct="1">
-              <a:defRPr sz="1800" kern="1200">
-                <a:solidFill>
-                  <a:schemeClr val="lt1"/>
-                </a:solidFill>
-                <a:latin typeface="+mn-lt"/>
-                <a:ea typeface="+mn-ea"/>
-                <a:cs typeface="+mn-cs"/>
-              </a:defRPr>
-            </a:lvl8pPr>
-            <a:lvl9pPr marL="3657600" algn="l" defTabSz="914400" rtl="0" eaLnBrk="1" latinLnBrk="0" hangingPunct="1">
-              <a:defRPr sz="1800" kern="1200">
-                <a:solidFill>
-                  <a:schemeClr val="lt1"/>
-                </a:solidFill>
-                <a:latin typeface="+mn-lt"/>
-                <a:ea typeface="+mn-ea"/>
-                <a:cs typeface="+mn-cs"/>
-              </a:defRPr>
-            </a:lvl9pPr>
-          </a:lstStyle>
-          <a:p>
-            <a:pPr algn="ctr"/>
-            <a:endParaRPr lang="en-US"/>
-          </a:p>
-        </p:txBody>
-      </p:sp>
-      <p:sp useBgFill="1">
-        <p:nvSpPr>
-          <p:cNvPr id="23" name="Rectangle 22">
-            <a:extLst>
-              <a:ext uri="{FF2B5EF4-FFF2-40B4-BE49-F238E27FC236}">
-                <a16:creationId xmlns:a16="http://schemas.microsoft.com/office/drawing/2014/main" id="{48B13CA8-CBEA-4805-955D-CEBE32236560}"/>
-              </a:ext>
-              <a:ext uri="{C183D7F6-B498-43B3-948B-1728B52AA6E4}">
-                <adec:decorative xmlns:adec="http://schemas.microsoft.com/office/drawing/2017/decorative" val="1"/>
-              </a:ext>
-            </a:extLst>
-          </p:cNvPr>
-          <p:cNvSpPr>
-            <a:spLocks noGrp="1" noRot="1" noChangeAspect="1" noMove="1" noResize="1" noEditPoints="1" noAdjustHandles="1" noChangeArrowheads="1" noChangeShapeType="1" noTextEdit="1"/>
-          </p:cNvSpPr>
-          <p:nvPr>
-            <p:extLst>
-              <p:ext uri="{386F3935-93C4-4BCD-93E2-E3B085C9AB24}">
-                <p16:designElem xmlns:p16="http://schemas.microsoft.com/office/powerpoint/2015/main" val="1"/>
-              </p:ext>
-            </p:extLst>
-          </p:nvPr>
-        </p:nvSpPr>
-        <p:spPr>
-          <a:xfrm>
-            <a:off x="1" y="1"/>
-            <a:ext cx="4617490" cy="5486399"/>
-          </a:xfrm>
-          <a:prstGeom prst="rect">
-            <a:avLst/>
-          </a:prstGeom>
-          <a:ln>
-            <a:noFill/>
-          </a:ln>
-          <a:effectLst>
-            <a:outerShdw blurRad="393700" dist="127000" dir="5400000" sx="95000" sy="95000" algn="t" rotWithShape="0">
-              <a:srgbClr val="000000">
-                <a:alpha val="31000"/>
-              </a:srgbClr>
-            </a:outerShdw>
-          </a:effectLst>
-        </p:spPr>
-        <p:style>
-          <a:lnRef idx="2">
-            <a:schemeClr val="accent1">
-              <a:shade val="50000"/>
-            </a:schemeClr>
-          </a:lnRef>
-          <a:fillRef idx="1">
-            <a:schemeClr val="accent1"/>
-          </a:fillRef>
-          <a:effectRef idx="0">
-            <a:schemeClr val="accent1"/>
-          </a:effectRef>
-          <a:fontRef idx="minor">
-            <a:schemeClr val="lt1"/>
-          </a:fontRef>
-        </p:style>
-        <p:txBody>
-          <a:bodyPr rtlCol="0" anchor="ctr"/>
-          <a:lstStyle/>
-          <a:p>
-            <a:pPr algn="ctr"/>
-            <a:endParaRPr lang="en-US"/>
-          </a:p>
-        </p:txBody>
-      </p:sp>
       <p:sp>
         <p:nvSpPr>
           <p:cNvPr id="2" name="Title 1">
@@ -4843,7 +4872,7 @@
         <p:spPr>
           <a:xfrm>
             <a:off x="814708" y="2073662"/>
-            <a:ext cx="3221377" cy="3859252"/>
+            <a:ext cx="3221377" cy="1279138"/>
           </a:xfrm>
         </p:spPr>
         <p:txBody>
@@ -4916,359 +4945,59 @@
 </p:sld>
 </file>
 
-<file path=ppt/slides/slide9.xml><?xml version="1.0" encoding="utf-8"?>
-<p:sld xmlns:a="http://schemas.openxmlformats.org/drawingml/2006/main" xmlns:r="http://schemas.openxmlformats.org/officeDocument/2006/relationships" xmlns:p="http://schemas.openxmlformats.org/presentationml/2006/main">
-  <p:cSld>
-    <p:bg>
-      <p:bgPr>
-        <a:solidFill>
-          <a:schemeClr val="bg1"/>
-        </a:solidFill>
-        <a:effectLst/>
-      </p:bgPr>
-    </p:bg>
-    <p:spTree>
-      <p:nvGrpSpPr>
-        <p:cNvPr id="1" name="">
-          <a:extLst>
-            <a:ext uri="{FF2B5EF4-FFF2-40B4-BE49-F238E27FC236}">
-              <a16:creationId xmlns:a16="http://schemas.microsoft.com/office/drawing/2014/main" id="{835A087C-E877-20DC-311D-C848D0344BE3}"/>
-            </a:ext>
-          </a:extLst>
-        </p:cNvPr>
-        <p:cNvGrpSpPr/>
-        <p:nvPr/>
-      </p:nvGrpSpPr>
-      <p:grpSpPr>
-        <a:xfrm>
-          <a:off x="0" y="0"/>
-          <a:ext cx="0" cy="0"/>
-          <a:chOff x="0" y="0"/>
-          <a:chExt cx="0" cy="0"/>
-        </a:xfrm>
-      </p:grpSpPr>
-      <p:sp useBgFill="1">
-        <p:nvSpPr>
-          <p:cNvPr id="20" name="Slide Background">
-            <a:extLst>
-              <a:ext uri="{FF2B5EF4-FFF2-40B4-BE49-F238E27FC236}">
-                <a16:creationId xmlns:a16="http://schemas.microsoft.com/office/drawing/2014/main" id="{7B1AB9FE-36F5-4FD1-9850-DB5C5AD4828F}"/>
-              </a:ext>
-              <a:ext uri="{C183D7F6-B498-43B3-948B-1728B52AA6E4}">
-                <adec:decorative xmlns:adec="http://schemas.microsoft.com/office/drawing/2017/decorative" val="1"/>
-              </a:ext>
-            </a:extLst>
-          </p:cNvPr>
-          <p:cNvSpPr>
-            <a:spLocks noGrp="1" noRot="1" noChangeAspect="1" noMove="1" noResize="1" noEditPoints="1" noAdjustHandles="1" noChangeArrowheads="1" noChangeShapeType="1" noTextEdit="1"/>
-          </p:cNvSpPr>
-          <p:nvPr>
-            <p:extLst>
-              <p:ext uri="{386F3935-93C4-4BCD-93E2-E3B085C9AB24}">
-                <p16:designElem xmlns:p16="http://schemas.microsoft.com/office/powerpoint/2015/main" val="1"/>
-              </p:ext>
-            </p:extLst>
-          </p:nvPr>
-        </p:nvSpPr>
-        <p:spPr>
-          <a:xfrm>
-            <a:off x="0" y="0"/>
-            <a:ext cx="12192000" cy="6858000"/>
-          </a:xfrm>
-          <a:prstGeom prst="rect">
-            <a:avLst/>
-          </a:prstGeom>
-          <a:ln>
-            <a:noFill/>
-          </a:ln>
-        </p:spPr>
-        <p:style>
-          <a:lnRef idx="2">
-            <a:schemeClr val="accent1">
-              <a:shade val="50000"/>
-            </a:schemeClr>
-          </a:lnRef>
-          <a:fillRef idx="1">
-            <a:schemeClr val="accent1"/>
-          </a:fillRef>
-          <a:effectRef idx="0">
-            <a:schemeClr val="accent1"/>
-          </a:effectRef>
-          <a:fontRef idx="minor">
-            <a:schemeClr val="lt1"/>
-          </a:fontRef>
-        </p:style>
-        <p:txBody>
-          <a:bodyPr rtlCol="0" anchor="ctr"/>
-          <a:lstStyle/>
-          <a:p>
-            <a:pPr algn="ctr"/>
-            <a:endParaRPr lang="en-US"/>
-          </a:p>
-        </p:txBody>
-      </p:sp>
-      <p:pic>
-        <p:nvPicPr>
-          <p:cNvPr id="5" name="Content Placeholder 4">
-            <a:extLst>
-              <a:ext uri="{FF2B5EF4-FFF2-40B4-BE49-F238E27FC236}">
-                <a16:creationId xmlns:a16="http://schemas.microsoft.com/office/drawing/2014/main" id="{C8BCFBBF-0291-A60C-B404-1A08B1A4D320}"/>
-              </a:ext>
-            </a:extLst>
-          </p:cNvPr>
-          <p:cNvPicPr>
-            <a:picLocks noChangeAspect="1"/>
-          </p:cNvPicPr>
-          <p:nvPr/>
-        </p:nvPicPr>
-        <p:blipFill>
-          <a:blip r:embed="rId2">
-            <a:extLst>
-              <a:ext uri="{28A0092B-C50C-407E-A947-70E740481C1C}">
-                <a14:useLocalDpi xmlns:a14="http://schemas.microsoft.com/office/drawing/2010/main" val="0"/>
-              </a:ext>
-            </a:extLst>
-          </a:blip>
-          <a:srcRect t="12222" b="11183"/>
-          <a:stretch>
-            <a:fillRect/>
-          </a:stretch>
-        </p:blipFill>
-        <p:spPr>
-          <a:xfrm>
-            <a:off x="20" y="10"/>
-            <a:ext cx="12191979" cy="5486390"/>
-          </a:xfrm>
-          <a:prstGeom prst="rect">
-            <a:avLst/>
-          </a:prstGeom>
-          <a:effectLst>
-            <a:outerShdw blurRad="596900" dist="330200" dir="8820000" sx="87000" sy="87000" algn="ctr" rotWithShape="0">
-              <a:srgbClr val="000000">
-                <a:alpha val="29000"/>
-              </a:srgbClr>
-            </a:outerShdw>
-          </a:effectLst>
-        </p:spPr>
-      </p:pic>
-      <p:sp useBgFill="1">
-        <p:nvSpPr>
-          <p:cNvPr id="21" name="Rectangle 20">
-            <a:extLst>
-              <a:ext uri="{FF2B5EF4-FFF2-40B4-BE49-F238E27FC236}">
-                <a16:creationId xmlns:a16="http://schemas.microsoft.com/office/drawing/2014/main" id="{F489C2E0-4895-4B72-85EA-7EE9FAFFDC7E}"/>
-              </a:ext>
-              <a:ext uri="{C183D7F6-B498-43B3-948B-1728B52AA6E4}">
-                <adec:decorative xmlns:adec="http://schemas.microsoft.com/office/drawing/2017/decorative" val="1"/>
-              </a:ext>
-            </a:extLst>
-          </p:cNvPr>
-          <p:cNvSpPr>
-            <a:spLocks noGrp="1" noRot="1" noChangeAspect="1" noMove="1" noResize="1" noEditPoints="1" noAdjustHandles="1" noChangeArrowheads="1" noChangeShapeType="1" noTextEdit="1"/>
-          </p:cNvSpPr>
-          <p:nvPr>
-            <p:extLst>
-              <p:ext uri="{386F3935-93C4-4BCD-93E2-E3B085C9AB24}">
-                <p16:designElem xmlns:p16="http://schemas.microsoft.com/office/powerpoint/2015/main" val="1"/>
-              </p:ext>
-            </p:extLst>
-          </p:nvPr>
-        </p:nvSpPr>
-        <p:spPr>
-          <a:xfrm>
-            <a:off x="0" y="5486402"/>
-            <a:ext cx="12192000" cy="1371598"/>
-          </a:xfrm>
-          <a:prstGeom prst="rect">
-            <a:avLst/>
-          </a:prstGeom>
-          <a:ln>
-            <a:noFill/>
-          </a:ln>
-          <a:effectLst>
-            <a:outerShdw blurRad="254000" dist="114300" dir="20340000" sx="89000" sy="89000" algn="t" rotWithShape="0">
-              <a:srgbClr val="000000">
-                <a:alpha val="30000"/>
-              </a:srgbClr>
-            </a:outerShdw>
-          </a:effectLst>
-        </p:spPr>
-        <p:style>
-          <a:lnRef idx="2">
-            <a:schemeClr val="accent1">
-              <a:shade val="50000"/>
-            </a:schemeClr>
-          </a:lnRef>
-          <a:fillRef idx="1">
-            <a:schemeClr val="accent1"/>
-          </a:fillRef>
-          <a:effectRef idx="0">
-            <a:schemeClr val="accent1"/>
-          </a:effectRef>
-          <a:fontRef idx="minor">
-            <a:schemeClr val="lt1"/>
-          </a:fontRef>
-        </p:style>
-        <p:txBody>
-          <a:bodyPr rtlCol="0" anchor="ctr"/>
-          <a:lstStyle/>
-          <a:p>
-            <a:pPr algn="ctr"/>
-            <a:endParaRPr lang="en-US"/>
-          </a:p>
-        </p:txBody>
-      </p:sp>
-      <p:sp>
-        <p:nvSpPr>
-          <p:cNvPr id="2" name="Title 1">
-            <a:extLst>
-              <a:ext uri="{FF2B5EF4-FFF2-40B4-BE49-F238E27FC236}">
-                <a16:creationId xmlns:a16="http://schemas.microsoft.com/office/drawing/2014/main" id="{FEA4572F-AAEA-0CAF-BE37-2D98170449C7}"/>
-              </a:ext>
-            </a:extLst>
-          </p:cNvPr>
-          <p:cNvSpPr>
-            <a:spLocks noGrp="1"/>
-          </p:cNvSpPr>
-          <p:nvPr>
-            <p:ph type="title"/>
-          </p:nvPr>
-        </p:nvSpPr>
-        <p:spPr>
-          <a:xfrm>
-            <a:off x="589556" y="5746071"/>
-            <a:ext cx="7015499" cy="852260"/>
-          </a:xfrm>
-        </p:spPr>
-        <p:txBody>
-          <a:bodyPr vert="horz" lIns="91440" tIns="45720" rIns="91440" bIns="45720" rtlCol="0" anchor="ctr">
-            <a:normAutofit/>
-          </a:bodyPr>
-          <a:lstStyle/>
-          <a:p>
-            <a:r>
-              <a:rPr lang="en-US" sz="3600"/>
-              <a:t>Backend CI/CD</a:t>
-            </a:r>
-          </a:p>
-        </p:txBody>
-      </p:sp>
-    </p:spTree>
-    <p:extLst>
-      <p:ext uri="{BB962C8B-B14F-4D97-AF65-F5344CB8AC3E}">
-        <p14:creationId xmlns:p14="http://schemas.microsoft.com/office/powerpoint/2010/main" val="757524977"/>
-      </p:ext>
-    </p:extLst>
-  </p:cSld>
-  <p:clrMapOvr>
-    <a:masterClrMapping/>
-  </p:clrMapOvr>
-</p:sld>
-</file>
-
 <file path=ppt/theme/theme1.xml><?xml version="1.0" encoding="utf-8"?>
-<a:theme xmlns:a="http://schemas.openxmlformats.org/drawingml/2006/main" name="Office Theme">
+<a:theme xmlns:a="http://schemas.openxmlformats.org/drawingml/2006/main" name="Parcel">
   <a:themeElements>
-    <a:clrScheme name="Office">
+    <a:clrScheme name="Parcel">
       <a:dk1>
-        <a:sysClr val="windowText" lastClr="000000"/>
+        <a:srgbClr val="000000"/>
       </a:dk1>
       <a:lt1>
-        <a:sysClr val="window" lastClr="FFFFFF"/>
+        <a:srgbClr val="FFFFFF"/>
       </a:lt1>
       <a:dk2>
-        <a:srgbClr val="0E2841"/>
+        <a:srgbClr val="4A5356"/>
       </a:dk2>
       <a:lt2>
-        <a:srgbClr val="E8E8E8"/>
+        <a:srgbClr val="E8E3CE"/>
       </a:lt2>
       <a:accent1>
-        <a:srgbClr val="156082"/>
+        <a:srgbClr val="F6A21D"/>
       </a:accent1>
       <a:accent2>
-        <a:srgbClr val="E97132"/>
+        <a:srgbClr val="9BAFB5"/>
       </a:accent2>
       <a:accent3>
-        <a:srgbClr val="196B24"/>
+        <a:srgbClr val="C96731"/>
       </a:accent3>
       <a:accent4>
-        <a:srgbClr val="0F9ED5"/>
+        <a:srgbClr val="9CA383"/>
       </a:accent4>
       <a:accent5>
-        <a:srgbClr val="A02B93"/>
+        <a:srgbClr val="87795D"/>
       </a:accent5>
       <a:accent6>
-        <a:srgbClr val="4EA72E"/>
+        <a:srgbClr val="A0988C"/>
       </a:accent6>
       <a:hlink>
-        <a:srgbClr val="467886"/>
+        <a:srgbClr val="00B0F0"/>
       </a:hlink>
       <a:folHlink>
-        <a:srgbClr val="96607D"/>
+        <a:srgbClr val="738F97"/>
       </a:folHlink>
     </a:clrScheme>
-    <a:fontScheme name="Office">
+    <a:fontScheme name="Parcel">
       <a:majorFont>
-        <a:latin typeface="Aptos Display" panose="02110004020202020204"/>
+        <a:latin typeface="Gill Sans MT" panose="020B0502020104020203"/>
         <a:ea typeface=""/>
         <a:cs typeface=""/>
-        <a:font script="Jpan" typeface="游ゴシック Light"/>
-        <a:font script="Hang" typeface="맑은 고딕"/>
-        <a:font script="Hans" typeface="等线 Light"/>
-        <a:font script="Hant" typeface="新細明體"/>
-        <a:font script="Arab" typeface="Times New Roman"/>
-        <a:font script="Hebr" typeface="Times New Roman"/>
-        <a:font script="Thai" typeface="Angsana New"/>
-        <a:font script="Ethi" typeface="Nyala"/>
-        <a:font script="Beng" typeface="Vrinda"/>
-        <a:font script="Gujr" typeface="Shruti"/>
-        <a:font script="Khmr" typeface="MoolBoran"/>
-        <a:font script="Knda" typeface="Tunga"/>
-        <a:font script="Guru" typeface="Raavi"/>
-        <a:font script="Cans" typeface="Euphemia"/>
-        <a:font script="Cher" typeface="Plantagenet Cherokee"/>
-        <a:font script="Yiii" typeface="Microsoft Yi Baiti"/>
-        <a:font script="Tibt" typeface="Microsoft Himalaya"/>
-        <a:font script="Thaa" typeface="MV Boli"/>
-        <a:font script="Deva" typeface="Mangal"/>
-        <a:font script="Telu" typeface="Gautami"/>
-        <a:font script="Taml" typeface="Latha"/>
-        <a:font script="Syrc" typeface="Estrangelo Edessa"/>
-        <a:font script="Orya" typeface="Kalinga"/>
-        <a:font script="Mlym" typeface="Kartika"/>
-        <a:font script="Laoo" typeface="DokChampa"/>
-        <a:font script="Sinh" typeface="Iskoola Pota"/>
-        <a:font script="Mong" typeface="Mongolian Baiti"/>
-        <a:font script="Viet" typeface="Times New Roman"/>
-        <a:font script="Uigh" typeface="Microsoft Uighur"/>
-        <a:font script="Geor" typeface="Sylfaen"/>
-        <a:font script="Armn" typeface="Arial"/>
-        <a:font script="Bugi" typeface="Leelawadee UI"/>
-        <a:font script="Bopo" typeface="Microsoft JhengHei"/>
-        <a:font script="Java" typeface="Javanese Text"/>
-        <a:font script="Lisu" typeface="Segoe UI"/>
-        <a:font script="Mymr" typeface="Myanmar Text"/>
-        <a:font script="Nkoo" typeface="Ebrima"/>
-        <a:font script="Olck" typeface="Nirmala UI"/>
-        <a:font script="Osma" typeface="Ebrima"/>
-        <a:font script="Phag" typeface="Phagspa"/>
-        <a:font script="Syrn" typeface="Estrangelo Edessa"/>
-        <a:font script="Syrj" typeface="Estrangelo Edessa"/>
-        <a:font script="Syre" typeface="Estrangelo Edessa"/>
-        <a:font script="Sora" typeface="Nirmala UI"/>
-        <a:font script="Tale" typeface="Microsoft Tai Le"/>
-        <a:font script="Talu" typeface="Microsoft New Tai Lue"/>
-        <a:font script="Tfng" typeface="Ebrima"/>
-      </a:majorFont>
-      <a:minorFont>
-        <a:latin typeface="Aptos" panose="02110004020202020204"/>
-        <a:ea typeface=""/>
-        <a:cs typeface=""/>
-        <a:font script="Jpan" typeface="游ゴシック"/>
-        <a:font script="Hang" typeface="맑은 고딕"/>
-        <a:font script="Hans" typeface="等线"/>
-        <a:font script="Hant" typeface="新細明體"/>
-        <a:font script="Arab" typeface="Arial"/>
+        <a:font script="Grek" typeface="Corbel"/>
+        <a:font script="Cyrl" typeface="Corbel"/>
+        <a:font script="Jpan" typeface="HGｺﾞｼｯｸE"/>
+        <a:font script="Hang" typeface="휴먼매직체"/>
+        <a:font script="Hans" typeface="华文中宋"/>
+        <a:font script="Hant" typeface="微軟正黑體"/>
+        <a:font script="Arab" typeface="Majalla UI"/>
         <a:font script="Hebr" typeface="Arial"/>
         <a:font script="Thai" typeface="Cordia New"/>
         <a:font script="Ethi" typeface="Nyala"/>
@@ -5291,29 +5020,49 @@
         <a:font script="Laoo" typeface="DokChampa"/>
         <a:font script="Sinh" typeface="Iskoola Pota"/>
         <a:font script="Mong" typeface="Mongolian Baiti"/>
-        <a:font script="Viet" typeface="Arial"/>
+        <a:font script="Viet" typeface="Tahoma"/>
         <a:font script="Uigh" typeface="Microsoft Uighur"/>
         <a:font script="Geor" typeface="Sylfaen"/>
-        <a:font script="Armn" typeface="Arial"/>
-        <a:font script="Bugi" typeface="Leelawadee UI"/>
-        <a:font script="Bopo" typeface="Microsoft JhengHei"/>
-        <a:font script="Java" typeface="Javanese Text"/>
-        <a:font script="Lisu" typeface="Segoe UI"/>
-        <a:font script="Mymr" typeface="Myanmar Text"/>
-        <a:font script="Nkoo" typeface="Ebrima"/>
-        <a:font script="Olck" typeface="Nirmala UI"/>
-        <a:font script="Osma" typeface="Ebrima"/>
-        <a:font script="Phag" typeface="Phagspa"/>
-        <a:font script="Syrn" typeface="Estrangelo Edessa"/>
-        <a:font script="Syrj" typeface="Estrangelo Edessa"/>
-        <a:font script="Syre" typeface="Estrangelo Edessa"/>
-        <a:font script="Sora" typeface="Nirmala UI"/>
-        <a:font script="Tale" typeface="Microsoft Tai Le"/>
-        <a:font script="Talu" typeface="Microsoft New Tai Lue"/>
-        <a:font script="Tfng" typeface="Ebrima"/>
+      </a:majorFont>
+      <a:minorFont>
+        <a:latin typeface="Gill Sans MT" panose="020B0502020104020203"/>
+        <a:ea typeface=""/>
+        <a:cs typeface=""/>
+        <a:font script="Grek" typeface="Corbel"/>
+        <a:font script="Cyrl" typeface="Corbel"/>
+        <a:font script="Jpan" typeface="HGｺﾞｼｯｸE"/>
+        <a:font script="Hang" typeface="휴먼매직체"/>
+        <a:font script="Hans" typeface="华文中宋"/>
+        <a:font script="Hant" typeface="微軟正黑體"/>
+        <a:font script="Arab" typeface="Majalla UI"/>
+        <a:font script="Hebr" typeface="Arial"/>
+        <a:font script="Thai" typeface="Cordia New"/>
+        <a:font script="Ethi" typeface="Nyala"/>
+        <a:font script="Beng" typeface="Vrinda"/>
+        <a:font script="Gujr" typeface="Shruti"/>
+        <a:font script="Khmr" typeface="DaunPenh"/>
+        <a:font script="Knda" typeface="Tunga"/>
+        <a:font script="Guru" typeface="Raavi"/>
+        <a:font script="Cans" typeface="Euphemia"/>
+        <a:font script="Cher" typeface="Plantagenet Cherokee"/>
+        <a:font script="Yiii" typeface="Microsoft Yi Baiti"/>
+        <a:font script="Tibt" typeface="Microsoft Himalaya"/>
+        <a:font script="Thaa" typeface="MV Boli"/>
+        <a:font script="Deva" typeface="Mangal"/>
+        <a:font script="Telu" typeface="Gautami"/>
+        <a:font script="Taml" typeface="Latha"/>
+        <a:font script="Syrc" typeface="Estrangelo Edessa"/>
+        <a:font script="Orya" typeface="Kalinga"/>
+        <a:font script="Mlym" typeface="Kartika"/>
+        <a:font script="Laoo" typeface="DokChampa"/>
+        <a:font script="Sinh" typeface="Iskoola Pota"/>
+        <a:font script="Mong" typeface="Mongolian Baiti"/>
+        <a:font script="Viet" typeface="Tahoma"/>
+        <a:font script="Uigh" typeface="Microsoft Uighur"/>
+        <a:font script="Geor" typeface="Sylfaen"/>
       </a:minorFont>
     </a:fontScheme>
-    <a:fmtScheme name="Office">
+    <a:fmtScheme name="Parcel">
       <a:fillStyleLst>
         <a:solidFill>
           <a:schemeClr val="phClr"/>
@@ -5322,23 +5071,16 @@
           <a:gsLst>
             <a:gs pos="0">
               <a:schemeClr val="phClr">
-                <a:lumMod val="110000"/>
-                <a:satMod val="105000"/>
-                <a:tint val="67000"/>
-              </a:schemeClr>
-            </a:gs>
-            <a:gs pos="50000">
-              <a:schemeClr val="phClr">
-                <a:lumMod val="105000"/>
-                <a:satMod val="103000"/>
-                <a:tint val="73000"/>
+                <a:tint val="80000"/>
+                <a:satMod val="107000"/>
+                <a:lumMod val="103000"/>
               </a:schemeClr>
             </a:gs>
             <a:gs pos="100000">
               <a:schemeClr val="phClr">
-                <a:lumMod val="105000"/>
+                <a:tint val="82000"/>
                 <a:satMod val="109000"/>
-                <a:tint val="81000"/>
+                <a:lumMod val="103000"/>
               </a:schemeClr>
             </a:gs>
           </a:gsLst>
@@ -5348,23 +5090,23 @@
           <a:gsLst>
             <a:gs pos="0">
               <a:schemeClr val="phClr">
-                <a:satMod val="103000"/>
+                <a:tint val="97000"/>
+                <a:satMod val="100000"/>
                 <a:lumMod val="102000"/>
-                <a:tint val="94000"/>
               </a:schemeClr>
             </a:gs>
             <a:gs pos="50000">
               <a:schemeClr val="phClr">
-                <a:satMod val="110000"/>
+                <a:shade val="100000"/>
+                <a:satMod val="103000"/>
                 <a:lumMod val="100000"/>
-                <a:shade val="100000"/>
               </a:schemeClr>
             </a:gs>
             <a:gs pos="100000">
               <a:schemeClr val="phClr">
+                <a:shade val="93000"/>
+                <a:satMod val="110000"/>
                 <a:lumMod val="99000"/>
-                <a:satMod val="120000"/>
-                <a:shade val="78000"/>
               </a:schemeClr>
             </a:gs>
           </a:gsLst>
@@ -5372,26 +5114,23 @@
         </a:gradFill>
       </a:fillStyleLst>
       <a:lnStyleLst>
+        <a:ln w="6350" cap="flat" cmpd="sng" algn="ctr">
+          <a:solidFill>
+            <a:schemeClr val="phClr"/>
+          </a:solidFill>
+          <a:prstDash val="solid"/>
+        </a:ln>
         <a:ln w="12700" cap="flat" cmpd="sng" algn="ctr">
           <a:solidFill>
             <a:schemeClr val="phClr"/>
           </a:solidFill>
           <a:prstDash val="solid"/>
-          <a:miter lim="800000"/>
         </a:ln>
-        <a:ln w="19050" cap="flat" cmpd="sng" algn="ctr">
+        <a:ln w="31750" cap="flat" cmpd="sng" algn="ctr">
           <a:solidFill>
             <a:schemeClr val="phClr"/>
           </a:solidFill>
           <a:prstDash val="solid"/>
-          <a:miter lim="800000"/>
-        </a:ln>
-        <a:ln w="25400" cap="flat" cmpd="sng" algn="ctr">
-          <a:solidFill>
-            <a:schemeClr val="phClr"/>
-          </a:solidFill>
-          <a:prstDash val="solid"/>
-          <a:miter lim="800000"/>
         </a:ln>
       </a:lnStyleLst>
       <a:effectStyleLst>
@@ -5403,12 +5142,21 @@
         </a:effectStyle>
         <a:effectStyle>
           <a:effectLst>
-            <a:outerShdw blurRad="57150" dist="19050" dir="5400000" algn="ctr" rotWithShape="0">
+            <a:outerShdw blurRad="55880" dist="15240" dir="5400000" algn="ctr" rotWithShape="0">
               <a:srgbClr val="000000">
-                <a:alpha val="63000"/>
+                <a:alpha val="45000"/>
               </a:srgbClr>
             </a:outerShdw>
           </a:effectLst>
+          <a:scene3d>
+            <a:camera prst="orthographicFront">
+              <a:rot lat="0" lon="0" rev="0"/>
+            </a:camera>
+            <a:lightRig rig="brightRoom" dir="tl"/>
+          </a:scene3d>
+          <a:sp3d prstMaterial="dkEdge">
+            <a:bevelT w="0" h="0"/>
+          </a:sp3d>
         </a:effectStyle>
       </a:effectStyleLst>
       <a:bgFillStyleLst>
@@ -5425,57 +5173,33 @@
           <a:gsLst>
             <a:gs pos="0">
               <a:schemeClr val="phClr">
-                <a:tint val="93000"/>
-                <a:satMod val="150000"/>
-                <a:shade val="98000"/>
-                <a:lumMod val="102000"/>
-              </a:schemeClr>
-            </a:gs>
-            <a:gs pos="50000">
-              <a:schemeClr val="phClr">
-                <a:tint val="98000"/>
-                <a:satMod val="130000"/>
-                <a:shade val="90000"/>
-                <a:lumMod val="103000"/>
+                <a:tint val="97000"/>
+                <a:shade val="100000"/>
+                <a:satMod val="185000"/>
+                <a:lumMod val="120000"/>
               </a:schemeClr>
             </a:gs>
             <a:gs pos="100000">
               <a:schemeClr val="phClr">
-                <a:shade val="63000"/>
-                <a:satMod val="120000"/>
+                <a:tint val="96000"/>
+                <a:shade val="95000"/>
+                <a:satMod val="215000"/>
+                <a:lumMod val="80000"/>
               </a:schemeClr>
             </a:gs>
           </a:gsLst>
-          <a:lin ang="5400000" scaled="0"/>
+          <a:path path="circle">
+            <a:fillToRect l="50000" t="55000" r="125000" b="100000"/>
+          </a:path>
         </a:gradFill>
       </a:bgFillStyleLst>
     </a:fmtScheme>
   </a:themeElements>
-  <a:objectDefaults>
-    <a:lnDef>
-      <a:spPr/>
-      <a:bodyPr/>
-      <a:lstStyle/>
-      <a:style>
-        <a:lnRef idx="2">
-          <a:schemeClr val="accent1"/>
-        </a:lnRef>
-        <a:fillRef idx="0">
-          <a:schemeClr val="accent1"/>
-        </a:fillRef>
-        <a:effectRef idx="1">
-          <a:schemeClr val="accent1"/>
-        </a:effectRef>
-        <a:fontRef idx="minor">
-          <a:schemeClr val="tx1"/>
-        </a:fontRef>
-      </a:style>
-    </a:lnDef>
-  </a:objectDefaults>
+  <a:objectDefaults/>
   <a:extraClrSchemeLst/>
   <a:extLst>
     <a:ext uri="{05A4C25C-085E-4340-85A3-A5531E510DB2}">
-      <thm15:themeFamily xmlns:thm15="http://schemas.microsoft.com/office/thememl/2012/main" name="Office Theme" id="{2E142A2C-CD16-42D6-873A-C26D2A0506FA}" vid="{1BDDFF52-6CD6-40A5-AB3C-68EB2F1E4D0A}"/>
+      <thm15:themeFamily xmlns:thm15="http://schemas.microsoft.com/office/thememl/2012/main" name="Parcel" id="{8BEC4385-4EB9-4D53-BFB5-0EA123736B6D}" vid="{4DB32801-28C0-48B0-8C1D-A9A58613615A}"/>
     </a:ext>
   </a:extLst>
 </a:theme>

--- a/Documentation/E-Commerce Case Study.pptx
+++ b/Documentation/E-Commerce Case Study.pptx
@@ -2,7 +2,7 @@
 <file path=ppt/presentation.xml><?xml version="1.0" encoding="utf-8"?>
 <p:presentation xmlns:a="http://schemas.openxmlformats.org/drawingml/2006/main" xmlns:r="http://schemas.openxmlformats.org/officeDocument/2006/relationships" xmlns:p="http://schemas.openxmlformats.org/presentationml/2006/main" saveSubsetFonts="1">
   <p:sldMasterIdLst>
-    <p:sldMasterId id="2147483785" r:id="rId1"/>
+    <p:sldMasterId id="2147483847" r:id="rId1"/>
   </p:sldMasterIdLst>
   <p:sldIdLst>
     <p:sldId id="256" r:id="rId2"/>
@@ -337,7 +337,7 @@
     </p:spTree>
     <p:extLst>
       <p:ext uri="{BB962C8B-B14F-4D97-AF65-F5344CB8AC3E}">
-        <p14:creationId xmlns:p14="http://schemas.microsoft.com/office/powerpoint/2010/main" val="2540208068"/>
+        <p14:creationId xmlns:p14="http://schemas.microsoft.com/office/powerpoint/2010/main" val="1808705507"/>
       </p:ext>
     </p:extLst>
   </p:cSld>
@@ -507,7 +507,7 @@
     </p:spTree>
     <p:extLst>
       <p:ext uri="{BB962C8B-B14F-4D97-AF65-F5344CB8AC3E}">
-        <p14:creationId xmlns:p14="http://schemas.microsoft.com/office/powerpoint/2010/main" val="2479960000"/>
+        <p14:creationId xmlns:p14="http://schemas.microsoft.com/office/powerpoint/2010/main" val="50767109"/>
       </p:ext>
     </p:extLst>
   </p:cSld>
@@ -687,7 +687,7 @@
     </p:spTree>
     <p:extLst>
       <p:ext uri="{BB962C8B-B14F-4D97-AF65-F5344CB8AC3E}">
-        <p14:creationId xmlns:p14="http://schemas.microsoft.com/office/powerpoint/2010/main" val="3488357992"/>
+        <p14:creationId xmlns:p14="http://schemas.microsoft.com/office/powerpoint/2010/main" val="1126045497"/>
       </p:ext>
     </p:extLst>
   </p:cSld>
@@ -857,7 +857,7 @@
     </p:spTree>
     <p:extLst>
       <p:ext uri="{BB962C8B-B14F-4D97-AF65-F5344CB8AC3E}">
-        <p14:creationId xmlns:p14="http://schemas.microsoft.com/office/powerpoint/2010/main" val="4123533759"/>
+        <p14:creationId xmlns:p14="http://schemas.microsoft.com/office/powerpoint/2010/main" val="2997387828"/>
       </p:ext>
     </p:extLst>
   </p:cSld>
@@ -1125,7 +1125,7 @@
     </p:spTree>
     <p:extLst>
       <p:ext uri="{BB962C8B-B14F-4D97-AF65-F5344CB8AC3E}">
-        <p14:creationId xmlns:p14="http://schemas.microsoft.com/office/powerpoint/2010/main" val="63997570"/>
+        <p14:creationId xmlns:p14="http://schemas.microsoft.com/office/powerpoint/2010/main" val="389479249"/>
       </p:ext>
     </p:extLst>
   </p:cSld>
@@ -1357,7 +1357,7 @@
     </p:spTree>
     <p:extLst>
       <p:ext uri="{BB962C8B-B14F-4D97-AF65-F5344CB8AC3E}">
-        <p14:creationId xmlns:p14="http://schemas.microsoft.com/office/powerpoint/2010/main" val="3133860343"/>
+        <p14:creationId xmlns:p14="http://schemas.microsoft.com/office/powerpoint/2010/main" val="1917428803"/>
       </p:ext>
     </p:extLst>
   </p:cSld>
@@ -1739,7 +1739,7 @@
     </p:spTree>
     <p:extLst>
       <p:ext uri="{BB962C8B-B14F-4D97-AF65-F5344CB8AC3E}">
-        <p14:creationId xmlns:p14="http://schemas.microsoft.com/office/powerpoint/2010/main" val="2935711764"/>
+        <p14:creationId xmlns:p14="http://schemas.microsoft.com/office/powerpoint/2010/main" val="1559671134"/>
       </p:ext>
     </p:extLst>
   </p:cSld>
@@ -1857,7 +1857,7 @@
     </p:spTree>
     <p:extLst>
       <p:ext uri="{BB962C8B-B14F-4D97-AF65-F5344CB8AC3E}">
-        <p14:creationId xmlns:p14="http://schemas.microsoft.com/office/powerpoint/2010/main" val="3483121464"/>
+        <p14:creationId xmlns:p14="http://schemas.microsoft.com/office/powerpoint/2010/main" val="1377175274"/>
       </p:ext>
     </p:extLst>
   </p:cSld>
@@ -1952,7 +1952,7 @@
     </p:spTree>
     <p:extLst>
       <p:ext uri="{BB962C8B-B14F-4D97-AF65-F5344CB8AC3E}">
-        <p14:creationId xmlns:p14="http://schemas.microsoft.com/office/powerpoint/2010/main" val="2392527800"/>
+        <p14:creationId xmlns:p14="http://schemas.microsoft.com/office/powerpoint/2010/main" val="273324114"/>
       </p:ext>
     </p:extLst>
   </p:cSld>
@@ -2324,7 +2324,7 @@
     </p:spTree>
     <p:extLst>
       <p:ext uri="{BB962C8B-B14F-4D97-AF65-F5344CB8AC3E}">
-        <p14:creationId xmlns:p14="http://schemas.microsoft.com/office/powerpoint/2010/main" val="513925333"/>
+        <p14:creationId xmlns:p14="http://schemas.microsoft.com/office/powerpoint/2010/main" val="3308687994"/>
       </p:ext>
     </p:extLst>
   </p:cSld>
@@ -2681,7 +2681,7 @@
     </p:spTree>
     <p:extLst>
       <p:ext uri="{BB962C8B-B14F-4D97-AF65-F5344CB8AC3E}">
-        <p14:creationId xmlns:p14="http://schemas.microsoft.com/office/powerpoint/2010/main" val="4108826696"/>
+        <p14:creationId xmlns:p14="http://schemas.microsoft.com/office/powerpoint/2010/main" val="3633888907"/>
       </p:ext>
     </p:extLst>
   </p:cSld>
@@ -2949,23 +2949,23 @@
     </p:spTree>
     <p:extLst>
       <p:ext uri="{BB962C8B-B14F-4D97-AF65-F5344CB8AC3E}">
-        <p14:creationId xmlns:p14="http://schemas.microsoft.com/office/powerpoint/2010/main" val="2808336456"/>
+        <p14:creationId xmlns:p14="http://schemas.microsoft.com/office/powerpoint/2010/main" val="3101927548"/>
       </p:ext>
     </p:extLst>
   </p:cSld>
   <p:clrMap bg1="lt1" tx1="dk1" bg2="lt2" tx2="dk2" accent1="accent1" accent2="accent2" accent3="accent3" accent4="accent4" accent5="accent5" accent6="accent6" hlink="hlink" folHlink="folHlink"/>
   <p:sldLayoutIdLst>
-    <p:sldLayoutId id="2147483786" r:id="rId1"/>
-    <p:sldLayoutId id="2147483787" r:id="rId2"/>
-    <p:sldLayoutId id="2147483788" r:id="rId3"/>
-    <p:sldLayoutId id="2147483789" r:id="rId4"/>
-    <p:sldLayoutId id="2147483790" r:id="rId5"/>
-    <p:sldLayoutId id="2147483791" r:id="rId6"/>
-    <p:sldLayoutId id="2147483792" r:id="rId7"/>
-    <p:sldLayoutId id="2147483793" r:id="rId8"/>
-    <p:sldLayoutId id="2147483794" r:id="rId9"/>
-    <p:sldLayoutId id="2147483795" r:id="rId10"/>
-    <p:sldLayoutId id="2147483796" r:id="rId11"/>
+    <p:sldLayoutId id="2147483848" r:id="rId1"/>
+    <p:sldLayoutId id="2147483849" r:id="rId2"/>
+    <p:sldLayoutId id="2147483850" r:id="rId3"/>
+    <p:sldLayoutId id="2147483851" r:id="rId4"/>
+    <p:sldLayoutId id="2147483852" r:id="rId5"/>
+    <p:sldLayoutId id="2147483853" r:id="rId6"/>
+    <p:sldLayoutId id="2147483854" r:id="rId7"/>
+    <p:sldLayoutId id="2147483855" r:id="rId8"/>
+    <p:sldLayoutId id="2147483856" r:id="rId9"/>
+    <p:sldLayoutId id="2147483857" r:id="rId10"/>
+    <p:sldLayoutId id="2147483858" r:id="rId11"/>
   </p:sldLayoutIdLst>
   <p:txStyles>
     <p:titleStyle>
@@ -3335,6 +3335,45 @@
           <a:chExt cx="0" cy="0"/>
         </a:xfrm>
       </p:grpSpPr>
+      <p:pic>
+        <p:nvPicPr>
+          <p:cNvPr id="5" name="r1Artboard 3 copy 34edsw.pdf">
+            <a:extLst>
+              <a:ext uri="{FF2B5EF4-FFF2-40B4-BE49-F238E27FC236}">
+                <a16:creationId xmlns:a16="http://schemas.microsoft.com/office/drawing/2014/main" id="{7A8B6993-CF17-A101-E37D-0AE0211A16FC}"/>
+              </a:ext>
+            </a:extLst>
+          </p:cNvPr>
+          <p:cNvPicPr>
+            <a:picLocks noChangeAspect="1"/>
+          </p:cNvPicPr>
+          <p:nvPr/>
+        </p:nvPicPr>
+        <p:blipFill rotWithShape="1">
+          <a:blip r:embed="rId2">
+            <a:alphaModFix amt="76000"/>
+            <a:extLst>
+              <a:ext uri="{28A0092B-C50C-407E-A947-70E740481C1C}">
+                <a14:useLocalDpi xmlns:a14="http://schemas.microsoft.com/office/drawing/2010/main" val="0"/>
+              </a:ext>
+            </a:extLst>
+          </a:blip>
+          <a:srcRect l="-127" t="37299" r="51849" b="14438"/>
+          <a:stretch/>
+        </p:blipFill>
+        <p:spPr>
+          <a:xfrm>
+            <a:off x="3758638" y="0"/>
+            <a:ext cx="8433362" cy="6858000"/>
+          </a:xfrm>
+          <a:prstGeom prst="rect">
+            <a:avLst/>
+          </a:prstGeom>
+          <a:ln w="12700">
+            <a:miter lim="400000"/>
+          </a:ln>
+        </p:spPr>
+      </p:pic>
       <p:sp>
         <p:nvSpPr>
           <p:cNvPr id="2" name="Title 1">
@@ -3364,7 +3403,7 @@
           <a:lstStyle/>
           <a:p>
             <a:r>
-              <a:rPr lang="en-IN" sz="6000"/>
+              <a:rPr lang="en-IN" sz="6000" dirty="0"/>
               <a:t>E-Commerce Case Study</a:t>
             </a:r>
           </a:p>
@@ -3388,9 +3427,15 @@
         </p:nvSpPr>
         <p:spPr>
           <a:xfrm>
-            <a:off x="1794165" y="4709627"/>
+            <a:off x="1742873" y="4644313"/>
             <a:ext cx="8956962" cy="1126283"/>
           </a:xfrm>
+          <a:solidFill>
+            <a:schemeClr val="bg1">
+              <a:lumMod val="75000"/>
+              <a:lumOff val="25000"/>
+            </a:schemeClr>
+          </a:solidFill>
         </p:spPr>
         <p:txBody>
           <a:bodyPr anchor="ctr">
@@ -3399,36 +3444,60 @@
           <a:lstStyle/>
           <a:p>
             <a:r>
-              <a:rPr lang="en-IN" dirty="0">
-                <a:solidFill>
-                  <a:schemeClr val="bg1"/>
-                </a:solidFill>
-              </a:rPr>
+              <a:rPr lang="en-IN" dirty="0"/>
               <a:t>Created and Presented by</a:t>
             </a:r>
           </a:p>
           <a:p>
             <a:r>
-              <a:rPr lang="en-IN" dirty="0">
-                <a:solidFill>
-                  <a:schemeClr val="bg1"/>
-                </a:solidFill>
-              </a:rPr>
+              <a:rPr lang="en-IN" dirty="0"/>
               <a:t>Name: Rishi Pratap Yadav</a:t>
             </a:r>
           </a:p>
           <a:p>
             <a:r>
-              <a:rPr lang="en-IN" dirty="0">
-                <a:solidFill>
-                  <a:schemeClr val="bg1"/>
-                </a:solidFill>
-              </a:rPr>
+              <a:rPr lang="en-IN" dirty="0"/>
               <a:t>Emp Id: 3145887</a:t>
             </a:r>
           </a:p>
         </p:txBody>
       </p:sp>
+      <p:pic>
+        <p:nvPicPr>
+          <p:cNvPr id="4" name="Graphic 3">
+            <a:extLst>
+              <a:ext uri="{FF2B5EF4-FFF2-40B4-BE49-F238E27FC236}">
+                <a16:creationId xmlns:a16="http://schemas.microsoft.com/office/drawing/2014/main" id="{15957122-EDC4-DBA6-C85E-4E9092A19078}"/>
+              </a:ext>
+            </a:extLst>
+          </p:cNvPr>
+          <p:cNvPicPr>
+            <a:picLocks noChangeAspect="1"/>
+          </p:cNvPicPr>
+          <p:nvPr/>
+        </p:nvPicPr>
+        <p:blipFill>
+          <a:blip>
+            <a:extLst>
+              <a:ext uri="{96DAC541-7B7A-43D3-8B79-37D633B846F1}">
+                <asvg:svgBlip xmlns:asvg="http://schemas.microsoft.com/office/drawing/2016/SVG/main" r:embed="rId3"/>
+              </a:ext>
+            </a:extLst>
+          </a:blip>
+          <a:stretch>
+            <a:fillRect/>
+          </a:stretch>
+        </p:blipFill>
+        <p:spPr>
+          <a:xfrm>
+            <a:off x="9406635" y="5371200"/>
+            <a:ext cx="1982400" cy="1486800"/>
+          </a:xfrm>
+          <a:prstGeom prst="rect">
+            <a:avLst/>
+          </a:prstGeom>
+        </p:spPr>
+      </p:pic>
     </p:spTree>
     <p:extLst>
       <p:ext uri="{BB962C8B-B14F-4D97-AF65-F5344CB8AC3E}">
@@ -3552,6 +3621,42 @@
           </a:p>
         </p:txBody>
       </p:sp>
+      <p:pic>
+        <p:nvPicPr>
+          <p:cNvPr id="3" name="Graphic 2">
+            <a:extLst>
+              <a:ext uri="{FF2B5EF4-FFF2-40B4-BE49-F238E27FC236}">
+                <a16:creationId xmlns:a16="http://schemas.microsoft.com/office/drawing/2014/main" id="{AD3031BA-3BB5-5A9A-DE11-0162B99356F9}"/>
+              </a:ext>
+            </a:extLst>
+          </p:cNvPr>
+          <p:cNvPicPr>
+            <a:picLocks noChangeAspect="1"/>
+          </p:cNvPicPr>
+          <p:nvPr/>
+        </p:nvPicPr>
+        <p:blipFill>
+          <a:blip>
+            <a:extLst>
+              <a:ext uri="{96DAC541-7B7A-43D3-8B79-37D633B846F1}">
+                <asvg:svgBlip xmlns:asvg="http://schemas.microsoft.com/office/drawing/2016/SVG/main" r:embed="rId3"/>
+              </a:ext>
+            </a:extLst>
+          </a:blip>
+          <a:stretch>
+            <a:fillRect/>
+          </a:stretch>
+        </p:blipFill>
+        <p:spPr>
+          <a:xfrm>
+            <a:off x="9776750" y="5428801"/>
+            <a:ext cx="1982400" cy="1486800"/>
+          </a:xfrm>
+          <a:prstGeom prst="rect">
+            <a:avLst/>
+          </a:prstGeom>
+        </p:spPr>
+      </p:pic>
     </p:spTree>
     <p:extLst>
       <p:ext uri="{BB962C8B-B14F-4D97-AF65-F5344CB8AC3E}">
@@ -3775,7 +3880,7 @@
           <p:nvPr>
             <p:extLst>
               <p:ext uri="{D42A27DB-BD31-4B8C-83A1-F6EECF244321}">
-                <p14:modId xmlns:p14="http://schemas.microsoft.com/office/powerpoint/2010/main" val="4234007843"/>
+                <p14:modId xmlns:p14="http://schemas.microsoft.com/office/powerpoint/2010/main" val="3592365930"/>
               </p:ext>
             </p:extLst>
           </p:nvPr>
@@ -3823,6 +3928,42 @@
           </a:graphicData>
         </a:graphic>
       </p:graphicFrame>
+      <p:pic>
+        <p:nvPicPr>
+          <p:cNvPr id="8" name="Graphic 7">
+            <a:extLst>
+              <a:ext uri="{FF2B5EF4-FFF2-40B4-BE49-F238E27FC236}">
+                <a16:creationId xmlns:a16="http://schemas.microsoft.com/office/drawing/2014/main" id="{363F954E-DB77-C578-F8C1-385F000CB796}"/>
+              </a:ext>
+            </a:extLst>
+          </p:cNvPr>
+          <p:cNvPicPr>
+            <a:picLocks noChangeAspect="1"/>
+          </p:cNvPicPr>
+          <p:nvPr/>
+        </p:nvPicPr>
+        <p:blipFill>
+          <a:blip>
+            <a:extLst>
+              <a:ext uri="{96DAC541-7B7A-43D3-8B79-37D633B846F1}">
+                <asvg:svgBlip xmlns:asvg="http://schemas.microsoft.com/office/drawing/2016/SVG/main" r:embed="rId6"/>
+              </a:ext>
+            </a:extLst>
+          </a:blip>
+          <a:stretch>
+            <a:fillRect/>
+          </a:stretch>
+        </p:blipFill>
+        <p:spPr>
+          <a:xfrm>
+            <a:off x="9776750" y="5428801"/>
+            <a:ext cx="1982400" cy="1486800"/>
+          </a:xfrm>
+          <a:prstGeom prst="rect">
+            <a:avLst/>
+          </a:prstGeom>
+        </p:spPr>
+      </p:pic>
     </p:spTree>
     <p:extLst>
       <p:ext uri="{BB962C8B-B14F-4D97-AF65-F5344CB8AC3E}">
@@ -3853,6 +3994,45 @@
           <a:chExt cx="0" cy="0"/>
         </a:xfrm>
       </p:grpSpPr>
+      <p:pic>
+        <p:nvPicPr>
+          <p:cNvPr id="5" name="r1Artboard 3 copy 34edsw.pdf">
+            <a:extLst>
+              <a:ext uri="{FF2B5EF4-FFF2-40B4-BE49-F238E27FC236}">
+                <a16:creationId xmlns:a16="http://schemas.microsoft.com/office/drawing/2014/main" id="{38860263-5F45-B99A-5BF0-115C290B57D2}"/>
+              </a:ext>
+            </a:extLst>
+          </p:cNvPr>
+          <p:cNvPicPr>
+            <a:picLocks noChangeAspect="1"/>
+          </p:cNvPicPr>
+          <p:nvPr/>
+        </p:nvPicPr>
+        <p:blipFill rotWithShape="1">
+          <a:blip r:embed="rId2">
+            <a:alphaModFix amt="76000"/>
+            <a:extLst>
+              <a:ext uri="{28A0092B-C50C-407E-A947-70E740481C1C}">
+                <a14:useLocalDpi xmlns:a14="http://schemas.microsoft.com/office/drawing/2010/main" val="0"/>
+              </a:ext>
+            </a:extLst>
+          </a:blip>
+          <a:srcRect l="-127" t="37299" r="51849" b="14438"/>
+          <a:stretch/>
+        </p:blipFill>
+        <p:spPr>
+          <a:xfrm>
+            <a:off x="3758638" y="0"/>
+            <a:ext cx="8433362" cy="6858000"/>
+          </a:xfrm>
+          <a:prstGeom prst="rect">
+            <a:avLst/>
+          </a:prstGeom>
+          <a:ln w="12700">
+            <a:miter lim="400000"/>
+          </a:ln>
+        </p:spPr>
+      </p:pic>
       <p:sp>
         <p:nvSpPr>
           <p:cNvPr id="2" name="Title 1">
@@ -3886,6 +4066,42 @@
           </a:p>
         </p:txBody>
       </p:sp>
+      <p:pic>
+        <p:nvPicPr>
+          <p:cNvPr id="4" name="Graphic 3">
+            <a:extLst>
+              <a:ext uri="{FF2B5EF4-FFF2-40B4-BE49-F238E27FC236}">
+                <a16:creationId xmlns:a16="http://schemas.microsoft.com/office/drawing/2014/main" id="{17C165FF-F095-D1F8-A357-E663973C187F}"/>
+              </a:ext>
+            </a:extLst>
+          </p:cNvPr>
+          <p:cNvPicPr>
+            <a:picLocks noChangeAspect="1"/>
+          </p:cNvPicPr>
+          <p:nvPr/>
+        </p:nvPicPr>
+        <p:blipFill>
+          <a:blip>
+            <a:extLst>
+              <a:ext uri="{96DAC541-7B7A-43D3-8B79-37D633B846F1}">
+                <asvg:svgBlip xmlns:asvg="http://schemas.microsoft.com/office/drawing/2016/SVG/main" r:embed="rId3"/>
+              </a:ext>
+            </a:extLst>
+          </a:blip>
+          <a:stretch>
+            <a:fillRect/>
+          </a:stretch>
+        </p:blipFill>
+        <p:spPr>
+          <a:xfrm>
+            <a:off x="9776750" y="5428801"/>
+            <a:ext cx="1982400" cy="1486800"/>
+          </a:xfrm>
+          <a:prstGeom prst="rect">
+            <a:avLst/>
+          </a:prstGeom>
+        </p:spPr>
+      </p:pic>
     </p:spTree>
     <p:extLst>
       <p:ext uri="{BB962C8B-B14F-4D97-AF65-F5344CB8AC3E}">
@@ -3916,6 +4132,45 @@
           <a:chExt cx="0" cy="0"/>
         </a:xfrm>
       </p:grpSpPr>
+      <p:pic>
+        <p:nvPicPr>
+          <p:cNvPr id="5" name="r1Artboard 3 copy 34edsw.pdf">
+            <a:extLst>
+              <a:ext uri="{FF2B5EF4-FFF2-40B4-BE49-F238E27FC236}">
+                <a16:creationId xmlns:a16="http://schemas.microsoft.com/office/drawing/2014/main" id="{040291ED-F78F-1F08-3EA7-DE5C41BC54CC}"/>
+              </a:ext>
+            </a:extLst>
+          </p:cNvPr>
+          <p:cNvPicPr>
+            <a:picLocks noChangeAspect="1"/>
+          </p:cNvPicPr>
+          <p:nvPr/>
+        </p:nvPicPr>
+        <p:blipFill rotWithShape="1">
+          <a:blip r:embed="rId2">
+            <a:alphaModFix amt="76000"/>
+            <a:extLst>
+              <a:ext uri="{28A0092B-C50C-407E-A947-70E740481C1C}">
+                <a14:useLocalDpi xmlns:a14="http://schemas.microsoft.com/office/drawing/2010/main" val="0"/>
+              </a:ext>
+            </a:extLst>
+          </a:blip>
+          <a:srcRect l="-127" t="37299" r="51849" b="14438"/>
+          <a:stretch/>
+        </p:blipFill>
+        <p:spPr>
+          <a:xfrm>
+            <a:off x="3758638" y="0"/>
+            <a:ext cx="8433362" cy="6858000"/>
+          </a:xfrm>
+          <a:prstGeom prst="rect">
+            <a:avLst/>
+          </a:prstGeom>
+          <a:ln w="12700">
+            <a:miter lim="400000"/>
+          </a:ln>
+        </p:spPr>
+      </p:pic>
       <p:sp>
         <p:nvSpPr>
           <p:cNvPr id="2" name="Title 1">
@@ -4005,6 +4260,42 @@
           </a:p>
         </p:txBody>
       </p:sp>
+      <p:pic>
+        <p:nvPicPr>
+          <p:cNvPr id="4" name="Graphic 3">
+            <a:extLst>
+              <a:ext uri="{FF2B5EF4-FFF2-40B4-BE49-F238E27FC236}">
+                <a16:creationId xmlns:a16="http://schemas.microsoft.com/office/drawing/2014/main" id="{610978F5-751C-3F92-E8A0-EB3B04981BA3}"/>
+              </a:ext>
+            </a:extLst>
+          </p:cNvPr>
+          <p:cNvPicPr>
+            <a:picLocks noChangeAspect="1"/>
+          </p:cNvPicPr>
+          <p:nvPr/>
+        </p:nvPicPr>
+        <p:blipFill>
+          <a:blip>
+            <a:extLst>
+              <a:ext uri="{96DAC541-7B7A-43D3-8B79-37D633B846F1}">
+                <asvg:svgBlip xmlns:asvg="http://schemas.microsoft.com/office/drawing/2016/SVG/main" r:embed="rId3"/>
+              </a:ext>
+            </a:extLst>
+          </a:blip>
+          <a:stretch>
+            <a:fillRect/>
+          </a:stretch>
+        </p:blipFill>
+        <p:spPr>
+          <a:xfrm>
+            <a:off x="9406635" y="5371200"/>
+            <a:ext cx="1982400" cy="1486800"/>
+          </a:xfrm>
+          <a:prstGeom prst="rect">
+            <a:avLst/>
+          </a:prstGeom>
+        </p:spPr>
+      </p:pic>
     </p:spTree>
     <p:extLst>
       <p:ext uri="{BB962C8B-B14F-4D97-AF65-F5344CB8AC3E}">
@@ -4035,6 +4326,45 @@
           <a:chExt cx="0" cy="0"/>
         </a:xfrm>
       </p:grpSpPr>
+      <p:pic>
+        <p:nvPicPr>
+          <p:cNvPr id="5" name="r1Artboard 3 copy 34edsw.pdf">
+            <a:extLst>
+              <a:ext uri="{FF2B5EF4-FFF2-40B4-BE49-F238E27FC236}">
+                <a16:creationId xmlns:a16="http://schemas.microsoft.com/office/drawing/2014/main" id="{E4CBAD25-598C-4B65-5CDD-78B28F483A2B}"/>
+              </a:ext>
+            </a:extLst>
+          </p:cNvPr>
+          <p:cNvPicPr>
+            <a:picLocks noChangeAspect="1"/>
+          </p:cNvPicPr>
+          <p:nvPr/>
+        </p:nvPicPr>
+        <p:blipFill rotWithShape="1">
+          <a:blip r:embed="rId2">
+            <a:alphaModFix amt="76000"/>
+            <a:extLst>
+              <a:ext uri="{28A0092B-C50C-407E-A947-70E740481C1C}">
+                <a14:useLocalDpi xmlns:a14="http://schemas.microsoft.com/office/drawing/2010/main" val="0"/>
+              </a:ext>
+            </a:extLst>
+          </a:blip>
+          <a:srcRect l="-127" t="37299" r="51849" b="14438"/>
+          <a:stretch/>
+        </p:blipFill>
+        <p:spPr>
+          <a:xfrm>
+            <a:off x="3758638" y="0"/>
+            <a:ext cx="8433362" cy="6858000"/>
+          </a:xfrm>
+          <a:prstGeom prst="rect">
+            <a:avLst/>
+          </a:prstGeom>
+          <a:ln w="12700">
+            <a:miter lim="400000"/>
+          </a:ln>
+        </p:spPr>
+      </p:pic>
       <p:sp>
         <p:nvSpPr>
           <p:cNvPr id="2" name="Title 1">
@@ -4180,6 +4510,42 @@
           </a:p>
         </p:txBody>
       </p:sp>
+      <p:pic>
+        <p:nvPicPr>
+          <p:cNvPr id="4" name="Graphic 3">
+            <a:extLst>
+              <a:ext uri="{FF2B5EF4-FFF2-40B4-BE49-F238E27FC236}">
+                <a16:creationId xmlns:a16="http://schemas.microsoft.com/office/drawing/2014/main" id="{5A17DB20-EE43-7BC4-E562-69CDE4F438B3}"/>
+              </a:ext>
+            </a:extLst>
+          </p:cNvPr>
+          <p:cNvPicPr>
+            <a:picLocks noChangeAspect="1"/>
+          </p:cNvPicPr>
+          <p:nvPr/>
+        </p:nvPicPr>
+        <p:blipFill>
+          <a:blip>
+            <a:extLst>
+              <a:ext uri="{96DAC541-7B7A-43D3-8B79-37D633B846F1}">
+                <asvg:svgBlip xmlns:asvg="http://schemas.microsoft.com/office/drawing/2016/SVG/main" r:embed="rId3"/>
+              </a:ext>
+            </a:extLst>
+          </a:blip>
+          <a:stretch>
+            <a:fillRect/>
+          </a:stretch>
+        </p:blipFill>
+        <p:spPr>
+          <a:xfrm>
+            <a:off x="9406635" y="5371200"/>
+            <a:ext cx="1982400" cy="1486800"/>
+          </a:xfrm>
+          <a:prstGeom prst="rect">
+            <a:avLst/>
+          </a:prstGeom>
+        </p:spPr>
+      </p:pic>
     </p:spTree>
     <p:extLst>
       <p:ext uri="{BB962C8B-B14F-4D97-AF65-F5344CB8AC3E}">
@@ -4317,7 +4683,7 @@
             </a:pPr>
             <a:r>
               <a:rPr lang="en-IN" dirty="0"/>
-              <a:t>Low Latency(Search, showing product catalogue)</a:t>
+              <a:t>Low Latency(Page load p95: &lt;2.5sec, API Response : 200ms-300ms, Search -300ms – 500ms)</a:t>
             </a:r>
           </a:p>
           <a:p>
@@ -4335,6 +4701,42 @@
           </a:p>
         </p:txBody>
       </p:sp>
+      <p:pic>
+        <p:nvPicPr>
+          <p:cNvPr id="4" name="Graphic 3">
+            <a:extLst>
+              <a:ext uri="{FF2B5EF4-FFF2-40B4-BE49-F238E27FC236}">
+                <a16:creationId xmlns:a16="http://schemas.microsoft.com/office/drawing/2014/main" id="{C4375B7B-C818-0CB4-0669-24A5C83BD587}"/>
+              </a:ext>
+            </a:extLst>
+          </p:cNvPr>
+          <p:cNvPicPr>
+            <a:picLocks noChangeAspect="1"/>
+          </p:cNvPicPr>
+          <p:nvPr/>
+        </p:nvPicPr>
+        <p:blipFill>
+          <a:blip>
+            <a:extLst>
+              <a:ext uri="{96DAC541-7B7A-43D3-8B79-37D633B846F1}">
+                <asvg:svgBlip xmlns:asvg="http://schemas.microsoft.com/office/drawing/2016/SVG/main" r:embed="rId2"/>
+              </a:ext>
+            </a:extLst>
+          </a:blip>
+          <a:stretch>
+            <a:fillRect/>
+          </a:stretch>
+        </p:blipFill>
+        <p:spPr>
+          <a:xfrm>
+            <a:off x="9406635" y="5371200"/>
+            <a:ext cx="1982400" cy="1486800"/>
+          </a:xfrm>
+          <a:prstGeom prst="rect">
+            <a:avLst/>
+          </a:prstGeom>
+        </p:spPr>
+      </p:pic>
     </p:spTree>
     <p:extLst>
       <p:ext uri="{BB962C8B-B14F-4D97-AF65-F5344CB8AC3E}">
@@ -4480,6 +4882,42 @@
           </a:p>
         </p:txBody>
       </p:sp>
+      <p:pic>
+        <p:nvPicPr>
+          <p:cNvPr id="4" name="Graphic 3">
+            <a:extLst>
+              <a:ext uri="{FF2B5EF4-FFF2-40B4-BE49-F238E27FC236}">
+                <a16:creationId xmlns:a16="http://schemas.microsoft.com/office/drawing/2014/main" id="{D274C8EC-898F-BC28-858B-77D70ABDBDD1}"/>
+              </a:ext>
+            </a:extLst>
+          </p:cNvPr>
+          <p:cNvPicPr>
+            <a:picLocks noChangeAspect="1"/>
+          </p:cNvPicPr>
+          <p:nvPr/>
+        </p:nvPicPr>
+        <p:blipFill>
+          <a:blip>
+            <a:extLst>
+              <a:ext uri="{96DAC541-7B7A-43D3-8B79-37D633B846F1}">
+                <asvg:svgBlip xmlns:asvg="http://schemas.microsoft.com/office/drawing/2016/SVG/main" r:embed="rId2"/>
+              </a:ext>
+            </a:extLst>
+          </a:blip>
+          <a:stretch>
+            <a:fillRect/>
+          </a:stretch>
+        </p:blipFill>
+        <p:spPr>
+          <a:xfrm>
+            <a:off x="9406635" y="5371200"/>
+            <a:ext cx="1982400" cy="1486800"/>
+          </a:xfrm>
+          <a:prstGeom prst="rect">
+            <a:avLst/>
+          </a:prstGeom>
+        </p:spPr>
+      </p:pic>
     </p:spTree>
     <p:extLst>
       <p:ext uri="{BB962C8B-B14F-4D97-AF65-F5344CB8AC3E}">
@@ -4510,6 +4948,45 @@
           <a:chExt cx="0" cy="0"/>
         </a:xfrm>
       </p:grpSpPr>
+      <p:pic>
+        <p:nvPicPr>
+          <p:cNvPr id="5" name="r1Artboard 3 copy 34edsw.pdf">
+            <a:extLst>
+              <a:ext uri="{FF2B5EF4-FFF2-40B4-BE49-F238E27FC236}">
+                <a16:creationId xmlns:a16="http://schemas.microsoft.com/office/drawing/2014/main" id="{06C0FA47-C2B3-EB61-5C90-43691DE3F5B9}"/>
+              </a:ext>
+            </a:extLst>
+          </p:cNvPr>
+          <p:cNvPicPr>
+            <a:picLocks noChangeAspect="1"/>
+          </p:cNvPicPr>
+          <p:nvPr/>
+        </p:nvPicPr>
+        <p:blipFill rotWithShape="1">
+          <a:blip r:embed="rId2">
+            <a:alphaModFix amt="76000"/>
+            <a:extLst>
+              <a:ext uri="{28A0092B-C50C-407E-A947-70E740481C1C}">
+                <a14:useLocalDpi xmlns:a14="http://schemas.microsoft.com/office/drawing/2010/main" val="0"/>
+              </a:ext>
+            </a:extLst>
+          </a:blip>
+          <a:srcRect l="-127" t="37299" r="51849" b="14438"/>
+          <a:stretch/>
+        </p:blipFill>
+        <p:spPr>
+          <a:xfrm>
+            <a:off x="3758638" y="10886"/>
+            <a:ext cx="8433362" cy="6858000"/>
+          </a:xfrm>
+          <a:prstGeom prst="rect">
+            <a:avLst/>
+          </a:prstGeom>
+          <a:ln w="12700">
+            <a:miter lim="400000"/>
+          </a:ln>
+        </p:spPr>
+      </p:pic>
       <p:sp>
         <p:nvSpPr>
           <p:cNvPr id="2" name="Title 1">
@@ -4587,6 +5064,42 @@
           </a:p>
         </p:txBody>
       </p:sp>
+      <p:pic>
+        <p:nvPicPr>
+          <p:cNvPr id="4" name="Graphic 3">
+            <a:extLst>
+              <a:ext uri="{FF2B5EF4-FFF2-40B4-BE49-F238E27FC236}">
+                <a16:creationId xmlns:a16="http://schemas.microsoft.com/office/drawing/2014/main" id="{F23A4ACD-8AC9-D319-9CB0-E180645E02F6}"/>
+              </a:ext>
+            </a:extLst>
+          </p:cNvPr>
+          <p:cNvPicPr>
+            <a:picLocks noChangeAspect="1"/>
+          </p:cNvPicPr>
+          <p:nvPr/>
+        </p:nvPicPr>
+        <p:blipFill>
+          <a:blip>
+            <a:extLst>
+              <a:ext uri="{96DAC541-7B7A-43D3-8B79-37D633B846F1}">
+                <asvg:svgBlip xmlns:asvg="http://schemas.microsoft.com/office/drawing/2016/SVG/main" r:embed="rId3"/>
+              </a:ext>
+            </a:extLst>
+          </a:blip>
+          <a:stretch>
+            <a:fillRect/>
+          </a:stretch>
+        </p:blipFill>
+        <p:spPr>
+          <a:xfrm>
+            <a:off x="9406635" y="5371200"/>
+            <a:ext cx="1982400" cy="1486800"/>
+          </a:xfrm>
+          <a:prstGeom prst="rect">
+            <a:avLst/>
+          </a:prstGeom>
+        </p:spPr>
+      </p:pic>
     </p:spTree>
     <p:extLst>
       <p:ext uri="{BB962C8B-B14F-4D97-AF65-F5344CB8AC3E}">
@@ -4625,6 +5138,41 @@
           <a:chExt cx="0" cy="0"/>
         </a:xfrm>
       </p:grpSpPr>
+      <p:sp>
+        <p:nvSpPr>
+          <p:cNvPr id="2" name="Title 1">
+            <a:extLst>
+              <a:ext uri="{FF2B5EF4-FFF2-40B4-BE49-F238E27FC236}">
+                <a16:creationId xmlns:a16="http://schemas.microsoft.com/office/drawing/2014/main" id="{162D8B7C-C2C6-3188-7B8A-4A0654FFAA23}"/>
+              </a:ext>
+            </a:extLst>
+          </p:cNvPr>
+          <p:cNvSpPr>
+            <a:spLocks noGrp="1"/>
+          </p:cNvSpPr>
+          <p:nvPr>
+            <p:ph type="title"/>
+          </p:nvPr>
+        </p:nvSpPr>
+        <p:spPr>
+          <a:xfrm>
+            <a:off x="268703" y="2672176"/>
+            <a:ext cx="3693305" cy="658853"/>
+          </a:xfrm>
+        </p:spPr>
+        <p:txBody>
+          <a:bodyPr vert="horz" lIns="91440" tIns="45720" rIns="91440" bIns="45720" rtlCol="0" anchor="t">
+            <a:normAutofit/>
+          </a:bodyPr>
+          <a:lstStyle/>
+          <a:p>
+            <a:r>
+              <a:rPr lang="en-US" sz="4000" dirty="0"/>
+              <a:t>HLD</a:t>
+            </a:r>
+          </a:p>
+        </p:txBody>
+      </p:sp>
       <p:pic>
         <p:nvPicPr>
           <p:cNvPr id="5" name="Content Placeholder 4">
@@ -4663,41 +5211,42 @@
           </a:prstGeom>
         </p:spPr>
       </p:pic>
-      <p:sp>
-        <p:nvSpPr>
-          <p:cNvPr id="2" name="Title 1">
+      <p:pic>
+        <p:nvPicPr>
+          <p:cNvPr id="3" name="Graphic 2">
             <a:extLst>
               <a:ext uri="{FF2B5EF4-FFF2-40B4-BE49-F238E27FC236}">
-                <a16:creationId xmlns:a16="http://schemas.microsoft.com/office/drawing/2014/main" id="{162D8B7C-C2C6-3188-7B8A-4A0654FFAA23}"/>
+                <a16:creationId xmlns:a16="http://schemas.microsoft.com/office/drawing/2014/main" id="{58D8BFF9-7A47-B5A5-506A-099B8E3C75B7}"/>
               </a:ext>
             </a:extLst>
           </p:cNvPr>
-          <p:cNvSpPr>
-            <a:spLocks noGrp="1"/>
-          </p:cNvSpPr>
-          <p:nvPr>
-            <p:ph type="title"/>
-          </p:nvPr>
-        </p:nvSpPr>
+          <p:cNvPicPr>
+            <a:picLocks noChangeAspect="1"/>
+          </p:cNvPicPr>
+          <p:nvPr/>
+        </p:nvPicPr>
+        <p:blipFill>
+          <a:blip>
+            <a:extLst>
+              <a:ext uri="{96DAC541-7B7A-43D3-8B79-37D633B846F1}">
+                <asvg:svgBlip xmlns:asvg="http://schemas.microsoft.com/office/drawing/2016/SVG/main" r:embed="rId3"/>
+              </a:ext>
+            </a:extLst>
+          </a:blip>
+          <a:stretch>
+            <a:fillRect/>
+          </a:stretch>
+        </p:blipFill>
         <p:spPr>
           <a:xfrm>
-            <a:off x="268703" y="2672176"/>
-            <a:ext cx="3693305" cy="658853"/>
+            <a:off x="425921" y="-126086"/>
+            <a:ext cx="1982400" cy="1486800"/>
           </a:xfrm>
+          <a:prstGeom prst="rect">
+            <a:avLst/>
+          </a:prstGeom>
         </p:spPr>
-        <p:txBody>
-          <a:bodyPr vert="horz" lIns="91440" tIns="45720" rIns="91440" bIns="45720" rtlCol="0" anchor="t">
-            <a:normAutofit/>
-          </a:bodyPr>
-          <a:lstStyle/>
-          <a:p>
-            <a:r>
-              <a:rPr lang="en-US" sz="4000" dirty="0"/>
-              <a:t>HLD</a:t>
-            </a:r>
-          </a:p>
-        </p:txBody>
-      </p:sp>
+      </p:pic>
     </p:spTree>
     <p:extLst>
       <p:ext uri="{BB962C8B-B14F-4D97-AF65-F5344CB8AC3E}">
@@ -4813,6 +5362,42 @@
               </a:srgbClr>
             </a:outerShdw>
           </a:effectLst>
+        </p:spPr>
+      </p:pic>
+      <p:pic>
+        <p:nvPicPr>
+          <p:cNvPr id="3" name="Graphic 2">
+            <a:extLst>
+              <a:ext uri="{FF2B5EF4-FFF2-40B4-BE49-F238E27FC236}">
+                <a16:creationId xmlns:a16="http://schemas.microsoft.com/office/drawing/2014/main" id="{0C8AA37C-1BFA-DE8E-E3B1-57951782D960}"/>
+              </a:ext>
+            </a:extLst>
+          </p:cNvPr>
+          <p:cNvPicPr>
+            <a:picLocks noChangeAspect="1"/>
+          </p:cNvPicPr>
+          <p:nvPr/>
+        </p:nvPicPr>
+        <p:blipFill>
+          <a:blip>
+            <a:extLst>
+              <a:ext uri="{96DAC541-7B7A-43D3-8B79-37D633B846F1}">
+                <asvg:svgBlip xmlns:asvg="http://schemas.microsoft.com/office/drawing/2016/SVG/main" r:embed="rId3"/>
+              </a:ext>
+            </a:extLst>
+          </a:blip>
+          <a:stretch>
+            <a:fillRect/>
+          </a:stretch>
+        </p:blipFill>
+        <p:spPr>
+          <a:xfrm>
+            <a:off x="425921" y="-126086"/>
+            <a:ext cx="1982400" cy="1486800"/>
+          </a:xfrm>
+          <a:prstGeom prst="rect">
+            <a:avLst/>
+          </a:prstGeom>
         </p:spPr>
       </p:pic>
     </p:spTree>
@@ -4930,6 +5515,42 @@
               </a:srgbClr>
             </a:outerShdw>
           </a:effectLst>
+        </p:spPr>
+      </p:pic>
+      <p:pic>
+        <p:nvPicPr>
+          <p:cNvPr id="3" name="Graphic 2">
+            <a:extLst>
+              <a:ext uri="{FF2B5EF4-FFF2-40B4-BE49-F238E27FC236}">
+                <a16:creationId xmlns:a16="http://schemas.microsoft.com/office/drawing/2014/main" id="{5CD8965D-8D7C-834D-09C9-E8531E92C9DF}"/>
+              </a:ext>
+            </a:extLst>
+          </p:cNvPr>
+          <p:cNvPicPr>
+            <a:picLocks noChangeAspect="1"/>
+          </p:cNvPicPr>
+          <p:nvPr/>
+        </p:nvPicPr>
+        <p:blipFill>
+          <a:blip>
+            <a:extLst>
+              <a:ext uri="{96DAC541-7B7A-43D3-8B79-37D633B846F1}">
+                <asvg:svgBlip xmlns:asvg="http://schemas.microsoft.com/office/drawing/2016/SVG/main" r:embed="rId3"/>
+              </a:ext>
+            </a:extLst>
+          </a:blip>
+          <a:stretch>
+            <a:fillRect/>
+          </a:stretch>
+        </p:blipFill>
+        <p:spPr>
+          <a:xfrm>
+            <a:off x="425921" y="-126086"/>
+            <a:ext cx="1982400" cy="1486800"/>
+          </a:xfrm>
+          <a:prstGeom prst="rect">
+            <a:avLst/>
+          </a:prstGeom>
         </p:spPr>
       </p:pic>
     </p:spTree>
